--- a/slm.pptx
+++ b/slm.pptx
@@ -4,18 +4,19 @@
   <p:sldMasterIdLst>
     <p:sldMasterId id="2147483648" r:id="rId1"/>
   </p:sldMasterIdLst>
+  <p:notesMasterIdLst>
+    <p:notesMasterId r:id="rId10"/>
+  </p:notesMasterIdLst>
   <p:sldIdLst>
     <p:sldId id="256" r:id="rId2"/>
     <p:sldId id="257" r:id="rId3"/>
     <p:sldId id="258" r:id="rId4"/>
     <p:sldId id="259" r:id="rId5"/>
-    <p:sldId id="260" r:id="rId6"/>
-    <p:sldId id="261" r:id="rId7"/>
-    <p:sldId id="262" r:id="rId8"/>
+    <p:sldId id="263" r:id="rId6"/>
+    <p:sldId id="260" r:id="rId7"/>
+    <p:sldId id="261" r:id="rId8"/>
+    <p:sldId id="262" r:id="rId9"/>
   </p:sldIdLst>
-  <p:notesMasterIdLst>
-    <p:notesMasterId r:id="rId9"/>
-  </p:notesMasterIdLst>
   <p:sldSz cx="12192000" cy="6858000"/>
   <p:notesSz cx="6858000" cy="12192000"/>
   <p:defaultTextStyle>
@@ -110,6 +111,11 @@
       </a:defRPr>
     </a:lvl9pPr>
   </p:defaultTextStyle>
+  <p:extLst>
+    <p:ext uri="{EFAFB233-063F-42B5-8137-9DF3F51BA10A}">
+      <p15:sldGuideLst xmlns:p15="http://schemas.microsoft.com/office/powerpoint/2012/main"/>
+    </p:ext>
+  </p:extLst>
 </p:presentation>
 </file>
 
@@ -135,234 +141,10 @@
           <a:chExt cx="0" cy="0"/>
         </a:xfrm>
       </p:grpSpPr>
-      <p:sp>
-        <p:nvSpPr>
-          <p:cNvPr id="2" name="Header Placeholder 1"/>
-          <p:cNvSpPr>
-            <a:spLocks noGrp="1"/>
-          </p:cNvSpPr>
-          <p:nvPr>
-            <p:ph type="hdr" sz="quarter"/>
-          </p:nvPr>
-        </p:nvSpPr>
-        <p:spPr>
-          <a:xfrm>
-            <a:off x="0" y="0"/>
-            <a:ext cx="2971800" cy="458788"/>
-          </a:xfrm>
-          <a:prstGeom prst="rect">
-            <a:avLst/>
-          </a:prstGeom>
-        </p:spPr>
-        <p:txBody>
-          <a:bodyPr vert="horz" lIns="91440" tIns="45720" rIns="91440" bIns="45720" rtlCol="0"/>
-          <a:lstStyle>
-            <a:lvl1pPr algn="l">
-              <a:defRPr sz="1200"/>
-            </a:lvl1pPr>
-          </a:lstStyle>
-          <a:p>
-            <a:endParaRPr lang="en-US"/>
-          </a:p>
-        </p:txBody>
-      </p:sp>
-      <p:sp>
-        <p:nvSpPr>
-          <p:cNvPr id="3" name="Date Placeholder 2"/>
-          <p:cNvSpPr>
-            <a:spLocks noGrp="1"/>
-          </p:cNvSpPr>
-          <p:nvPr>
-            <p:ph type="dt" idx="1"/>
-          </p:nvPr>
-        </p:nvSpPr>
-        <p:spPr>
-          <a:xfrm>
-            <a:off x="3884613" y="0"/>
-            <a:ext cx="2971800" cy="458788"/>
-          </a:xfrm>
-          <a:prstGeom prst="rect">
-            <a:avLst/>
-          </a:prstGeom>
-        </p:spPr>
-        <p:txBody>
-          <a:bodyPr vert="horz" lIns="91440" tIns="45720" rIns="91440" bIns="45720" rtlCol="0"/>
-          <a:lstStyle>
-            <a:lvl1pPr algn="r">
-              <a:defRPr sz="1200"/>
-            </a:lvl1pPr>
-          </a:lstStyle>
-          <a:p>
-            <a:fld id="{5282F153-3F37-0F45-9E97-73ACFA13230C}" type="datetimeFigureOut">
-              <a:rPr lang="en-US"/>
-              <a:t>7/23/19</a:t>
-            </a:fld>
-            <a:endParaRPr lang="en-US"/>
-          </a:p>
-        </p:txBody>
-      </p:sp>
-      <p:sp>
-        <p:nvSpPr>
-          <p:cNvPr id="4" name="Slide Image Placeholder 3"/>
-          <p:cNvSpPr>
-            <a:spLocks noGrp="1" noRot="1" noChangeAspect="1"/>
-          </p:cNvSpPr>
-          <p:nvPr>
-            <p:ph type="sldImg" idx="2"/>
-          </p:nvPr>
-        </p:nvSpPr>
-        <p:spPr>
-          <a:xfrm>
-            <a:off x="685800" y="1143000"/>
-            <a:ext cx="5486400" cy="3086100"/>
-          </a:xfrm>
-          <a:prstGeom prst="rect">
-            <a:avLst/>
-          </a:prstGeom>
-          <a:noFill/>
-          <a:ln w="12700">
-            <a:solidFill>
-              <a:prstClr val="black"/>
-            </a:solidFill>
-          </a:ln>
-        </p:spPr>
-        <p:txBody>
-          <a:bodyPr vert="horz" lIns="91440" tIns="45720" rIns="91440" bIns="45720" rtlCol="0" anchor="ctr"/>
-          <a:lstStyle/>
-          <a:p>
-            <a:endParaRPr lang="en-US"/>
-          </a:p>
-        </p:txBody>
-      </p:sp>
-      <p:sp>
-        <p:nvSpPr>
-          <p:cNvPr id="5" name="Notes Placeholder 4"/>
-          <p:cNvSpPr>
-            <a:spLocks noGrp="1"/>
-          </p:cNvSpPr>
-          <p:nvPr>
-            <p:ph type="body" sz="quarter" idx="3"/>
-          </p:nvPr>
-        </p:nvSpPr>
-        <p:spPr>
-          <a:xfrm>
-            <a:off x="685800" y="4400550"/>
-            <a:ext cx="5486400" cy="3600450"/>
-          </a:xfrm>
-          <a:prstGeom prst="rect">
-            <a:avLst/>
-          </a:prstGeom>
-        </p:spPr>
-        <p:txBody>
-          <a:bodyPr vert="horz" lIns="91440" tIns="45720" rIns="91440" bIns="45720" rtlCol="0"/>
-          <a:lstStyle/>
-          <a:p>
-            <a:pPr lvl="0"/>
-            <a:r>
-              <a:rPr lang="en-US"/>
-              <a:t>Click to edit Master text styles</a:t>
-            </a:r>
-          </a:p>
-          <a:p>
-            <a:pPr lvl="1"/>
-            <a:r>
-              <a:rPr lang="en-US"/>
-              <a:t>Second level</a:t>
-            </a:r>
-          </a:p>
-          <a:p>
-            <a:pPr lvl="2"/>
-            <a:r>
-              <a:rPr lang="en-US"/>
-              <a:t>Third level</a:t>
-            </a:r>
-          </a:p>
-          <a:p>
-            <a:pPr lvl="3"/>
-            <a:r>
-              <a:rPr lang="en-US"/>
-              <a:t>Fourth level</a:t>
-            </a:r>
-          </a:p>
-          <a:p>
-            <a:pPr lvl="4"/>
-            <a:r>
-              <a:rPr lang="en-US"/>
-              <a:t>Fifth level</a:t>
-            </a:r>
-          </a:p>
-        </p:txBody>
-      </p:sp>
-      <p:sp>
-        <p:nvSpPr>
-          <p:cNvPr id="6" name="Footer Placeholder 5"/>
-          <p:cNvSpPr>
-            <a:spLocks noGrp="1"/>
-          </p:cNvSpPr>
-          <p:nvPr>
-            <p:ph type="ftr" sz="quarter" idx="4"/>
-          </p:nvPr>
-        </p:nvSpPr>
-        <p:spPr>
-          <a:xfrm>
-            <a:off x="0" y="8685213"/>
-            <a:ext cx="2971800" cy="458787"/>
-          </a:xfrm>
-          <a:prstGeom prst="rect">
-            <a:avLst/>
-          </a:prstGeom>
-        </p:spPr>
-        <p:txBody>
-          <a:bodyPr vert="horz" lIns="91440" tIns="45720" rIns="91440" bIns="45720" rtlCol="0" anchor="b"/>
-          <a:lstStyle>
-            <a:lvl1pPr algn="l">
-              <a:defRPr sz="1200"/>
-            </a:lvl1pPr>
-          </a:lstStyle>
-          <a:p>
-            <a:endParaRPr lang="en-US"/>
-          </a:p>
-        </p:txBody>
-      </p:sp>
-      <p:sp>
-        <p:nvSpPr>
-          <p:cNvPr id="7" name="Slide Number Placeholder 6"/>
-          <p:cNvSpPr>
-            <a:spLocks noGrp="1"/>
-          </p:cNvSpPr>
-          <p:nvPr>
-            <p:ph type="sldNum" sz="quarter" idx="5"/>
-          </p:nvPr>
-        </p:nvSpPr>
-        <p:spPr>
-          <a:xfrm>
-            <a:off x="3884613" y="8685213"/>
-            <a:ext cx="2971800" cy="458787"/>
-          </a:xfrm>
-          <a:prstGeom prst="rect">
-            <a:avLst/>
-          </a:prstGeom>
-        </p:spPr>
-        <p:txBody>
-          <a:bodyPr vert="horz" lIns="91440" tIns="45720" rIns="91440" bIns="45720" rtlCol="0" anchor="b"/>
-          <a:lstStyle>
-            <a:lvl1pPr algn="r">
-              <a:defRPr sz="1200"/>
-            </a:lvl1pPr>
-          </a:lstStyle>
-          <a:p>
-            <a:fld id="{CE5E9CC1-C706-0F49-92D6-E571CC5EEA8F}" type="slidenum">
-              <a:rPr lang="en-US"/>
-              <a:t>‹#›</a:t>
-            </a:fld>
-            <a:endParaRPr lang="en-US"/>
-          </a:p>
-        </p:txBody>
-      </p:sp>
     </p:spTree>
     <p:extLst>
       <p:ext uri="{BB962C8B-B14F-4D97-AF65-F5344CB8AC3E}">
-        <p14:creationId xmlns:p14="http://schemas.microsoft.com/office/powerpoint/2010/main" val="1024086991"/>
+        <p14:creationId xmlns:p14="http://schemas.microsoft.com/office/powerpoint/2010/main" val="1260797172"/>
       </p:ext>
     </p:extLst>
   </p:cSld>
@@ -506,10 +288,6 @@
           <a:bodyPr/>
           <a:lstStyle/>
           <a:p>
-            <a:r>
-              <a:rPr lang="en-US" dirty="0"/>
-              <a:t/>
-            </a:r>
             <a:endParaRPr lang="en-US" dirty="0"/>
           </a:p>
         </p:txBody>
@@ -594,10 +372,6 @@
           <a:bodyPr/>
           <a:lstStyle/>
           <a:p>
-            <a:r>
-              <a:rPr lang="en-US" dirty="0"/>
-              <a:t/>
-            </a:r>
             <a:endParaRPr lang="en-US" dirty="0"/>
           </a:p>
         </p:txBody>
@@ -682,10 +456,6 @@
           <a:bodyPr/>
           <a:lstStyle/>
           <a:p>
-            <a:r>
-              <a:rPr lang="en-US" dirty="0"/>
-              <a:t/>
-            </a:r>
             <a:endParaRPr lang="en-US" dirty="0"/>
           </a:p>
         </p:txBody>
@@ -770,10 +540,6 @@
           <a:bodyPr/>
           <a:lstStyle/>
           <a:p>
-            <a:r>
-              <a:rPr lang="en-US" dirty="0"/>
-              <a:t/>
-            </a:r>
             <a:endParaRPr lang="en-US" dirty="0"/>
           </a:p>
         </p:txBody>
@@ -819,7 +585,13 @@
   <p:cSld>
     <p:spTree>
       <p:nvGrpSpPr>
-        <p:cNvPr id="1" name=""/>
+        <p:cNvPr id="1" name="">
+          <a:extLst>
+            <a:ext uri="{FF2B5EF4-FFF2-40B4-BE49-F238E27FC236}">
+              <a16:creationId xmlns:a16="http://schemas.microsoft.com/office/drawing/2014/main" id="{91D4DA88-9C5F-3595-5FF2-8086C070DDEA}"/>
+            </a:ext>
+          </a:extLst>
+        </p:cNvPr>
         <p:cNvGrpSpPr/>
         <p:nvPr/>
       </p:nvGrpSpPr>
@@ -833,7 +605,13 @@
       </p:grpSpPr>
       <p:sp>
         <p:nvSpPr>
-          <p:cNvPr id="2" name="Slide Image Placeholder 1"/>
+          <p:cNvPr id="2" name="Slide Image Placeholder 1">
+            <a:extLst>
+              <a:ext uri="{FF2B5EF4-FFF2-40B4-BE49-F238E27FC236}">
+                <a16:creationId xmlns:a16="http://schemas.microsoft.com/office/drawing/2014/main" id="{DEE8F2EE-832B-4C3B-88D5-9F7CE4C25466}"/>
+              </a:ext>
+            </a:extLst>
+          </p:cNvPr>
           <p:cNvSpPr>
             <a:spLocks noGrp="1" noRot="1" noChangeAspect="1"/>
           </p:cNvSpPr>
@@ -845,7 +623,13 @@
       </p:sp>
       <p:sp>
         <p:nvSpPr>
-          <p:cNvPr id="3" name="Notes Placeholder 2"/>
+          <p:cNvPr id="3" name="Notes Placeholder 2">
+            <a:extLst>
+              <a:ext uri="{FF2B5EF4-FFF2-40B4-BE49-F238E27FC236}">
+                <a16:creationId xmlns:a16="http://schemas.microsoft.com/office/drawing/2014/main" id="{89D83DEF-BEB5-0D4B-4371-8FA36643AB85}"/>
+              </a:ext>
+            </a:extLst>
+          </p:cNvPr>
           <p:cNvSpPr>
             <a:spLocks noGrp="1"/>
           </p:cNvSpPr>
@@ -858,17 +642,19 @@
           <a:bodyPr/>
           <a:lstStyle/>
           <a:p>
-            <a:r>
-              <a:rPr lang="en-US" dirty="0"/>
-              <a:t/>
-            </a:r>
             <a:endParaRPr lang="en-US" dirty="0"/>
           </a:p>
         </p:txBody>
       </p:sp>
       <p:sp>
         <p:nvSpPr>
-          <p:cNvPr id="4" name="Slide Number Placeholder 3"/>
+          <p:cNvPr id="4" name="Slide Number Placeholder 3">
+            <a:extLst>
+              <a:ext uri="{FF2B5EF4-FFF2-40B4-BE49-F238E27FC236}">
+                <a16:creationId xmlns:a16="http://schemas.microsoft.com/office/drawing/2014/main" id="{561DA63D-DEC0-5E33-8330-B5D7E8D6F792}"/>
+              </a:ext>
+            </a:extLst>
+          </p:cNvPr>
           <p:cNvSpPr>
             <a:spLocks noGrp="1"/>
           </p:cNvSpPr>
@@ -892,7 +678,7 @@
     </p:spTree>
     <p:extLst>
       <p:ext uri="{BB962C8B-B14F-4D97-AF65-F5344CB8AC3E}">
-        <p14:creationId xmlns:p14="http://schemas.microsoft.com/office/powerpoint/2010/main" val="1024086991"/>
+        <p14:creationId xmlns:p14="http://schemas.microsoft.com/office/powerpoint/2010/main" val="84379563"/>
       </p:ext>
     </p:extLst>
   </p:cSld>
@@ -946,10 +732,6 @@
           <a:bodyPr/>
           <a:lstStyle/>
           <a:p>
-            <a:r>
-              <a:rPr lang="en-US" dirty="0"/>
-              <a:t/>
-            </a:r>
             <a:endParaRPr lang="en-US" dirty="0"/>
           </a:p>
         </p:txBody>
@@ -1034,10 +816,6 @@
           <a:bodyPr/>
           <a:lstStyle/>
           <a:p>
-            <a:r>
-              <a:rPr lang="en-US" dirty="0"/>
-              <a:t/>
-            </a:r>
             <a:endParaRPr lang="en-US" dirty="0"/>
           </a:p>
         </p:txBody>
@@ -1060,6 +838,90 @@
             <a:fld id="{F7021451-1387-4CA6-816F-3879F97B5CBC}" type="slidenum">
               <a:rPr lang="en-US"/>
               <a:t>7</a:t>
+            </a:fld>
+            <a:endParaRPr lang="en-US"/>
+          </a:p>
+        </p:txBody>
+      </p:sp>
+    </p:spTree>
+    <p:extLst>
+      <p:ext uri="{BB962C8B-B14F-4D97-AF65-F5344CB8AC3E}">
+        <p14:creationId xmlns:p14="http://schemas.microsoft.com/office/powerpoint/2010/main" val="1024086991"/>
+      </p:ext>
+    </p:extLst>
+  </p:cSld>
+  <p:clrMapOvr>
+    <a:masterClrMapping/>
+  </p:clrMapOvr>
+</p:notes>
+</file>
+
+<file path=ppt/notesSlides/notesSlide8.xml><?xml version="1.0" encoding="utf-8"?>
+<p:notes xmlns:a="http://schemas.openxmlformats.org/drawingml/2006/main" xmlns:r="http://schemas.openxmlformats.org/officeDocument/2006/relationships" xmlns:p="http://schemas.openxmlformats.org/presentationml/2006/main">
+  <p:cSld>
+    <p:spTree>
+      <p:nvGrpSpPr>
+        <p:cNvPr id="1" name=""/>
+        <p:cNvGrpSpPr/>
+        <p:nvPr/>
+      </p:nvGrpSpPr>
+      <p:grpSpPr>
+        <a:xfrm>
+          <a:off x="0" y="0"/>
+          <a:ext cx="0" cy="0"/>
+          <a:chOff x="0" y="0"/>
+          <a:chExt cx="0" cy="0"/>
+        </a:xfrm>
+      </p:grpSpPr>
+      <p:sp>
+        <p:nvSpPr>
+          <p:cNvPr id="2" name="Slide Image Placeholder 1"/>
+          <p:cNvSpPr>
+            <a:spLocks noGrp="1" noRot="1" noChangeAspect="1"/>
+          </p:cNvSpPr>
+          <p:nvPr>
+            <p:ph type="sldImg"/>
+          </p:nvPr>
+        </p:nvSpPr>
+        <p:spPr/>
+      </p:sp>
+      <p:sp>
+        <p:nvSpPr>
+          <p:cNvPr id="3" name="Notes Placeholder 2"/>
+          <p:cNvSpPr>
+            <a:spLocks noGrp="1"/>
+          </p:cNvSpPr>
+          <p:nvPr>
+            <p:ph type="body" idx="1"/>
+          </p:nvPr>
+        </p:nvSpPr>
+        <p:spPr/>
+        <p:txBody>
+          <a:bodyPr/>
+          <a:lstStyle/>
+          <a:p>
+            <a:endParaRPr lang="en-US" dirty="0"/>
+          </a:p>
+        </p:txBody>
+      </p:sp>
+      <p:sp>
+        <p:nvSpPr>
+          <p:cNvPr id="4" name="Slide Number Placeholder 3"/>
+          <p:cNvSpPr>
+            <a:spLocks noGrp="1"/>
+          </p:cNvSpPr>
+          <p:nvPr>
+            <p:ph type="sldNum" sz="quarter" idx="10"/>
+          </p:nvPr>
+        </p:nvSpPr>
+        <p:spPr/>
+        <p:txBody>
+          <a:bodyPr/>
+          <a:lstStyle/>
+          <a:p>
+            <a:fld id="{F7021451-1387-4CA6-816F-3879F97B5CBC}" type="slidenum">
+              <a:rPr lang="en-US"/>
+              <a:t>8</a:t>
             </a:fld>
             <a:endParaRPr lang="en-US"/>
           </a:p>
@@ -1111,6 +973,11 @@
 <file path=ppt/slideMasters/slideMaster1.xml><?xml version="1.0" encoding="utf-8"?>
 <p:sldMaster xmlns:a="http://schemas.openxmlformats.org/drawingml/2006/main" xmlns:r="http://schemas.openxmlformats.org/officeDocument/2006/relationships" xmlns:p="http://schemas.openxmlformats.org/presentationml/2006/main">
   <p:cSld>
+    <p:bg>
+      <p:bgRef idx="1001">
+        <a:schemeClr val="bg1"/>
+      </p:bgRef>
+    </p:bg>
     <p:spTree>
       <p:nvGrpSpPr>
         <p:cNvPr id="1" name=""/>
@@ -1393,6 +1260,7 @@
         <a:solidFill>
           <a:srgbClr val="21295C"/>
         </a:solidFill>
+        <a:effectLst/>
       </p:bgPr>
     </p:bg>
     <p:spTree>
@@ -1428,17 +1296,24 @@
           </a:solidFill>
           <a:ln/>
         </p:spPr>
+        <p:txBody>
+          <a:bodyPr/>
+          <a:lstStyle/>
+          <a:p>
+            <a:endParaRPr lang="en-US"/>
+          </a:p>
+        </p:txBody>
       </p:sp>
       <p:pic>
         <p:nvPicPr>
-          <p:cNvPr id="3" name="Image 0" descr="icons/robot.png">    </p:cNvPr>
+          <p:cNvPr id="3" name="Image 0" descr="icons/robot.png"/>
           <p:cNvPicPr>
             <a:picLocks noChangeAspect="1"/>
           </p:cNvPicPr>
           <p:nvPr/>
         </p:nvPicPr>
         <p:blipFill>
-          <a:blip r:embed="rId1"/>
+          <a:blip r:embed="rId3"/>
           <a:stretch>
             <a:fillRect/>
           </a:stretch>
@@ -1474,7 +1349,7 @@
           <a:bodyPr wrap="square" rtlCol="0" anchor="ctr"/>
           <a:lstStyle/>
           <a:p>
-            <a:pPr algn="ctr" indent="0" marL="0">
+            <a:pPr marL="0" indent="0" algn="ctr">
               <a:buNone/>
             </a:pPr>
             <a:r>
@@ -1513,7 +1388,7 @@
           <a:bodyPr wrap="square" rtlCol="0" anchor="ctr"/>
           <a:lstStyle/>
           <a:p>
-            <a:pPr algn="ctr" indent="0" marL="0">
+            <a:pPr marL="0" indent="0" algn="ctr">
               <a:buNone/>
             </a:pPr>
             <a:r>
@@ -1553,6 +1428,13 @@
             <a:prstDash val="solid"/>
           </a:ln>
         </p:spPr>
+        <p:txBody>
+          <a:bodyPr/>
+          <a:lstStyle/>
+          <a:p>
+            <a:endParaRPr lang="en-US"/>
+          </a:p>
+        </p:txBody>
       </p:sp>
       <p:sp>
         <p:nvSpPr>
@@ -1575,7 +1457,7 @@
           <a:bodyPr wrap="square" rtlCol="0" anchor="ctr"/>
           <a:lstStyle/>
           <a:p>
-            <a:pPr algn="ctr" indent="0" marL="0">
+            <a:pPr marL="0" indent="0" algn="ctr">
               <a:lnSpc>
                 <a:spcPts val="2000"/>
               </a:lnSpc>
@@ -1595,7 +1477,7 @@
             <a:endParaRPr lang="en-US" sz="1400" dirty="0"/>
           </a:p>
           <a:p>
-            <a:pPr algn="ctr" indent="0" marL="0">
+            <a:pPr marL="0" indent="0" algn="ctr">
               <a:lnSpc>
                 <a:spcPts val="2000"/>
               </a:lnSpc>
@@ -1632,6 +1514,7 @@
         <a:solidFill>
           <a:srgbClr val="FFFFFF"/>
         </a:solidFill>
+        <a:effectLst/>
       </p:bgPr>
     </p:bg>
     <p:spTree>
@@ -1667,17 +1550,24 @@
           </a:solidFill>
           <a:ln/>
         </p:spPr>
+        <p:txBody>
+          <a:bodyPr/>
+          <a:lstStyle/>
+          <a:p>
+            <a:endParaRPr lang="en-US"/>
+          </a:p>
+        </p:txBody>
       </p:sp>
       <p:pic>
         <p:nvPicPr>
-          <p:cNvPr id="3" name="Image 0" descr="icons/microchip.png">    </p:cNvPr>
+          <p:cNvPr id="3" name="Image 0" descr="icons/microchip.png"/>
           <p:cNvPicPr>
             <a:picLocks noChangeAspect="1"/>
           </p:cNvPicPr>
           <p:nvPr/>
         </p:nvPicPr>
         <p:blipFill>
-          <a:blip r:embed="rId1"/>
+          <a:blip r:embed="rId3"/>
           <a:stretch>
             <a:fillRect/>
           </a:stretch>
@@ -1713,7 +1603,7 @@
           <a:bodyPr wrap="square" rtlCol="0" anchor="ctr"/>
           <a:lstStyle/>
           <a:p>
-            <a:pPr indent="0" marL="0">
+            <a:pPr marL="0" indent="0">
               <a:buNone/>
             </a:pPr>
             <a:r>
@@ -1752,7 +1642,7 @@
           <a:bodyPr wrap="square" rtlCol="0" anchor="ctr"/>
           <a:lstStyle/>
           <a:p>
-            <a:pPr indent="0" marL="0">
+            <a:pPr marL="0" indent="0">
               <a:lnSpc>
                 <a:spcPts val="2200"/>
               </a:lnSpc>
@@ -1792,6 +1682,13 @@
           </a:solidFill>
           <a:ln/>
         </p:spPr>
+        <p:txBody>
+          <a:bodyPr/>
+          <a:lstStyle/>
+          <a:p>
+            <a:endParaRPr lang="en-US"/>
+          </a:p>
+        </p:txBody>
       </p:sp>
       <p:sp>
         <p:nvSpPr>
@@ -1814,7 +1711,7 @@
           <a:bodyPr wrap="square" rtlCol="0" anchor="ctr"/>
           <a:lstStyle/>
           <a:p>
-            <a:pPr indent="0" marL="0">
+            <a:pPr marL="0" indent="0">
               <a:buNone/>
             </a:pPr>
             <a:r>
@@ -1853,7 +1750,7 @@
           <a:bodyPr wrap="square" rtlCol="0" anchor="ctr"/>
           <a:lstStyle/>
           <a:p>
-            <a:pPr indent="0" marL="0">
+            <a:pPr marL="0" indent="0">
               <a:lnSpc>
                 <a:spcPts val="1600"/>
               </a:lnSpc>
@@ -1893,6 +1790,13 @@
           </a:solidFill>
           <a:ln/>
         </p:spPr>
+        <p:txBody>
+          <a:bodyPr/>
+          <a:lstStyle/>
+          <a:p>
+            <a:endParaRPr lang="en-US"/>
+          </a:p>
+        </p:txBody>
       </p:sp>
       <p:sp>
         <p:nvSpPr>
@@ -1915,7 +1819,7 @@
           <a:bodyPr wrap="square" rtlCol="0" anchor="ctr"/>
           <a:lstStyle/>
           <a:p>
-            <a:pPr indent="0" marL="0">
+            <a:pPr marL="0" indent="0">
               <a:buNone/>
             </a:pPr>
             <a:r>
@@ -1954,7 +1858,7 @@
           <a:bodyPr wrap="square" rtlCol="0" anchor="ctr"/>
           <a:lstStyle/>
           <a:p>
-            <a:pPr indent="0" marL="0">
+            <a:pPr marL="0" indent="0">
               <a:lnSpc>
                 <a:spcPts val="1600"/>
               </a:lnSpc>
@@ -1994,6 +1898,13 @@
           </a:solidFill>
           <a:ln/>
         </p:spPr>
+        <p:txBody>
+          <a:bodyPr/>
+          <a:lstStyle/>
+          <a:p>
+            <a:endParaRPr lang="en-US"/>
+          </a:p>
+        </p:txBody>
       </p:sp>
       <p:sp>
         <p:nvSpPr>
@@ -2016,7 +1927,7 @@
           <a:bodyPr wrap="square" rtlCol="0" anchor="ctr"/>
           <a:lstStyle/>
           <a:p>
-            <a:pPr indent="0" marL="0">
+            <a:pPr marL="0" indent="0">
               <a:buNone/>
             </a:pPr>
             <a:r>
@@ -2055,7 +1966,7 @@
           <a:bodyPr wrap="square" rtlCol="0" anchor="ctr"/>
           <a:lstStyle/>
           <a:p>
-            <a:pPr indent="0" marL="0">
+            <a:pPr marL="0" indent="0">
               <a:lnSpc>
                 <a:spcPts val="1600"/>
               </a:lnSpc>
@@ -2095,6 +2006,13 @@
           </a:solidFill>
           <a:ln/>
         </p:spPr>
+        <p:txBody>
+          <a:bodyPr/>
+          <a:lstStyle/>
+          <a:p>
+            <a:endParaRPr lang="en-US"/>
+          </a:p>
+        </p:txBody>
       </p:sp>
       <p:sp>
         <p:nvSpPr>
@@ -2117,7 +2035,7 @@
           <a:bodyPr wrap="square" rtlCol="0" anchor="ctr"/>
           <a:lstStyle/>
           <a:p>
-            <a:pPr indent="0" marL="0">
+            <a:pPr marL="0" indent="0">
               <a:buNone/>
             </a:pPr>
             <a:r>
@@ -2156,7 +2074,7 @@
           <a:bodyPr wrap="square" rtlCol="0" anchor="ctr"/>
           <a:lstStyle/>
           <a:p>
-            <a:pPr indent="0" marL="0">
+            <a:pPr marL="0" indent="0">
               <a:lnSpc>
                 <a:spcPts val="1600"/>
               </a:lnSpc>
@@ -2203,6 +2121,13 @@
             <a:prstDash val="solid"/>
           </a:ln>
         </p:spPr>
+        <p:txBody>
+          <a:bodyPr/>
+          <a:lstStyle/>
+          <a:p>
+            <a:endParaRPr lang="en-US"/>
+          </a:p>
+        </p:txBody>
       </p:sp>
       <p:sp>
         <p:nvSpPr>
@@ -2225,7 +2150,7 @@
           <a:bodyPr wrap="square" rtlCol="0" anchor="ctr"/>
           <a:lstStyle/>
           <a:p>
-            <a:pPr algn="ctr" indent="0" marL="0">
+            <a:pPr marL="0" indent="0" algn="ctr">
               <a:buNone/>
             </a:pPr>
             <a:r>
@@ -2264,7 +2189,7 @@
           <a:bodyPr wrap="square" rtlCol="0" anchor="ctr"/>
           <a:lstStyle/>
           <a:p>
-            <a:pPr algn="ctr" indent="0" marL="0">
+            <a:pPr marL="0" indent="0" algn="ctr">
               <a:buNone/>
             </a:pPr>
             <a:r>
@@ -2304,6 +2229,13 @@
             <a:prstDash val="solid"/>
           </a:ln>
         </p:spPr>
+        <p:txBody>
+          <a:bodyPr/>
+          <a:lstStyle/>
+          <a:p>
+            <a:endParaRPr lang="en-US"/>
+          </a:p>
+        </p:txBody>
       </p:sp>
       <p:sp>
         <p:nvSpPr>
@@ -2326,7 +2258,7 @@
           <a:bodyPr wrap="square" rtlCol="0" anchor="ctr"/>
           <a:lstStyle/>
           <a:p>
-            <a:pPr indent="0" marL="0">
+            <a:pPr marL="0" indent="0">
               <a:buNone/>
             </a:pPr>
             <a:r>
@@ -2365,7 +2297,7 @@
           <a:bodyPr wrap="square" rtlCol="0" anchor="ctr"/>
           <a:lstStyle/>
           <a:p>
-            <a:pPr indent="0" marL="0">
+            <a:pPr marL="0" indent="0">
               <a:buNone/>
             </a:pPr>
             <a:r>
@@ -2404,7 +2336,7 @@
           <a:bodyPr wrap="square" rtlCol="0" anchor="ctr"/>
           <a:lstStyle/>
           <a:p>
-            <a:pPr indent="0" marL="0">
+            <a:pPr marL="0" indent="0">
               <a:buNone/>
             </a:pPr>
             <a:r>
@@ -2443,7 +2375,7 @@
           <a:bodyPr wrap="square" rtlCol="0" anchor="ctr"/>
           <a:lstStyle/>
           <a:p>
-            <a:pPr indent="0" marL="0">
+            <a:pPr marL="0" indent="0">
               <a:buNone/>
             </a:pPr>
             <a:r>
@@ -2482,7 +2414,7 @@
           <a:bodyPr wrap="square" rtlCol="0" anchor="ctr"/>
           <a:lstStyle/>
           <a:p>
-            <a:pPr indent="0" marL="0">
+            <a:pPr marL="0" indent="0">
               <a:buNone/>
             </a:pPr>
             <a:r>
@@ -2521,7 +2453,7 @@
           <a:bodyPr wrap="square" rtlCol="0" anchor="ctr"/>
           <a:lstStyle/>
           <a:p>
-            <a:pPr algn="l" indent="0" marL="0">
+            <a:pPr marL="0" indent="0" algn="l">
               <a:buNone/>
             </a:pPr>
             <a:r>
@@ -2560,7 +2492,7 @@
           <a:bodyPr wrap="square" rtlCol="0" anchor="ctr"/>
           <a:lstStyle/>
           <a:p>
-            <a:pPr algn="r" indent="0" marL="0">
+            <a:pPr marL="0" indent="0" algn="r">
               <a:buNone/>
             </a:pPr>
             <a:r>
@@ -2594,6 +2526,7 @@
         <a:solidFill>
           <a:srgbClr val="FFFFFF"/>
         </a:solidFill>
+        <a:effectLst/>
       </p:bgPr>
     </p:bg>
     <p:spTree>
@@ -2629,17 +2562,24 @@
           </a:solidFill>
           <a:ln/>
         </p:spPr>
+        <p:txBody>
+          <a:bodyPr/>
+          <a:lstStyle/>
+          <a:p>
+            <a:endParaRPr lang="en-US"/>
+          </a:p>
+        </p:txBody>
       </p:sp>
       <p:pic>
         <p:nvPicPr>
-          <p:cNvPr id="3" name="Image 0" descr="icons/layers.png">    </p:cNvPr>
+          <p:cNvPr id="3" name="Image 0" descr="icons/layers.png"/>
           <p:cNvPicPr>
             <a:picLocks noChangeAspect="1"/>
           </p:cNvPicPr>
           <p:nvPr/>
         </p:nvPicPr>
         <p:blipFill>
-          <a:blip r:embed="rId1"/>
+          <a:blip r:embed="rId3"/>
           <a:stretch>
             <a:fillRect/>
           </a:stretch>
@@ -2675,7 +2615,7 @@
           <a:bodyPr wrap="square" rtlCol="0" anchor="ctr"/>
           <a:lstStyle/>
           <a:p>
-            <a:pPr indent="0" marL="0">
+            <a:pPr marL="0" indent="0">
               <a:buNone/>
             </a:pPr>
             <a:r>
@@ -2714,7 +2654,7 @@
           <a:bodyPr wrap="square" rtlCol="0" anchor="ctr"/>
           <a:lstStyle/>
           <a:p>
-            <a:pPr indent="0" marL="0">
+            <a:pPr marL="0" indent="0">
               <a:buNone/>
             </a:pPr>
             <a:r>
@@ -2753,6 +2693,13 @@
           </a:solidFill>
           <a:ln/>
         </p:spPr>
+        <p:txBody>
+          <a:bodyPr/>
+          <a:lstStyle/>
+          <a:p>
+            <a:endParaRPr lang="en-US"/>
+          </a:p>
+        </p:txBody>
       </p:sp>
       <p:sp>
         <p:nvSpPr>
@@ -2775,7 +2722,7 @@
           <a:bodyPr wrap="square" rtlCol="0" anchor="ctr"/>
           <a:lstStyle/>
           <a:p>
-            <a:pPr indent="0" marL="0">
+            <a:pPr marL="0" indent="0">
               <a:buNone/>
             </a:pPr>
             <a:r>
@@ -2814,7 +2761,7 @@
           <a:bodyPr wrap="square" rtlCol="0" anchor="ctr"/>
           <a:lstStyle/>
           <a:p>
-            <a:pPr indent="0" marL="0">
+            <a:pPr marL="0" indent="0">
               <a:buNone/>
             </a:pPr>
             <a:r>
@@ -2853,7 +2800,7 @@
           <a:bodyPr wrap="square" rtlCol="0" anchor="ctr"/>
           <a:lstStyle/>
           <a:p>
-            <a:pPr indent="0" marL="0">
+            <a:pPr marL="0" indent="0">
               <a:buNone/>
             </a:pPr>
             <a:r>
@@ -2892,7 +2839,7 @@
           <a:bodyPr wrap="square" rtlCol="0" anchor="ctr"/>
           <a:lstStyle/>
           <a:p>
-            <a:pPr indent="0" marL="0">
+            <a:pPr marL="0" indent="0">
               <a:lnSpc>
                 <a:spcPts val="1500"/>
               </a:lnSpc>
@@ -2934,7 +2881,7 @@
           <a:bodyPr wrap="square" rtlCol="0" anchor="ctr"/>
           <a:lstStyle/>
           <a:p>
-            <a:pPr indent="0" marL="0">
+            <a:pPr marL="0" indent="0">
               <a:buNone/>
             </a:pPr>
             <a:r>
@@ -2973,6 +2920,13 @@
           </a:solidFill>
           <a:ln/>
         </p:spPr>
+        <p:txBody>
+          <a:bodyPr/>
+          <a:lstStyle/>
+          <a:p>
+            <a:endParaRPr lang="en-US"/>
+          </a:p>
+        </p:txBody>
       </p:sp>
       <p:sp>
         <p:nvSpPr>
@@ -2995,7 +2949,7 @@
           <a:bodyPr wrap="square" rtlCol="0" anchor="ctr"/>
           <a:lstStyle/>
           <a:p>
-            <a:pPr indent="0" marL="0">
+            <a:pPr marL="0" indent="0">
               <a:buNone/>
             </a:pPr>
             <a:r>
@@ -3034,7 +2988,7 @@
           <a:bodyPr wrap="square" rtlCol="0" anchor="ctr"/>
           <a:lstStyle/>
           <a:p>
-            <a:pPr indent="0" marL="0">
+            <a:pPr marL="0" indent="0">
               <a:buNone/>
             </a:pPr>
             <a:r>
@@ -3073,7 +3027,7 @@
           <a:bodyPr wrap="square" rtlCol="0" anchor="ctr"/>
           <a:lstStyle/>
           <a:p>
-            <a:pPr indent="0" marL="0">
+            <a:pPr marL="0" indent="0">
               <a:buNone/>
             </a:pPr>
             <a:r>
@@ -3085,7 +3039,7 @@
                 <a:ea typeface="Calibri" pitchFamily="34" charset="-122"/>
                 <a:cs typeface="Calibri" pitchFamily="34" charset="-120"/>
               </a:rPr>
-              <a:t>10s of billions</a:t>
+              <a:t>10B+</a:t>
             </a:r>
             <a:endParaRPr lang="en-US" sz="1150" dirty="0"/>
           </a:p>
@@ -3112,7 +3066,7 @@
           <a:bodyPr wrap="square" rtlCol="0" anchor="ctr"/>
           <a:lstStyle/>
           <a:p>
-            <a:pPr indent="0" marL="0">
+            <a:pPr marL="0" indent="0">
               <a:lnSpc>
                 <a:spcPts val="1500"/>
               </a:lnSpc>
@@ -3154,7 +3108,7 @@
           <a:bodyPr wrap="square" rtlCol="0" anchor="ctr"/>
           <a:lstStyle/>
           <a:p>
-            <a:pPr indent="0" marL="0">
+            <a:pPr marL="0" indent="0">
               <a:buNone/>
             </a:pPr>
             <a:r>
@@ -3193,6 +3147,13 @@
           </a:solidFill>
           <a:ln/>
         </p:spPr>
+        <p:txBody>
+          <a:bodyPr/>
+          <a:lstStyle/>
+          <a:p>
+            <a:endParaRPr lang="en-US"/>
+          </a:p>
+        </p:txBody>
       </p:sp>
       <p:sp>
         <p:nvSpPr>
@@ -3215,7 +3176,7 @@
           <a:bodyPr wrap="square" rtlCol="0" anchor="ctr"/>
           <a:lstStyle/>
           <a:p>
-            <a:pPr indent="0" marL="0">
+            <a:pPr marL="0" indent="0">
               <a:buNone/>
             </a:pPr>
             <a:r>
@@ -3254,7 +3215,7 @@
           <a:bodyPr wrap="square" rtlCol="0" anchor="ctr"/>
           <a:lstStyle/>
           <a:p>
-            <a:pPr indent="0" marL="0">
+            <a:pPr marL="0" indent="0">
               <a:buNone/>
             </a:pPr>
             <a:r>
@@ -3293,7 +3254,7 @@
           <a:bodyPr wrap="square" rtlCol="0" anchor="ctr"/>
           <a:lstStyle/>
           <a:p>
-            <a:pPr indent="0" marL="0">
+            <a:pPr marL="0" indent="0">
               <a:buNone/>
             </a:pPr>
             <a:r>
@@ -3332,7 +3293,7 @@
           <a:bodyPr wrap="square" rtlCol="0" anchor="ctr"/>
           <a:lstStyle/>
           <a:p>
-            <a:pPr indent="0" marL="0">
+            <a:pPr marL="0" indent="0">
               <a:lnSpc>
                 <a:spcPts val="1500"/>
               </a:lnSpc>
@@ -3374,7 +3335,7 @@
           <a:bodyPr wrap="square" rtlCol="0" anchor="ctr"/>
           <a:lstStyle/>
           <a:p>
-            <a:pPr indent="0" marL="0">
+            <a:pPr marL="0" indent="0">
               <a:buNone/>
             </a:pPr>
             <a:r>
@@ -3413,7 +3374,7 @@
           <a:bodyPr wrap="square" rtlCol="0" anchor="ctr"/>
           <a:lstStyle/>
           <a:p>
-            <a:pPr algn="l" indent="0" marL="0">
+            <a:pPr marL="0" indent="0" algn="l">
               <a:buNone/>
             </a:pPr>
             <a:r>
@@ -3452,7 +3413,7 @@
           <a:bodyPr wrap="square" rtlCol="0" anchor="ctr"/>
           <a:lstStyle/>
           <a:p>
-            <a:pPr algn="r" indent="0" marL="0">
+            <a:pPr marL="0" indent="0" algn="r">
               <a:buNone/>
             </a:pPr>
             <a:r>
@@ -3486,6 +3447,7 @@
         <a:solidFill>
           <a:srgbClr val="FFFFFF"/>
         </a:solidFill>
+        <a:effectLst/>
       </p:bgPr>
     </p:bg>
     <p:spTree>
@@ -3521,17 +3483,24 @@
           </a:solidFill>
           <a:ln/>
         </p:spPr>
+        <p:txBody>
+          <a:bodyPr/>
+          <a:lstStyle/>
+          <a:p>
+            <a:endParaRPr lang="en-US"/>
+          </a:p>
+        </p:txBody>
       </p:sp>
       <p:pic>
         <p:nvPicPr>
-          <p:cNvPr id="3" name="Image 0" descr="icons/balance.png">    </p:cNvPr>
+          <p:cNvPr id="3" name="Image 0" descr="icons/balance.png"/>
           <p:cNvPicPr>
             <a:picLocks noChangeAspect="1"/>
           </p:cNvPicPr>
           <p:nvPr/>
         </p:nvPicPr>
         <p:blipFill>
-          <a:blip r:embed="rId1"/>
+          <a:blip r:embed="rId3"/>
           <a:stretch>
             <a:fillRect/>
           </a:stretch>
@@ -3567,7 +3536,7 @@
           <a:bodyPr wrap="square" rtlCol="0" anchor="ctr"/>
           <a:lstStyle/>
           <a:p>
-            <a:pPr indent="0" marL="0">
+            <a:pPr marL="0" indent="0">
               <a:buNone/>
             </a:pPr>
             <a:r>
@@ -3579,7 +3548,7 @@
                 <a:ea typeface="Cambria" pitchFamily="34" charset="-122"/>
                 <a:cs typeface="Cambria" pitchFamily="34" charset="-120"/>
               </a:rPr>
-              <a:t>What Should You Choose?</a:t>
+              <a:t>Why SLM?</a:t>
             </a:r>
             <a:endParaRPr lang="en-US" sz="3000" dirty="0"/>
           </a:p>
@@ -3587,30 +3556,30 @@
       </p:sp>
       <p:sp>
         <p:nvSpPr>
-          <p:cNvPr id="5" name="Text 2"/>
-          <p:cNvSpPr/>
-          <p:nvPr/>
-        </p:nvSpPr>
-        <p:spPr>
-          <a:xfrm>
-            <a:off x="1234440" y="1051560"/>
-            <a:ext cx="9601200" cy="365760"/>
-          </a:xfrm>
-          <a:prstGeom prst="rect">
-            <a:avLst/>
-          </a:prstGeom>
-          <a:noFill/>
-          <a:ln/>
-        </p:spPr>
-        <p:txBody>
-          <a:bodyPr wrap="square" rtlCol="0" anchor="ctr"/>
-          <a:lstStyle/>
-          <a:p>
-            <a:pPr indent="0" marL="0">
-              <a:buNone/>
-            </a:pPr>
-            <a:r>
-              <a:rPr lang="en-US" sz="1300" i="1" dirty="0">
+          <p:cNvPr id="35" name="Text 32"/>
+          <p:cNvSpPr/>
+          <p:nvPr/>
+        </p:nvSpPr>
+        <p:spPr>
+          <a:xfrm>
+            <a:off x="457200" y="6446520"/>
+            <a:ext cx="3657600" cy="274320"/>
+          </a:xfrm>
+          <a:prstGeom prst="rect">
+            <a:avLst/>
+          </a:prstGeom>
+          <a:noFill/>
+          <a:ln/>
+        </p:spPr>
+        <p:txBody>
+          <a:bodyPr wrap="square" rtlCol="0" anchor="ctr"/>
+          <a:lstStyle/>
+          <a:p>
+            <a:pPr marL="0" indent="0" algn="l">
+              <a:buNone/>
+            </a:pPr>
+            <a:r>
+              <a:rPr lang="en-US" sz="1000" dirty="0">
                 <a:solidFill>
                   <a:srgbClr val="5B6472"/>
                 </a:solidFill>
@@ -3618,1158 +3587,511 @@
                 <a:ea typeface="Calibri" pitchFamily="34" charset="-122"/>
                 <a:cs typeface="Calibri" pitchFamily="34" charset="-120"/>
               </a:rPr>
-              <a:t>Match the model to the job — bigger is not automatically better.</a:t>
-            </a:r>
-            <a:endParaRPr lang="en-US" sz="1300" dirty="0"/>
-          </a:p>
-        </p:txBody>
-      </p:sp>
-      <p:sp>
-        <p:nvSpPr>
-          <p:cNvPr id="6" name="Shape 3"/>
-          <p:cNvSpPr/>
-          <p:nvPr/>
-        </p:nvSpPr>
-        <p:spPr>
-          <a:xfrm>
-            <a:off x="3246120" y="1691640"/>
-            <a:ext cx="2926080" cy="457200"/>
-          </a:xfrm>
-          <a:prstGeom prst="roundRect">
-            <a:avLst>
-              <a:gd name="adj" fmla="val 12000"/>
-            </a:avLst>
+              <a:t>SLMs in Practice</a:t>
+            </a:r>
+            <a:endParaRPr lang="en-US" sz="1000" dirty="0"/>
+          </a:p>
+        </p:txBody>
+      </p:sp>
+      <p:sp>
+        <p:nvSpPr>
+          <p:cNvPr id="36" name="Text 33"/>
+          <p:cNvSpPr/>
+          <p:nvPr/>
+        </p:nvSpPr>
+        <p:spPr>
+          <a:xfrm>
+            <a:off x="11274552" y="6446520"/>
+            <a:ext cx="457200" cy="274320"/>
+          </a:xfrm>
+          <a:prstGeom prst="rect">
+            <a:avLst/>
+          </a:prstGeom>
+          <a:noFill/>
+          <a:ln/>
+        </p:spPr>
+        <p:txBody>
+          <a:bodyPr wrap="square" rtlCol="0" anchor="ctr"/>
+          <a:lstStyle/>
+          <a:p>
+            <a:pPr marL="0" indent="0" algn="r">
+              <a:buNone/>
+            </a:pPr>
+            <a:r>
+              <a:rPr lang="en-US" sz="1000" dirty="0">
+                <a:solidFill>
+                  <a:srgbClr val="5B6472"/>
+                </a:solidFill>
+                <a:latin typeface="Calibri" pitchFamily="34" charset="0"/>
+                <a:ea typeface="Calibri" pitchFamily="34" charset="-122"/>
+                <a:cs typeface="Calibri" pitchFamily="34" charset="-120"/>
+              </a:rPr>
+              <a:t>4</a:t>
+            </a:r>
+            <a:endParaRPr lang="en-US" sz="1000" dirty="0"/>
+          </a:p>
+        </p:txBody>
+      </p:sp>
+      <p:sp>
+        <p:nvSpPr>
+          <p:cNvPr id="38" name="TextBox 37">
+            <a:extLst>
+              <a:ext uri="{FF2B5EF4-FFF2-40B4-BE49-F238E27FC236}">
+                <a16:creationId xmlns:a16="http://schemas.microsoft.com/office/drawing/2014/main" id="{B96F2703-FB69-F864-FA66-80B565B7E56E}"/>
+              </a:ext>
+            </a:extLst>
+          </p:cNvPr>
+          <p:cNvSpPr txBox="1"/>
+          <p:nvPr/>
+        </p:nvSpPr>
+        <p:spPr>
+          <a:xfrm>
+            <a:off x="457200" y="1229253"/>
+            <a:ext cx="6096000" cy="284693"/>
+          </a:xfrm>
+          <a:prstGeom prst="rect">
+            <a:avLst/>
+          </a:prstGeom>
+          <a:noFill/>
+        </p:spPr>
+        <p:txBody>
+          <a:bodyPr wrap="square">
+            <a:spAutoFit/>
+          </a:bodyPr>
+          <a:lstStyle/>
+          <a:p>
+            <a:pPr marL="0" indent="0">
+              <a:lnSpc>
+                <a:spcPts val="1500"/>
+              </a:lnSpc>
+              <a:buNone/>
+            </a:pPr>
+            <a:r>
+              <a:rPr lang="en-US" sz="1250" dirty="0"/>
+              <a:t>Speed, Cost, Governance</a:t>
+            </a:r>
+          </a:p>
+        </p:txBody>
+      </p:sp>
+      <p:sp>
+        <p:nvSpPr>
+          <p:cNvPr id="39" name="TextBox 38"/>
+          <p:cNvSpPr txBox="1"/>
+          <p:nvPr/>
+        </p:nvSpPr>
+        <p:spPr>
+          <a:xfrm>
+            <a:off x="457200" y="1755648"/>
+            <a:ext cx="5852160" cy="256032"/>
+          </a:xfrm>
+          <a:prstGeom prst="rect">
+            <a:avLst/>
+          </a:prstGeom>
+          <a:noFill/>
+        </p:spPr>
+        <p:txBody>
+          <a:bodyPr wrap="square" anchor="t" lIns="0" rIns="0" tIns="0" bIns="0">
+            <a:spAutoFit/>
+          </a:bodyPr>
+          <a:lstStyle/>
+          <a:p>
+            <a:r>
+              <a:rPr sz="1200" b="1" i="0" spc="150">
+                <a:solidFill>
+                  <a:srgbClr val="1C7293"/>
+                </a:solidFill>
+                <a:latin typeface="Calibri"/>
+              </a:rPr>
+              <a:t>USE CASE IN PRACTICE</a:t>
+            </a:r>
+          </a:p>
+        </p:txBody>
+      </p:sp>
+      <p:sp>
+        <p:nvSpPr>
+          <p:cNvPr id="40" name="TextBox 39"/>
+          <p:cNvSpPr txBox="1"/>
+          <p:nvPr/>
+        </p:nvSpPr>
+        <p:spPr>
+          <a:xfrm>
+            <a:off x="457200" y="2029968"/>
+            <a:ext cx="6035040" cy="502920"/>
+          </a:xfrm>
+          <a:prstGeom prst="rect">
+            <a:avLst/>
+          </a:prstGeom>
+          <a:noFill/>
+        </p:spPr>
+        <p:txBody>
+          <a:bodyPr wrap="square" anchor="t" lIns="0" rIns="0" tIns="0" bIns="0">
+            <a:spAutoFit/>
+          </a:bodyPr>
+          <a:lstStyle/>
+          <a:p>
+            <a:r>
+              <a:rPr sz="2200" b="1" i="0">
+                <a:solidFill>
+                  <a:srgbClr val="1B1F27"/>
+                </a:solidFill>
+                <a:latin typeface="Cambria"/>
+              </a:rPr>
+              <a:t>Document Classification &amp; Routing</a:t>
+            </a:r>
+          </a:p>
+        </p:txBody>
+      </p:sp>
+      <p:sp>
+        <p:nvSpPr>
+          <p:cNvPr id="41" name="TextBox 40"/>
+          <p:cNvSpPr txBox="1"/>
+          <p:nvPr/>
+        </p:nvSpPr>
+        <p:spPr>
+          <a:xfrm>
+            <a:off x="457200" y="2578608"/>
+            <a:ext cx="5577840" cy="502920"/>
+          </a:xfrm>
+          <a:prstGeom prst="rect">
+            <a:avLst/>
+          </a:prstGeom>
+          <a:noFill/>
+        </p:spPr>
+        <p:txBody>
+          <a:bodyPr wrap="square" anchor="t" lIns="0" rIns="0" tIns="0" bIns="0">
+            <a:spAutoFit/>
+          </a:bodyPr>
+          <a:lstStyle/>
+          <a:p>
+            <a:pPr>
+              <a:lnSpc>
+                <a:spcPct val="115000"/>
+              </a:lnSpc>
+            </a:pPr>
+            <a:r>
+              <a:rPr sz="1300" b="0" i="0">
+                <a:solidFill>
+                  <a:srgbClr val="5B6472"/>
+                </a:solidFill>
+                <a:latin typeface="Calibri"/>
+              </a:rPr>
+              <a:t>A back-office pipeline ingests scanned invoices, contracts, and support tickets — an SLM reads each one and decides where it goes.</a:t>
+            </a:r>
+          </a:p>
+        </p:txBody>
+      </p:sp>
+      <p:sp>
+        <p:nvSpPr>
+          <p:cNvPr id="42" name="Oval 41"/>
+          <p:cNvSpPr/>
+          <p:nvPr/>
+        </p:nvSpPr>
+        <p:spPr>
+          <a:xfrm>
+            <a:off x="457200" y="3310127"/>
+            <a:ext cx="109728" cy="109728"/>
+          </a:xfrm>
+          <a:prstGeom prst="ellipse">
+            <a:avLst/>
           </a:prstGeom>
           <a:solidFill>
             <a:srgbClr val="3FBF9F"/>
           </a:solidFill>
-          <a:ln/>
-        </p:spPr>
-      </p:sp>
-      <p:sp>
-        <p:nvSpPr>
-          <p:cNvPr id="7" name="Shape 4"/>
-          <p:cNvSpPr/>
-          <p:nvPr/>
-        </p:nvSpPr>
-        <p:spPr>
-          <a:xfrm>
-            <a:off x="6263640" y="1691640"/>
-            <a:ext cx="2697480" cy="457200"/>
-          </a:xfrm>
-          <a:prstGeom prst="roundRect">
-            <a:avLst>
-              <a:gd name="adj" fmla="val 12000"/>
-            </a:avLst>
+          <a:ln>
+            <a:noFill/>
+          </a:ln>
+        </p:spPr>
+        <p:style>
+          <a:lnRef idx="1">
+            <a:schemeClr val="accent1"/>
+          </a:lnRef>
+          <a:fillRef idx="3">
+            <a:schemeClr val="accent1"/>
+          </a:fillRef>
+          <a:effectRef idx="2">
+            <a:schemeClr val="accent1"/>
+          </a:effectRef>
+          <a:fontRef idx="minor">
+            <a:schemeClr val="lt1"/>
+          </a:fontRef>
+        </p:style>
+        <p:txBody>
+          <a:bodyPr rtlCol="0" anchor="ctr"/>
+          <a:lstStyle/>
+          <a:p>
+            <a:pPr algn="ctr"/>
+          </a:p>
+        </p:txBody>
+      </p:sp>
+      <p:sp>
+        <p:nvSpPr>
+          <p:cNvPr id="43" name="TextBox 42"/>
+          <p:cNvSpPr txBox="1"/>
+          <p:nvPr/>
+        </p:nvSpPr>
+        <p:spPr>
+          <a:xfrm>
+            <a:off x="713232" y="3246120"/>
+            <a:ext cx="5349240" cy="685800"/>
+          </a:xfrm>
+          <a:prstGeom prst="rect">
+            <a:avLst/>
+          </a:prstGeom>
+          <a:noFill/>
+        </p:spPr>
+        <p:txBody>
+          <a:bodyPr wrap="square" anchor="t" lIns="0" rIns="0" tIns="0" bIns="0">
+            <a:spAutoFit/>
+          </a:bodyPr>
+          <a:lstStyle/>
+          <a:p>
+            <a:r>
+              <a:rPr sz="1350" b="1" i="0">
+                <a:solidFill>
+                  <a:srgbClr val="1B1F27"/>
+                </a:solidFill>
+                <a:latin typeface="Calibri"/>
+              </a:rPr>
+              <a:t>Inbound triage</a:t>
+            </a:r>
+          </a:p>
+          <a:p>
+            <a:pPr>
+              <a:lnSpc>
+                <a:spcPct val="110000"/>
+              </a:lnSpc>
+              <a:spcBef>
+                <a:spcPts val="200"/>
+              </a:spcBef>
+            </a:pPr>
+            <a:r>
+              <a:rPr sz="1200" b="0" i="0">
+                <a:solidFill>
+                  <a:srgbClr val="5B6472"/>
+                </a:solidFill>
+                <a:latin typeface="Calibri"/>
+              </a:rPr>
+              <a:t>The SLM classifies each document in a single pass — invoice, contract, ticket, or KYC form.</a:t>
+            </a:r>
+          </a:p>
+        </p:txBody>
+      </p:sp>
+      <p:sp>
+        <p:nvSpPr>
+          <p:cNvPr id="44" name="Oval 43"/>
+          <p:cNvSpPr/>
+          <p:nvPr/>
+        </p:nvSpPr>
+        <p:spPr>
+          <a:xfrm>
+            <a:off x="457200" y="4114800"/>
+            <a:ext cx="109728" cy="109728"/>
+          </a:xfrm>
+          <a:prstGeom prst="ellipse">
+            <a:avLst/>
           </a:prstGeom>
           <a:solidFill>
-            <a:srgbClr val="1C7293"/>
+            <a:srgbClr val="3FBF9F"/>
           </a:solidFill>
-          <a:ln/>
-        </p:spPr>
-      </p:sp>
-      <p:sp>
-        <p:nvSpPr>
-          <p:cNvPr id="8" name="Shape 5"/>
-          <p:cNvSpPr/>
-          <p:nvPr/>
-        </p:nvSpPr>
-        <p:spPr>
-          <a:xfrm>
-            <a:off x="9052560" y="1691640"/>
-            <a:ext cx="2651760" cy="457200"/>
-          </a:xfrm>
-          <a:prstGeom prst="roundRect">
-            <a:avLst>
-              <a:gd name="adj" fmla="val 12000"/>
-            </a:avLst>
+          <a:ln>
+            <a:noFill/>
+          </a:ln>
+        </p:spPr>
+        <p:style>
+          <a:lnRef idx="1">
+            <a:schemeClr val="accent1"/>
+          </a:lnRef>
+          <a:fillRef idx="3">
+            <a:schemeClr val="accent1"/>
+          </a:fillRef>
+          <a:effectRef idx="2">
+            <a:schemeClr val="accent1"/>
+          </a:effectRef>
+          <a:fontRef idx="minor">
+            <a:schemeClr val="lt1"/>
+          </a:fontRef>
+        </p:style>
+        <p:txBody>
+          <a:bodyPr rtlCol="0" anchor="ctr"/>
+          <a:lstStyle/>
+          <a:p>
+            <a:pPr algn="ctr"/>
+          </a:p>
+        </p:txBody>
+      </p:sp>
+      <p:sp>
+        <p:nvSpPr>
+          <p:cNvPr id="45" name="TextBox 44"/>
+          <p:cNvSpPr txBox="1"/>
+          <p:nvPr/>
+        </p:nvSpPr>
+        <p:spPr>
+          <a:xfrm>
+            <a:off x="713232" y="4050791"/>
+            <a:ext cx="5349240" cy="685800"/>
+          </a:xfrm>
+          <a:prstGeom prst="rect">
+            <a:avLst/>
+          </a:prstGeom>
+          <a:noFill/>
+        </p:spPr>
+        <p:txBody>
+          <a:bodyPr wrap="square" anchor="t" lIns="0" rIns="0" tIns="0" bIns="0">
+            <a:spAutoFit/>
+          </a:bodyPr>
+          <a:lstStyle/>
+          <a:p>
+            <a:r>
+              <a:rPr sz="1350" b="1" i="0">
+                <a:solidFill>
+                  <a:srgbClr val="1B1F27"/>
+                </a:solidFill>
+                <a:latin typeface="Calibri"/>
+              </a:rPr>
+              <a:t>Confidence-based routing</a:t>
+            </a:r>
+          </a:p>
+          <a:p>
+            <a:pPr>
+              <a:lnSpc>
+                <a:spcPct val="110000"/>
+              </a:lnSpc>
+              <a:spcBef>
+                <a:spcPts val="200"/>
+              </a:spcBef>
+            </a:pPr>
+            <a:r>
+              <a:rPr sz="1200" b="0" i="0">
+                <a:solidFill>
+                  <a:srgbClr val="5B6472"/>
+                </a:solidFill>
+                <a:latin typeface="Calibri"/>
+              </a:rPr>
+              <a:t>High-confidence results go straight to the right queue; low-confidence cases fall back to a human reviewer.</a:t>
+            </a:r>
+          </a:p>
+        </p:txBody>
+      </p:sp>
+      <p:sp>
+        <p:nvSpPr>
+          <p:cNvPr id="46" name="Oval 45"/>
+          <p:cNvSpPr/>
+          <p:nvPr/>
+        </p:nvSpPr>
+        <p:spPr>
+          <a:xfrm>
+            <a:off x="457200" y="4919472"/>
+            <a:ext cx="109728" cy="109728"/>
+          </a:xfrm>
+          <a:prstGeom prst="ellipse">
+            <a:avLst/>
           </a:prstGeom>
           <a:solidFill>
-            <a:srgbClr val="21295C"/>
+            <a:srgbClr val="3FBF9F"/>
           </a:solidFill>
-          <a:ln/>
-        </p:spPr>
-      </p:sp>
-      <p:sp>
-        <p:nvSpPr>
-          <p:cNvPr id="9" name="Text 6"/>
-          <p:cNvSpPr/>
-          <p:nvPr/>
-        </p:nvSpPr>
-        <p:spPr>
-          <a:xfrm>
-            <a:off x="3246120" y="1691640"/>
-            <a:ext cx="2926080" cy="457200"/>
-          </a:xfrm>
-          <a:prstGeom prst="rect">
-            <a:avLst/>
-          </a:prstGeom>
-          <a:noFill/>
-          <a:ln/>
-        </p:spPr>
-        <p:txBody>
-          <a:bodyPr wrap="square" rtlCol="0" anchor="ctr"/>
-          <a:lstStyle/>
-          <a:p>
-            <a:pPr algn="ctr" indent="0" marL="0">
-              <a:buNone/>
-            </a:pPr>
-            <a:r>
-              <a:rPr lang="en-US" sz="1400" b="1" dirty="0">
-                <a:solidFill>
-                  <a:srgbClr val="FFFFFF"/>
-                </a:solidFill>
-                <a:latin typeface="Calibri" pitchFamily="34" charset="0"/>
-                <a:ea typeface="Calibri" pitchFamily="34" charset="-122"/>
-                <a:cs typeface="Calibri" pitchFamily="34" charset="-120"/>
-              </a:rPr>
-              <a:t>SLM</a:t>
-            </a:r>
-            <a:endParaRPr lang="en-US" sz="1400" dirty="0"/>
-          </a:p>
-        </p:txBody>
-      </p:sp>
-      <p:sp>
-        <p:nvSpPr>
-          <p:cNvPr id="10" name="Text 7"/>
-          <p:cNvSpPr/>
-          <p:nvPr/>
-        </p:nvSpPr>
-        <p:spPr>
-          <a:xfrm>
-            <a:off x="6263640" y="1691640"/>
-            <a:ext cx="2697480" cy="457200"/>
-          </a:xfrm>
-          <a:prstGeom prst="rect">
-            <a:avLst/>
-          </a:prstGeom>
-          <a:noFill/>
-          <a:ln/>
-        </p:spPr>
-        <p:txBody>
-          <a:bodyPr wrap="square" rtlCol="0" anchor="ctr"/>
-          <a:lstStyle/>
-          <a:p>
-            <a:pPr algn="ctr" indent="0" marL="0">
-              <a:buNone/>
-            </a:pPr>
-            <a:r>
-              <a:rPr lang="en-US" sz="1400" b="1" dirty="0">
-                <a:solidFill>
-                  <a:srgbClr val="FFFFFF"/>
-                </a:solidFill>
-                <a:latin typeface="Calibri" pitchFamily="34" charset="0"/>
-                <a:ea typeface="Calibri" pitchFamily="34" charset="-122"/>
-                <a:cs typeface="Calibri" pitchFamily="34" charset="-120"/>
-              </a:rPr>
-              <a:t>LLM</a:t>
-            </a:r>
-            <a:endParaRPr lang="en-US" sz="1400" dirty="0"/>
-          </a:p>
-        </p:txBody>
-      </p:sp>
-      <p:sp>
-        <p:nvSpPr>
-          <p:cNvPr id="11" name="Text 8"/>
-          <p:cNvSpPr/>
-          <p:nvPr/>
-        </p:nvSpPr>
-        <p:spPr>
-          <a:xfrm>
-            <a:off x="9052560" y="1691640"/>
-            <a:ext cx="2651760" cy="457200"/>
-          </a:xfrm>
-          <a:prstGeom prst="rect">
-            <a:avLst/>
-          </a:prstGeom>
-          <a:noFill/>
-          <a:ln/>
-        </p:spPr>
-        <p:txBody>
-          <a:bodyPr wrap="square" rtlCol="0" anchor="ctr"/>
-          <a:lstStyle/>
-          <a:p>
-            <a:pPr algn="ctr" indent="0" marL="0">
-              <a:buNone/>
-            </a:pPr>
-            <a:r>
-              <a:rPr lang="en-US" sz="1400" b="1" dirty="0">
-                <a:solidFill>
-                  <a:srgbClr val="FFFFFF"/>
-                </a:solidFill>
-                <a:latin typeface="Calibri" pitchFamily="34" charset="0"/>
-                <a:ea typeface="Calibri" pitchFamily="34" charset="-122"/>
-                <a:cs typeface="Calibri" pitchFamily="34" charset="-120"/>
-              </a:rPr>
-              <a:t>Frontier (FLM)</a:t>
-            </a:r>
-            <a:endParaRPr lang="en-US" sz="1400" dirty="0"/>
-          </a:p>
-        </p:txBody>
-      </p:sp>
-      <p:sp>
-        <p:nvSpPr>
-          <p:cNvPr id="12" name="Shape 9"/>
-          <p:cNvSpPr/>
-          <p:nvPr/>
-        </p:nvSpPr>
-        <p:spPr>
-          <a:xfrm>
-            <a:off x="548640" y="2203704"/>
-            <a:ext cx="11155680" cy="658368"/>
-          </a:xfrm>
-          <a:prstGeom prst="rect">
-            <a:avLst/>
-          </a:prstGeom>
-          <a:solidFill>
-            <a:srgbClr val="F4F7F9"/>
-          </a:solidFill>
-          <a:ln/>
-        </p:spPr>
-      </p:sp>
-      <p:sp>
-        <p:nvSpPr>
-          <p:cNvPr id="13" name="Text 10"/>
-          <p:cNvSpPr/>
-          <p:nvPr/>
-        </p:nvSpPr>
-        <p:spPr>
-          <a:xfrm>
-            <a:off x="548640" y="2258568"/>
-            <a:ext cx="2606040" cy="566928"/>
-          </a:xfrm>
-          <a:prstGeom prst="rect">
-            <a:avLst/>
-          </a:prstGeom>
-          <a:noFill/>
-          <a:ln/>
-        </p:spPr>
-        <p:txBody>
-          <a:bodyPr wrap="square" rtlCol="0" anchor="ctr"/>
-          <a:lstStyle/>
-          <a:p>
-            <a:pPr indent="0" marL="0">
-              <a:buNone/>
-            </a:pPr>
-            <a:r>
-              <a:rPr lang="en-US" sz="1250" b="1" dirty="0">
+          <a:ln>
+            <a:noFill/>
+          </a:ln>
+        </p:spPr>
+        <p:style>
+          <a:lnRef idx="1">
+            <a:schemeClr val="accent1"/>
+          </a:lnRef>
+          <a:fillRef idx="3">
+            <a:schemeClr val="accent1"/>
+          </a:fillRef>
+          <a:effectRef idx="2">
+            <a:schemeClr val="accent1"/>
+          </a:effectRef>
+          <a:fontRef idx="minor">
+            <a:schemeClr val="lt1"/>
+          </a:fontRef>
+        </p:style>
+        <p:txBody>
+          <a:bodyPr rtlCol="0" anchor="ctr"/>
+          <a:lstStyle/>
+          <a:p>
+            <a:pPr algn="ctr"/>
+          </a:p>
+        </p:txBody>
+      </p:sp>
+      <p:sp>
+        <p:nvSpPr>
+          <p:cNvPr id="47" name="TextBox 46"/>
+          <p:cNvSpPr txBox="1"/>
+          <p:nvPr/>
+        </p:nvSpPr>
+        <p:spPr>
+          <a:xfrm>
+            <a:off x="713232" y="4855464"/>
+            <a:ext cx="5349240" cy="685800"/>
+          </a:xfrm>
+          <a:prstGeom prst="rect">
+            <a:avLst/>
+          </a:prstGeom>
+          <a:noFill/>
+        </p:spPr>
+        <p:txBody>
+          <a:bodyPr wrap="square" anchor="t" lIns="0" rIns="0" tIns="0" bIns="0">
+            <a:spAutoFit/>
+          </a:bodyPr>
+          <a:lstStyle/>
+          <a:p>
+            <a:r>
+              <a:rPr sz="1350" b="1" i="0">
                 <a:solidFill>
                   <a:srgbClr val="1B1F27"/>
                 </a:solidFill>
-                <a:latin typeface="Calibri" pitchFamily="34" charset="0"/>
-                <a:ea typeface="Calibri" pitchFamily="34" charset="-122"/>
-                <a:cs typeface="Calibri" pitchFamily="34" charset="-120"/>
-              </a:rPr>
-              <a:t>Task shape</a:t>
-            </a:r>
-            <a:endParaRPr lang="en-US" sz="1250" dirty="0"/>
-          </a:p>
-        </p:txBody>
-      </p:sp>
-      <p:sp>
-        <p:nvSpPr>
-          <p:cNvPr id="14" name="Text 11"/>
-          <p:cNvSpPr/>
-          <p:nvPr/>
-        </p:nvSpPr>
-        <p:spPr>
-          <a:xfrm>
-            <a:off x="3337560" y="2258568"/>
-            <a:ext cx="2743200" cy="566928"/>
-          </a:xfrm>
-          <a:prstGeom prst="rect">
-            <a:avLst/>
-          </a:prstGeom>
-          <a:noFill/>
-          <a:ln/>
-        </p:spPr>
-        <p:txBody>
-          <a:bodyPr wrap="square" rtlCol="0" anchor="ctr"/>
-          <a:lstStyle/>
-          <a:p>
-            <a:pPr algn="ctr" indent="0" marL="0">
+                <a:latin typeface="Calibri"/>
+              </a:rPr>
+              <a:t>Sub-second, on-prem</a:t>
+            </a:r>
+          </a:p>
+          <a:p>
+            <a:pPr>
               <a:lnSpc>
-                <a:spcPts val="1400"/>
+                <a:spcPct val="110000"/>
               </a:lnSpc>
-              <a:buNone/>
-            </a:pPr>
-            <a:r>
-              <a:rPr lang="en-US" sz="1200" dirty="0">
-                <a:solidFill>
-                  <a:srgbClr val="1B1F27"/>
-                </a:solidFill>
-                <a:latin typeface="Calibri" pitchFamily="34" charset="0"/>
-                <a:ea typeface="Calibri" pitchFamily="34" charset="-122"/>
-                <a:cs typeface="Calibri" pitchFamily="34" charset="-120"/>
-              </a:rPr>
-              <a:t>Fixed taxonomy / narrow rule</a:t>
-            </a:r>
-            <a:endParaRPr lang="en-US" sz="1200" dirty="0"/>
-          </a:p>
-        </p:txBody>
-      </p:sp>
-      <p:sp>
-        <p:nvSpPr>
-          <p:cNvPr id="15" name="Text 12"/>
-          <p:cNvSpPr/>
-          <p:nvPr/>
-        </p:nvSpPr>
-        <p:spPr>
-          <a:xfrm>
-            <a:off x="6355080" y="2258568"/>
-            <a:ext cx="2514600" cy="566928"/>
-          </a:xfrm>
-          <a:prstGeom prst="rect">
-            <a:avLst/>
-          </a:prstGeom>
-          <a:noFill/>
-          <a:ln/>
-        </p:spPr>
-        <p:txBody>
-          <a:bodyPr wrap="square" rtlCol="0" anchor="ctr"/>
-          <a:lstStyle/>
-          <a:p>
-            <a:pPr algn="ctr" indent="0" marL="0">
-              <a:lnSpc>
-                <a:spcPts val="1400"/>
-              </a:lnSpc>
-              <a:buNone/>
-            </a:pPr>
-            <a:r>
-              <a:rPr lang="en-US" sz="1200" dirty="0">
-                <a:solidFill>
-                  <a:srgbClr val="1B1F27"/>
-                </a:solidFill>
-                <a:latin typeface="Calibri" pitchFamily="34" charset="0"/>
-                <a:ea typeface="Calibri" pitchFamily="34" charset="-122"/>
-                <a:cs typeface="Calibri" pitchFamily="34" charset="-120"/>
-              </a:rPr>
-              <a:t>Broad, open-ended</a:t>
-            </a:r>
-            <a:endParaRPr lang="en-US" sz="1200" dirty="0"/>
-          </a:p>
-        </p:txBody>
-      </p:sp>
-      <p:sp>
-        <p:nvSpPr>
-          <p:cNvPr id="16" name="Text 13"/>
-          <p:cNvSpPr/>
-          <p:nvPr/>
-        </p:nvSpPr>
-        <p:spPr>
-          <a:xfrm>
-            <a:off x="9144000" y="2258568"/>
-            <a:ext cx="2468880" cy="566928"/>
-          </a:xfrm>
-          <a:prstGeom prst="rect">
-            <a:avLst/>
-          </a:prstGeom>
-          <a:noFill/>
-          <a:ln/>
-        </p:spPr>
-        <p:txBody>
-          <a:bodyPr wrap="square" rtlCol="0" anchor="ctr"/>
-          <a:lstStyle/>
-          <a:p>
-            <a:pPr algn="ctr" indent="0" marL="0">
-              <a:lnSpc>
-                <a:spcPts val="1400"/>
-              </a:lnSpc>
-              <a:buNone/>
-            </a:pPr>
-            <a:r>
-              <a:rPr lang="en-US" sz="1200" dirty="0">
-                <a:solidFill>
-                  <a:srgbClr val="1B1F27"/>
-                </a:solidFill>
-                <a:latin typeface="Calibri" pitchFamily="34" charset="0"/>
-                <a:ea typeface="Calibri" pitchFamily="34" charset="-122"/>
-                <a:cs typeface="Calibri" pitchFamily="34" charset="-120"/>
-              </a:rPr>
-              <a:t>Multi-step, ambiguous</a:t>
-            </a:r>
-            <a:endParaRPr lang="en-US" sz="1200" dirty="0"/>
-          </a:p>
-        </p:txBody>
-      </p:sp>
-      <p:sp>
-        <p:nvSpPr>
-          <p:cNvPr id="17" name="Text 14"/>
-          <p:cNvSpPr/>
-          <p:nvPr/>
-        </p:nvSpPr>
-        <p:spPr>
-          <a:xfrm>
-            <a:off x="548640" y="2916936"/>
-            <a:ext cx="2606040" cy="566928"/>
-          </a:xfrm>
-          <a:prstGeom prst="rect">
-            <a:avLst/>
-          </a:prstGeom>
-          <a:noFill/>
-          <a:ln/>
-        </p:spPr>
-        <p:txBody>
-          <a:bodyPr wrap="square" rtlCol="0" anchor="ctr"/>
-          <a:lstStyle/>
-          <a:p>
-            <a:pPr indent="0" marL="0">
-              <a:buNone/>
-            </a:pPr>
-            <a:r>
-              <a:rPr lang="en-US" sz="1250" b="1" dirty="0">
-                <a:solidFill>
-                  <a:srgbClr val="1B1F27"/>
-                </a:solidFill>
-                <a:latin typeface="Calibri" pitchFamily="34" charset="0"/>
-                <a:ea typeface="Calibri" pitchFamily="34" charset="-122"/>
-                <a:cs typeface="Calibri" pitchFamily="34" charset="-120"/>
-              </a:rPr>
-              <a:t>Reasoning depth</a:t>
-            </a:r>
-            <a:endParaRPr lang="en-US" sz="1250" dirty="0"/>
-          </a:p>
-        </p:txBody>
-      </p:sp>
-      <p:sp>
-        <p:nvSpPr>
-          <p:cNvPr id="18" name="Text 15"/>
-          <p:cNvSpPr/>
-          <p:nvPr/>
-        </p:nvSpPr>
-        <p:spPr>
-          <a:xfrm>
-            <a:off x="3337560" y="2916936"/>
-            <a:ext cx="2743200" cy="566928"/>
-          </a:xfrm>
-          <a:prstGeom prst="rect">
-            <a:avLst/>
-          </a:prstGeom>
-          <a:noFill/>
-          <a:ln/>
-        </p:spPr>
-        <p:txBody>
-          <a:bodyPr wrap="square" rtlCol="0" anchor="ctr"/>
-          <a:lstStyle/>
-          <a:p>
-            <a:pPr algn="ctr" indent="0" marL="0">
-              <a:lnSpc>
-                <a:spcPts val="1400"/>
-              </a:lnSpc>
-              <a:buNone/>
-            </a:pPr>
-            <a:r>
-              <a:rPr lang="en-US" sz="1200" dirty="0">
-                <a:solidFill>
-                  <a:srgbClr val="1B1F27"/>
-                </a:solidFill>
-                <a:latin typeface="Calibri" pitchFamily="34" charset="0"/>
-                <a:ea typeface="Calibri" pitchFamily="34" charset="-122"/>
-                <a:cs typeface="Calibri" pitchFamily="34" charset="-120"/>
-              </a:rPr>
-              <a:t>Pattern match</a:t>
-            </a:r>
-            <a:endParaRPr lang="en-US" sz="1200" dirty="0"/>
-          </a:p>
-        </p:txBody>
-      </p:sp>
-      <p:sp>
-        <p:nvSpPr>
-          <p:cNvPr id="19" name="Text 16"/>
-          <p:cNvSpPr/>
-          <p:nvPr/>
-        </p:nvSpPr>
-        <p:spPr>
-          <a:xfrm>
-            <a:off x="6355080" y="2916936"/>
-            <a:ext cx="2514600" cy="566928"/>
-          </a:xfrm>
-          <a:prstGeom prst="rect">
-            <a:avLst/>
-          </a:prstGeom>
-          <a:noFill/>
-          <a:ln/>
-        </p:spPr>
-        <p:txBody>
-          <a:bodyPr wrap="square" rtlCol="0" anchor="ctr"/>
-          <a:lstStyle/>
-          <a:p>
-            <a:pPr algn="ctr" indent="0" marL="0">
-              <a:lnSpc>
-                <a:spcPts val="1400"/>
-              </a:lnSpc>
-              <a:buNone/>
-            </a:pPr>
-            <a:r>
-              <a:rPr lang="en-US" sz="1200" dirty="0">
-                <a:solidFill>
-                  <a:srgbClr val="1B1F27"/>
-                </a:solidFill>
-                <a:latin typeface="Calibri" pitchFamily="34" charset="0"/>
-                <a:ea typeface="Calibri" pitchFamily="34" charset="-122"/>
-                <a:cs typeface="Calibri" pitchFamily="34" charset="-120"/>
-              </a:rPr>
-              <a:t>Moderate synthesis</a:t>
-            </a:r>
-            <a:endParaRPr lang="en-US" sz="1200" dirty="0"/>
-          </a:p>
-        </p:txBody>
-      </p:sp>
-      <p:sp>
-        <p:nvSpPr>
-          <p:cNvPr id="20" name="Text 17"/>
-          <p:cNvSpPr/>
-          <p:nvPr/>
-        </p:nvSpPr>
-        <p:spPr>
-          <a:xfrm>
-            <a:off x="9144000" y="2916936"/>
-            <a:ext cx="2468880" cy="566928"/>
-          </a:xfrm>
-          <a:prstGeom prst="rect">
-            <a:avLst/>
-          </a:prstGeom>
-          <a:noFill/>
-          <a:ln/>
-        </p:spPr>
-        <p:txBody>
-          <a:bodyPr wrap="square" rtlCol="0" anchor="ctr"/>
-          <a:lstStyle/>
-          <a:p>
-            <a:pPr algn="ctr" indent="0" marL="0">
-              <a:lnSpc>
-                <a:spcPts val="1400"/>
-              </a:lnSpc>
-              <a:buNone/>
-            </a:pPr>
-            <a:r>
-              <a:rPr lang="en-US" sz="1200" dirty="0">
-                <a:solidFill>
-                  <a:srgbClr val="1B1F27"/>
-                </a:solidFill>
-                <a:latin typeface="Calibri" pitchFamily="34" charset="0"/>
-                <a:ea typeface="Calibri" pitchFamily="34" charset="-122"/>
-                <a:cs typeface="Calibri" pitchFamily="34" charset="-120"/>
-              </a:rPr>
-              <a:t>Deep, chained reasoning</a:t>
-            </a:r>
-            <a:endParaRPr lang="en-US" sz="1200" dirty="0"/>
-          </a:p>
-        </p:txBody>
-      </p:sp>
-      <p:sp>
-        <p:nvSpPr>
-          <p:cNvPr id="21" name="Shape 18"/>
-          <p:cNvSpPr/>
-          <p:nvPr/>
-        </p:nvSpPr>
-        <p:spPr>
-          <a:xfrm>
-            <a:off x="548640" y="3520440"/>
-            <a:ext cx="11155680" cy="658368"/>
-          </a:xfrm>
-          <a:prstGeom prst="rect">
-            <a:avLst/>
-          </a:prstGeom>
-          <a:solidFill>
-            <a:srgbClr val="F4F7F9"/>
-          </a:solidFill>
-          <a:ln/>
-        </p:spPr>
-      </p:sp>
-      <p:sp>
-        <p:nvSpPr>
-          <p:cNvPr id="22" name="Text 19"/>
-          <p:cNvSpPr/>
-          <p:nvPr/>
-        </p:nvSpPr>
-        <p:spPr>
-          <a:xfrm>
-            <a:off x="548640" y="3575304"/>
-            <a:ext cx="2606040" cy="566928"/>
-          </a:xfrm>
-          <a:prstGeom prst="rect">
-            <a:avLst/>
-          </a:prstGeom>
-          <a:noFill/>
-          <a:ln/>
-        </p:spPr>
-        <p:txBody>
-          <a:bodyPr wrap="square" rtlCol="0" anchor="ctr"/>
-          <a:lstStyle/>
-          <a:p>
-            <a:pPr indent="0" marL="0">
-              <a:buNone/>
-            </a:pPr>
-            <a:r>
-              <a:rPr lang="en-US" sz="1250" b="1" dirty="0">
-                <a:solidFill>
-                  <a:srgbClr val="1B1F27"/>
-                </a:solidFill>
-                <a:latin typeface="Calibri" pitchFamily="34" charset="0"/>
-                <a:ea typeface="Calibri" pitchFamily="34" charset="-122"/>
-                <a:cs typeface="Calibri" pitchFamily="34" charset="-120"/>
-              </a:rPr>
-              <a:t>Latency need</a:t>
-            </a:r>
-            <a:endParaRPr lang="en-US" sz="1250" dirty="0"/>
-          </a:p>
-        </p:txBody>
-      </p:sp>
-      <p:sp>
-        <p:nvSpPr>
-          <p:cNvPr id="23" name="Text 20"/>
-          <p:cNvSpPr/>
-          <p:nvPr/>
-        </p:nvSpPr>
-        <p:spPr>
-          <a:xfrm>
-            <a:off x="3337560" y="3575304"/>
-            <a:ext cx="2743200" cy="566928"/>
-          </a:xfrm>
-          <a:prstGeom prst="rect">
-            <a:avLst/>
-          </a:prstGeom>
-          <a:noFill/>
-          <a:ln/>
-        </p:spPr>
-        <p:txBody>
-          <a:bodyPr wrap="square" rtlCol="0" anchor="ctr"/>
-          <a:lstStyle/>
-          <a:p>
-            <a:pPr algn="ctr" indent="0" marL="0">
-              <a:lnSpc>
-                <a:spcPts val="1400"/>
-              </a:lnSpc>
-              <a:buNone/>
-            </a:pPr>
-            <a:r>
-              <a:rPr lang="en-US" sz="1200" dirty="0">
-                <a:solidFill>
-                  <a:srgbClr val="1B1F27"/>
-                </a:solidFill>
-                <a:latin typeface="Calibri" pitchFamily="34" charset="0"/>
-                <a:ea typeface="Calibri" pitchFamily="34" charset="-122"/>
-                <a:cs typeface="Calibri" pitchFamily="34" charset="-120"/>
-              </a:rPr>
-              <a:t>Sub-second</a:t>
-            </a:r>
-            <a:endParaRPr lang="en-US" sz="1200" dirty="0"/>
-          </a:p>
-        </p:txBody>
-      </p:sp>
-      <p:sp>
-        <p:nvSpPr>
-          <p:cNvPr id="24" name="Text 21"/>
-          <p:cNvSpPr/>
-          <p:nvPr/>
-        </p:nvSpPr>
-        <p:spPr>
-          <a:xfrm>
-            <a:off x="6355080" y="3575304"/>
-            <a:ext cx="2514600" cy="566928"/>
-          </a:xfrm>
-          <a:prstGeom prst="rect">
-            <a:avLst/>
-          </a:prstGeom>
-          <a:noFill/>
-          <a:ln/>
-        </p:spPr>
-        <p:txBody>
-          <a:bodyPr wrap="square" rtlCol="0" anchor="ctr"/>
-          <a:lstStyle/>
-          <a:p>
-            <a:pPr algn="ctr" indent="0" marL="0">
-              <a:lnSpc>
-                <a:spcPts val="1400"/>
-              </a:lnSpc>
-              <a:buNone/>
-            </a:pPr>
-            <a:r>
-              <a:rPr lang="en-US" sz="1200" dirty="0">
-                <a:solidFill>
-                  <a:srgbClr val="1B1F27"/>
-                </a:solidFill>
-                <a:latin typeface="Calibri" pitchFamily="34" charset="0"/>
-                <a:ea typeface="Calibri" pitchFamily="34" charset="-122"/>
-                <a:cs typeface="Calibri" pitchFamily="34" charset="-120"/>
-              </a:rPr>
-              <a:t>A few seconds</a:t>
-            </a:r>
-            <a:endParaRPr lang="en-US" sz="1200" dirty="0"/>
-          </a:p>
-        </p:txBody>
-      </p:sp>
-      <p:sp>
-        <p:nvSpPr>
-          <p:cNvPr id="25" name="Text 22"/>
-          <p:cNvSpPr/>
-          <p:nvPr/>
-        </p:nvSpPr>
-        <p:spPr>
-          <a:xfrm>
-            <a:off x="9144000" y="3575304"/>
-            <a:ext cx="2468880" cy="566928"/>
-          </a:xfrm>
-          <a:prstGeom prst="rect">
-            <a:avLst/>
-          </a:prstGeom>
-          <a:noFill/>
-          <a:ln/>
-        </p:spPr>
-        <p:txBody>
-          <a:bodyPr wrap="square" rtlCol="0" anchor="ctr"/>
-          <a:lstStyle/>
-          <a:p>
-            <a:pPr algn="ctr" indent="0" marL="0">
-              <a:lnSpc>
-                <a:spcPts val="1400"/>
-              </a:lnSpc>
-              <a:buNone/>
-            </a:pPr>
-            <a:r>
-              <a:rPr lang="en-US" sz="1200" dirty="0">
-                <a:solidFill>
-                  <a:srgbClr val="1B1F27"/>
-                </a:solidFill>
-                <a:latin typeface="Calibri" pitchFamily="34" charset="0"/>
-                <a:ea typeface="Calibri" pitchFamily="34" charset="-122"/>
-                <a:cs typeface="Calibri" pitchFamily="34" charset="-120"/>
-              </a:rPr>
-              <a:t>Seconds to minutes</a:t>
-            </a:r>
-            <a:endParaRPr lang="en-US" sz="1200" dirty="0"/>
-          </a:p>
-        </p:txBody>
-      </p:sp>
-      <p:sp>
-        <p:nvSpPr>
-          <p:cNvPr id="26" name="Text 23"/>
-          <p:cNvSpPr/>
-          <p:nvPr/>
-        </p:nvSpPr>
-        <p:spPr>
-          <a:xfrm>
-            <a:off x="548640" y="4233672"/>
-            <a:ext cx="2606040" cy="566928"/>
-          </a:xfrm>
-          <a:prstGeom prst="rect">
-            <a:avLst/>
-          </a:prstGeom>
-          <a:noFill/>
-          <a:ln/>
-        </p:spPr>
-        <p:txBody>
-          <a:bodyPr wrap="square" rtlCol="0" anchor="ctr"/>
-          <a:lstStyle/>
-          <a:p>
-            <a:pPr indent="0" marL="0">
-              <a:buNone/>
-            </a:pPr>
-            <a:r>
-              <a:rPr lang="en-US" sz="1250" b="1" dirty="0">
-                <a:solidFill>
-                  <a:srgbClr val="1B1F27"/>
-                </a:solidFill>
-                <a:latin typeface="Calibri" pitchFamily="34" charset="0"/>
-                <a:ea typeface="Calibri" pitchFamily="34" charset="-122"/>
-                <a:cs typeface="Calibri" pitchFamily="34" charset="-120"/>
-              </a:rPr>
-              <a:t>Cost sensitivity</a:t>
-            </a:r>
-            <a:endParaRPr lang="en-US" sz="1250" dirty="0"/>
-          </a:p>
-        </p:txBody>
-      </p:sp>
-      <p:sp>
-        <p:nvSpPr>
-          <p:cNvPr id="27" name="Text 24"/>
-          <p:cNvSpPr/>
-          <p:nvPr/>
-        </p:nvSpPr>
-        <p:spPr>
-          <a:xfrm>
-            <a:off x="3337560" y="4233672"/>
-            <a:ext cx="2743200" cy="566928"/>
-          </a:xfrm>
-          <a:prstGeom prst="rect">
-            <a:avLst/>
-          </a:prstGeom>
-          <a:noFill/>
-          <a:ln/>
-        </p:spPr>
-        <p:txBody>
-          <a:bodyPr wrap="square" rtlCol="0" anchor="ctr"/>
-          <a:lstStyle/>
-          <a:p>
-            <a:pPr algn="ctr" indent="0" marL="0">
-              <a:lnSpc>
-                <a:spcPts val="1400"/>
-              </a:lnSpc>
-              <a:buNone/>
-            </a:pPr>
-            <a:r>
-              <a:rPr lang="en-US" sz="1200" dirty="0">
-                <a:solidFill>
-                  <a:srgbClr val="1B1F27"/>
-                </a:solidFill>
-                <a:latin typeface="Calibri" pitchFamily="34" charset="0"/>
-                <a:ea typeface="Calibri" pitchFamily="34" charset="-122"/>
-                <a:cs typeface="Calibri" pitchFamily="34" charset="-120"/>
-              </a:rPr>
-              <a:t>High volume, cheap</a:t>
-            </a:r>
-            <a:endParaRPr lang="en-US" sz="1200" dirty="0"/>
-          </a:p>
-        </p:txBody>
-      </p:sp>
-      <p:sp>
-        <p:nvSpPr>
-          <p:cNvPr id="28" name="Text 25"/>
-          <p:cNvSpPr/>
-          <p:nvPr/>
-        </p:nvSpPr>
-        <p:spPr>
-          <a:xfrm>
-            <a:off x="6355080" y="4233672"/>
-            <a:ext cx="2514600" cy="566928"/>
-          </a:xfrm>
-          <a:prstGeom prst="rect">
-            <a:avLst/>
-          </a:prstGeom>
-          <a:noFill/>
-          <a:ln/>
-        </p:spPr>
-        <p:txBody>
-          <a:bodyPr wrap="square" rtlCol="0" anchor="ctr"/>
-          <a:lstStyle/>
-          <a:p>
-            <a:pPr algn="ctr" indent="0" marL="0">
-              <a:lnSpc>
-                <a:spcPts val="1400"/>
-              </a:lnSpc>
-              <a:buNone/>
-            </a:pPr>
-            <a:r>
-              <a:rPr lang="en-US" sz="1200" dirty="0">
-                <a:solidFill>
-                  <a:srgbClr val="1B1F27"/>
-                </a:solidFill>
-                <a:latin typeface="Calibri" pitchFamily="34" charset="0"/>
-                <a:ea typeface="Calibri" pitchFamily="34" charset="-122"/>
-                <a:cs typeface="Calibri" pitchFamily="34" charset="-120"/>
-              </a:rPr>
-              <a:t>Moderate</a:t>
-            </a:r>
-            <a:endParaRPr lang="en-US" sz="1200" dirty="0"/>
-          </a:p>
-        </p:txBody>
-      </p:sp>
-      <p:sp>
-        <p:nvSpPr>
-          <p:cNvPr id="29" name="Text 26"/>
-          <p:cNvSpPr/>
-          <p:nvPr/>
-        </p:nvSpPr>
-        <p:spPr>
-          <a:xfrm>
-            <a:off x="9144000" y="4233672"/>
-            <a:ext cx="2468880" cy="566928"/>
-          </a:xfrm>
-          <a:prstGeom prst="rect">
-            <a:avLst/>
-          </a:prstGeom>
-          <a:noFill/>
-          <a:ln/>
-        </p:spPr>
-        <p:txBody>
-          <a:bodyPr wrap="square" rtlCol="0" anchor="ctr"/>
-          <a:lstStyle/>
-          <a:p>
-            <a:pPr algn="ctr" indent="0" marL="0">
-              <a:lnSpc>
-                <a:spcPts val="1400"/>
-              </a:lnSpc>
-              <a:buNone/>
-            </a:pPr>
-            <a:r>
-              <a:rPr lang="en-US" sz="1200" dirty="0">
-                <a:solidFill>
-                  <a:srgbClr val="1B1F27"/>
-                </a:solidFill>
-                <a:latin typeface="Calibri" pitchFamily="34" charset="0"/>
-                <a:ea typeface="Calibri" pitchFamily="34" charset="-122"/>
-                <a:cs typeface="Calibri" pitchFamily="34" charset="-120"/>
-              </a:rPr>
-              <a:t>Lower volume, high value</a:t>
-            </a:r>
-            <a:endParaRPr lang="en-US" sz="1200" dirty="0"/>
-          </a:p>
-        </p:txBody>
-      </p:sp>
-      <p:sp>
-        <p:nvSpPr>
-          <p:cNvPr id="30" name="Shape 27"/>
-          <p:cNvSpPr/>
-          <p:nvPr/>
-        </p:nvSpPr>
-        <p:spPr>
-          <a:xfrm>
-            <a:off x="548640" y="4837176"/>
-            <a:ext cx="11155680" cy="658368"/>
-          </a:xfrm>
-          <a:prstGeom prst="rect">
-            <a:avLst/>
-          </a:prstGeom>
-          <a:solidFill>
-            <a:srgbClr val="F4F7F9"/>
-          </a:solidFill>
-          <a:ln/>
-        </p:spPr>
-      </p:sp>
-      <p:sp>
-        <p:nvSpPr>
-          <p:cNvPr id="31" name="Text 28"/>
-          <p:cNvSpPr/>
-          <p:nvPr/>
-        </p:nvSpPr>
-        <p:spPr>
-          <a:xfrm>
-            <a:off x="548640" y="4892040"/>
-            <a:ext cx="2606040" cy="566928"/>
-          </a:xfrm>
-          <a:prstGeom prst="rect">
-            <a:avLst/>
-          </a:prstGeom>
-          <a:noFill/>
-          <a:ln/>
-        </p:spPr>
-        <p:txBody>
-          <a:bodyPr wrap="square" rtlCol="0" anchor="ctr"/>
-          <a:lstStyle/>
-          <a:p>
-            <a:pPr indent="0" marL="0">
-              <a:buNone/>
-            </a:pPr>
-            <a:r>
-              <a:rPr lang="en-US" sz="1250" b="1" dirty="0">
-                <a:solidFill>
-                  <a:srgbClr val="1B1F27"/>
-                </a:solidFill>
-                <a:latin typeface="Calibri" pitchFamily="34" charset="0"/>
-                <a:ea typeface="Calibri" pitchFamily="34" charset="-122"/>
-                <a:cs typeface="Calibri" pitchFamily="34" charset="-120"/>
-              </a:rPr>
-              <a:t>Data control</a:t>
-            </a:r>
-            <a:endParaRPr lang="en-US" sz="1250" dirty="0"/>
-          </a:p>
-        </p:txBody>
-      </p:sp>
-      <p:sp>
-        <p:nvSpPr>
-          <p:cNvPr id="32" name="Text 29"/>
-          <p:cNvSpPr/>
-          <p:nvPr/>
-        </p:nvSpPr>
-        <p:spPr>
-          <a:xfrm>
-            <a:off x="3337560" y="4892040"/>
-            <a:ext cx="2743200" cy="566928"/>
-          </a:xfrm>
-          <a:prstGeom prst="rect">
-            <a:avLst/>
-          </a:prstGeom>
-          <a:noFill/>
-          <a:ln/>
-        </p:spPr>
-        <p:txBody>
-          <a:bodyPr wrap="square" rtlCol="0" anchor="ctr"/>
-          <a:lstStyle/>
-          <a:p>
-            <a:pPr algn="ctr" indent="0" marL="0">
-              <a:lnSpc>
-                <a:spcPts val="1400"/>
-              </a:lnSpc>
-              <a:buNone/>
-            </a:pPr>
-            <a:r>
-              <a:rPr lang="en-US" sz="1200" dirty="0">
-                <a:solidFill>
-                  <a:srgbClr val="1B1F27"/>
-                </a:solidFill>
-                <a:latin typeface="Calibri" pitchFamily="34" charset="0"/>
-                <a:ea typeface="Calibri" pitchFamily="34" charset="-122"/>
-                <a:cs typeface="Calibri" pitchFamily="34" charset="-120"/>
-              </a:rPr>
-              <a:t>On-device / on-prem</a:t>
-            </a:r>
-            <a:endParaRPr lang="en-US" sz="1200" dirty="0"/>
-          </a:p>
-        </p:txBody>
-      </p:sp>
-      <p:sp>
-        <p:nvSpPr>
-          <p:cNvPr id="33" name="Text 30"/>
-          <p:cNvSpPr/>
-          <p:nvPr/>
-        </p:nvSpPr>
-        <p:spPr>
-          <a:xfrm>
-            <a:off x="6355080" y="4892040"/>
-            <a:ext cx="2514600" cy="566928"/>
-          </a:xfrm>
-          <a:prstGeom prst="rect">
-            <a:avLst/>
-          </a:prstGeom>
-          <a:noFill/>
-          <a:ln/>
-        </p:spPr>
-        <p:txBody>
-          <a:bodyPr wrap="square" rtlCol="0" anchor="ctr"/>
-          <a:lstStyle/>
-          <a:p>
-            <a:pPr algn="ctr" indent="0" marL="0">
-              <a:lnSpc>
-                <a:spcPts val="1400"/>
-              </a:lnSpc>
-              <a:buNone/>
-            </a:pPr>
-            <a:r>
-              <a:rPr lang="en-US" sz="1200" dirty="0">
-                <a:solidFill>
-                  <a:srgbClr val="1B1F27"/>
-                </a:solidFill>
-                <a:latin typeface="Calibri" pitchFamily="34" charset="0"/>
-                <a:ea typeface="Calibri" pitchFamily="34" charset="-122"/>
-                <a:cs typeface="Calibri" pitchFamily="34" charset="-120"/>
-              </a:rPr>
-              <a:t>Flexible</a:t>
-            </a:r>
-            <a:endParaRPr lang="en-US" sz="1200" dirty="0"/>
-          </a:p>
-        </p:txBody>
-      </p:sp>
-      <p:sp>
-        <p:nvSpPr>
-          <p:cNvPr id="34" name="Text 31"/>
-          <p:cNvSpPr/>
-          <p:nvPr/>
-        </p:nvSpPr>
-        <p:spPr>
-          <a:xfrm>
-            <a:off x="9144000" y="4892040"/>
-            <a:ext cx="2468880" cy="566928"/>
-          </a:xfrm>
-          <a:prstGeom prst="rect">
-            <a:avLst/>
-          </a:prstGeom>
-          <a:noFill/>
-          <a:ln/>
-        </p:spPr>
-        <p:txBody>
-          <a:bodyPr wrap="square" rtlCol="0" anchor="ctr"/>
-          <a:lstStyle/>
-          <a:p>
-            <a:pPr algn="ctr" indent="0" marL="0">
-              <a:lnSpc>
-                <a:spcPts val="1400"/>
-              </a:lnSpc>
-              <a:buNone/>
-            </a:pPr>
-            <a:r>
-              <a:rPr lang="en-US" sz="1200" dirty="0">
-                <a:solidFill>
-                  <a:srgbClr val="1B1F27"/>
-                </a:solidFill>
-                <a:latin typeface="Calibri" pitchFamily="34" charset="0"/>
-                <a:ea typeface="Calibri" pitchFamily="34" charset="-122"/>
-                <a:cs typeface="Calibri" pitchFamily="34" charset="-120"/>
-              </a:rPr>
-              <a:t>Usually hosted API</a:t>
-            </a:r>
-            <a:endParaRPr lang="en-US" sz="1200" dirty="0"/>
-          </a:p>
-        </p:txBody>
-      </p:sp>
-      <p:sp>
-        <p:nvSpPr>
-          <p:cNvPr id="35" name="Text 32"/>
-          <p:cNvSpPr/>
-          <p:nvPr/>
-        </p:nvSpPr>
-        <p:spPr>
-          <a:xfrm>
-            <a:off x="457200" y="6446520"/>
-            <a:ext cx="3657600" cy="274320"/>
-          </a:xfrm>
-          <a:prstGeom prst="rect">
-            <a:avLst/>
-          </a:prstGeom>
-          <a:noFill/>
-          <a:ln/>
-        </p:spPr>
-        <p:txBody>
-          <a:bodyPr wrap="square" rtlCol="0" anchor="ctr"/>
-          <a:lstStyle/>
-          <a:p>
-            <a:pPr algn="l" indent="0" marL="0">
-              <a:buNone/>
-            </a:pPr>
-            <a:r>
-              <a:rPr lang="en-US" sz="1000" dirty="0">
+              <a:spcBef>
+                <a:spcPts val="200"/>
+              </a:spcBef>
+            </a:pPr>
+            <a:r>
+              <a:rPr sz="1200" b="0" i="0">
                 <a:solidFill>
                   <a:srgbClr val="5B6472"/>
                 </a:solidFill>
-                <a:latin typeface="Calibri" pitchFamily="34" charset="0"/>
-                <a:ea typeface="Calibri" pitchFamily="34" charset="-122"/>
-                <a:cs typeface="Calibri" pitchFamily="34" charset="-120"/>
-              </a:rPr>
-              <a:t>SLMs in Practice</a:t>
-            </a:r>
-            <a:endParaRPr lang="en-US" sz="1000" dirty="0"/>
-          </a:p>
-        </p:txBody>
-      </p:sp>
-      <p:sp>
-        <p:nvSpPr>
-          <p:cNvPr id="36" name="Text 33"/>
-          <p:cNvSpPr/>
-          <p:nvPr/>
-        </p:nvSpPr>
-        <p:spPr>
-          <a:xfrm>
-            <a:off x="11274552" y="6446520"/>
-            <a:ext cx="457200" cy="274320"/>
-          </a:xfrm>
-          <a:prstGeom prst="rect">
-            <a:avLst/>
-          </a:prstGeom>
-          <a:noFill/>
-          <a:ln/>
-        </p:spPr>
-        <p:txBody>
-          <a:bodyPr wrap="square" rtlCol="0" anchor="ctr"/>
-          <a:lstStyle/>
-          <a:p>
-            <a:pPr algn="r" indent="0" marL="0">
-              <a:buNone/>
-            </a:pPr>
-            <a:r>
-              <a:rPr lang="en-US" sz="1000" dirty="0">
-                <a:solidFill>
-                  <a:srgbClr val="5B6472"/>
-                </a:solidFill>
-                <a:latin typeface="Calibri" pitchFamily="34" charset="0"/>
-                <a:ea typeface="Calibri" pitchFamily="34" charset="-122"/>
-                <a:cs typeface="Calibri" pitchFamily="34" charset="-120"/>
-              </a:rPr>
-              <a:t>4</a:t>
-            </a:r>
-            <a:endParaRPr lang="en-US" sz="1000" dirty="0"/>
-          </a:p>
-        </p:txBody>
-      </p:sp>
+                <a:latin typeface="Calibri"/>
+              </a:rPr>
+              <a:t>Classification runs next to the document store — no data leaves the network, no per-call API fees.</a:t>
+            </a:r>
+          </a:p>
+        </p:txBody>
+      </p:sp>
+      <p:pic>
+        <p:nvPicPr>
+          <p:cNvPr id="48" name="Picture 47" descr="diagram_cropped.png"/>
+          <p:cNvPicPr>
+            <a:picLocks noChangeAspect="1"/>
+          </p:cNvPicPr>
+          <p:nvPr/>
+        </p:nvPicPr>
+        <p:blipFill>
+          <a:blip r:embed="rId4"/>
+          <a:stretch>
+            <a:fillRect/>
+          </a:stretch>
+        </p:blipFill>
+        <p:spPr>
+          <a:xfrm>
+            <a:off x="6172200" y="2377440"/>
+            <a:ext cx="5394960" cy="2579447"/>
+          </a:xfrm>
+          <a:prstGeom prst="rect">
+            <a:avLst/>
+          </a:prstGeom>
+        </p:spPr>
+      </p:pic>
     </p:spTree>
   </p:cSld>
   <p:clrMapOvr>
@@ -4780,12 +4102,1576 @@
 
 <file path=ppt/slides/slide5.xml><?xml version="1.0" encoding="utf-8"?>
 <p:sld xmlns:a="http://schemas.openxmlformats.org/drawingml/2006/main" xmlns:r="http://schemas.openxmlformats.org/officeDocument/2006/relationships" xmlns:p="http://schemas.openxmlformats.org/presentationml/2006/main">
+  <p:cSld>
+    <p:spTree>
+      <p:nvGrpSpPr>
+        <p:cNvPr id="1" name="">
+          <a:extLst>
+            <a:ext uri="{FF2B5EF4-FFF2-40B4-BE49-F238E27FC236}">
+              <a16:creationId xmlns:a16="http://schemas.microsoft.com/office/drawing/2014/main" id="{6EBFBB22-EA81-EDF0-D9B9-8324DF7A1DAC}"/>
+            </a:ext>
+          </a:extLst>
+        </p:cNvPr>
+        <p:cNvGrpSpPr/>
+        <p:nvPr/>
+      </p:nvGrpSpPr>
+      <p:grpSpPr>
+        <a:xfrm>
+          <a:off x="0" y="0"/>
+          <a:ext cx="0" cy="0"/>
+          <a:chOff x="0" y="0"/>
+          <a:chExt cx="0" cy="0"/>
+        </a:xfrm>
+      </p:grpSpPr>
+      <p:sp>
+        <p:nvSpPr>
+          <p:cNvPr id="2" name="Shape 0">
+            <a:extLst>
+              <a:ext uri="{FF2B5EF4-FFF2-40B4-BE49-F238E27FC236}">
+                <a16:creationId xmlns:a16="http://schemas.microsoft.com/office/drawing/2014/main" id="{8E2BC972-7CDE-B0F7-7CB3-4395A5C58561}"/>
+              </a:ext>
+            </a:extLst>
+          </p:cNvPr>
+          <p:cNvSpPr/>
+          <p:nvPr/>
+        </p:nvSpPr>
+        <p:spPr>
+          <a:xfrm>
+            <a:off x="548640" y="502920"/>
+            <a:ext cx="548640" cy="548640"/>
+          </a:xfrm>
+          <a:prstGeom prst="ellipse">
+            <a:avLst/>
+          </a:prstGeom>
+          <a:solidFill>
+            <a:srgbClr val="065A82"/>
+          </a:solidFill>
+          <a:ln/>
+        </p:spPr>
+        <p:txBody>
+          <a:bodyPr/>
+          <a:lstStyle/>
+          <a:p>
+            <a:endParaRPr lang="en-US"/>
+          </a:p>
+        </p:txBody>
+      </p:sp>
+      <p:pic>
+        <p:nvPicPr>
+          <p:cNvPr id="3" name="Image 0" descr="icons/balance.png">
+            <a:extLst>
+              <a:ext uri="{FF2B5EF4-FFF2-40B4-BE49-F238E27FC236}">
+                <a16:creationId xmlns:a16="http://schemas.microsoft.com/office/drawing/2014/main" id="{23861952-8A44-50DA-BA74-CF6E70B67FA8}"/>
+              </a:ext>
+            </a:extLst>
+          </p:cNvPr>
+          <p:cNvPicPr>
+            <a:picLocks noChangeAspect="1"/>
+          </p:cNvPicPr>
+          <p:nvPr/>
+        </p:nvPicPr>
+        <p:blipFill>
+          <a:blip r:embed="rId3"/>
+          <a:stretch>
+            <a:fillRect/>
+          </a:stretch>
+        </p:blipFill>
+        <p:spPr>
+          <a:xfrm>
+            <a:off x="619963" y="574243"/>
+            <a:ext cx="405994" cy="405994"/>
+          </a:xfrm>
+          <a:prstGeom prst="rect">
+            <a:avLst/>
+          </a:prstGeom>
+        </p:spPr>
+      </p:pic>
+      <p:sp>
+        <p:nvSpPr>
+          <p:cNvPr id="4" name="Text 1">
+            <a:extLst>
+              <a:ext uri="{FF2B5EF4-FFF2-40B4-BE49-F238E27FC236}">
+                <a16:creationId xmlns:a16="http://schemas.microsoft.com/office/drawing/2014/main" id="{632C1777-91F7-612D-8249-5117D744A74D}"/>
+              </a:ext>
+            </a:extLst>
+          </p:cNvPr>
+          <p:cNvSpPr/>
+          <p:nvPr/>
+        </p:nvSpPr>
+        <p:spPr>
+          <a:xfrm>
+            <a:off x="1234440" y="502920"/>
+            <a:ext cx="9144000" cy="548640"/>
+          </a:xfrm>
+          <a:prstGeom prst="rect">
+            <a:avLst/>
+          </a:prstGeom>
+          <a:noFill/>
+          <a:ln/>
+        </p:spPr>
+        <p:txBody>
+          <a:bodyPr wrap="square" rtlCol="0" anchor="ctr"/>
+          <a:lstStyle/>
+          <a:p>
+            <a:pPr marL="0" indent="0">
+              <a:buNone/>
+            </a:pPr>
+            <a:r>
+              <a:rPr lang="en-US" sz="3000" b="1" dirty="0">
+                <a:solidFill>
+                  <a:srgbClr val="1B1F27"/>
+                </a:solidFill>
+                <a:latin typeface="Cambria" pitchFamily="34" charset="0"/>
+                <a:ea typeface="Cambria" pitchFamily="34" charset="-122"/>
+                <a:cs typeface="Cambria" pitchFamily="34" charset="-120"/>
+              </a:rPr>
+              <a:t>What Should You Choose?</a:t>
+            </a:r>
+            <a:endParaRPr lang="en-US" sz="3000" dirty="0"/>
+          </a:p>
+        </p:txBody>
+      </p:sp>
+      <p:sp>
+        <p:nvSpPr>
+          <p:cNvPr id="5" name="Text 2">
+            <a:extLst>
+              <a:ext uri="{FF2B5EF4-FFF2-40B4-BE49-F238E27FC236}">
+                <a16:creationId xmlns:a16="http://schemas.microsoft.com/office/drawing/2014/main" id="{3E59760E-56D1-9BE4-59AA-324D9FE3FD1E}"/>
+              </a:ext>
+            </a:extLst>
+          </p:cNvPr>
+          <p:cNvSpPr/>
+          <p:nvPr/>
+        </p:nvSpPr>
+        <p:spPr>
+          <a:xfrm>
+            <a:off x="1234440" y="1051560"/>
+            <a:ext cx="9601200" cy="365760"/>
+          </a:xfrm>
+          <a:prstGeom prst="rect">
+            <a:avLst/>
+          </a:prstGeom>
+          <a:noFill/>
+          <a:ln/>
+        </p:spPr>
+        <p:txBody>
+          <a:bodyPr wrap="square" rtlCol="0" anchor="ctr"/>
+          <a:lstStyle/>
+          <a:p>
+            <a:pPr marL="0" indent="0">
+              <a:buNone/>
+            </a:pPr>
+            <a:r>
+              <a:rPr lang="en-US" sz="1300" i="1" dirty="0">
+                <a:solidFill>
+                  <a:srgbClr val="5B6472"/>
+                </a:solidFill>
+                <a:latin typeface="Calibri" pitchFamily="34" charset="0"/>
+                <a:ea typeface="Calibri" pitchFamily="34" charset="-122"/>
+                <a:cs typeface="Calibri" pitchFamily="34" charset="-120"/>
+              </a:rPr>
+              <a:t>Match the model to the job — bigger is not automatically better.</a:t>
+            </a:r>
+            <a:endParaRPr lang="en-US" sz="1300" dirty="0"/>
+          </a:p>
+        </p:txBody>
+      </p:sp>
+      <p:sp>
+        <p:nvSpPr>
+          <p:cNvPr id="6" name="Shape 3">
+            <a:extLst>
+              <a:ext uri="{FF2B5EF4-FFF2-40B4-BE49-F238E27FC236}">
+                <a16:creationId xmlns:a16="http://schemas.microsoft.com/office/drawing/2014/main" id="{FBFCBCC5-9B59-DEDE-3F3B-83D02A8A9A82}"/>
+              </a:ext>
+            </a:extLst>
+          </p:cNvPr>
+          <p:cNvSpPr/>
+          <p:nvPr/>
+        </p:nvSpPr>
+        <p:spPr>
+          <a:xfrm>
+            <a:off x="3246120" y="1691640"/>
+            <a:ext cx="2926080" cy="457200"/>
+          </a:xfrm>
+          <a:prstGeom prst="roundRect">
+            <a:avLst>
+              <a:gd name="adj" fmla="val 12000"/>
+            </a:avLst>
+          </a:prstGeom>
+          <a:solidFill>
+            <a:srgbClr val="3FBF9F"/>
+          </a:solidFill>
+          <a:ln/>
+        </p:spPr>
+        <p:txBody>
+          <a:bodyPr/>
+          <a:lstStyle/>
+          <a:p>
+            <a:endParaRPr lang="en-US"/>
+          </a:p>
+        </p:txBody>
+      </p:sp>
+      <p:sp>
+        <p:nvSpPr>
+          <p:cNvPr id="7" name="Shape 4">
+            <a:extLst>
+              <a:ext uri="{FF2B5EF4-FFF2-40B4-BE49-F238E27FC236}">
+                <a16:creationId xmlns:a16="http://schemas.microsoft.com/office/drawing/2014/main" id="{0780F0F4-BF09-61A2-DFD5-A8F9001687FB}"/>
+              </a:ext>
+            </a:extLst>
+          </p:cNvPr>
+          <p:cNvSpPr/>
+          <p:nvPr/>
+        </p:nvSpPr>
+        <p:spPr>
+          <a:xfrm>
+            <a:off x="6263640" y="1691640"/>
+            <a:ext cx="2697480" cy="457200"/>
+          </a:xfrm>
+          <a:prstGeom prst="roundRect">
+            <a:avLst>
+              <a:gd name="adj" fmla="val 12000"/>
+            </a:avLst>
+          </a:prstGeom>
+          <a:solidFill>
+            <a:srgbClr val="1C7293"/>
+          </a:solidFill>
+          <a:ln/>
+        </p:spPr>
+        <p:txBody>
+          <a:bodyPr/>
+          <a:lstStyle/>
+          <a:p>
+            <a:endParaRPr lang="en-US"/>
+          </a:p>
+        </p:txBody>
+      </p:sp>
+      <p:sp>
+        <p:nvSpPr>
+          <p:cNvPr id="8" name="Shape 5">
+            <a:extLst>
+              <a:ext uri="{FF2B5EF4-FFF2-40B4-BE49-F238E27FC236}">
+                <a16:creationId xmlns:a16="http://schemas.microsoft.com/office/drawing/2014/main" id="{573BA2DF-DB60-2A50-A07E-FB05749F10F4}"/>
+              </a:ext>
+            </a:extLst>
+          </p:cNvPr>
+          <p:cNvSpPr/>
+          <p:nvPr/>
+        </p:nvSpPr>
+        <p:spPr>
+          <a:xfrm>
+            <a:off x="9052560" y="1691640"/>
+            <a:ext cx="2651760" cy="457200"/>
+          </a:xfrm>
+          <a:prstGeom prst="roundRect">
+            <a:avLst>
+              <a:gd name="adj" fmla="val 12000"/>
+            </a:avLst>
+          </a:prstGeom>
+          <a:solidFill>
+            <a:srgbClr val="21295C"/>
+          </a:solidFill>
+          <a:ln/>
+        </p:spPr>
+        <p:txBody>
+          <a:bodyPr/>
+          <a:lstStyle/>
+          <a:p>
+            <a:endParaRPr lang="en-US"/>
+          </a:p>
+        </p:txBody>
+      </p:sp>
+      <p:sp>
+        <p:nvSpPr>
+          <p:cNvPr id="9" name="Text 6">
+            <a:extLst>
+              <a:ext uri="{FF2B5EF4-FFF2-40B4-BE49-F238E27FC236}">
+                <a16:creationId xmlns:a16="http://schemas.microsoft.com/office/drawing/2014/main" id="{925A09F7-36CB-BC1D-B58D-C13175B412C7}"/>
+              </a:ext>
+            </a:extLst>
+          </p:cNvPr>
+          <p:cNvSpPr/>
+          <p:nvPr/>
+        </p:nvSpPr>
+        <p:spPr>
+          <a:xfrm>
+            <a:off x="3246120" y="1691640"/>
+            <a:ext cx="2926080" cy="457200"/>
+          </a:xfrm>
+          <a:prstGeom prst="rect">
+            <a:avLst/>
+          </a:prstGeom>
+          <a:noFill/>
+          <a:ln/>
+        </p:spPr>
+        <p:txBody>
+          <a:bodyPr wrap="square" rtlCol="0" anchor="ctr"/>
+          <a:lstStyle/>
+          <a:p>
+            <a:pPr marL="0" indent="0" algn="ctr">
+              <a:buNone/>
+            </a:pPr>
+            <a:r>
+              <a:rPr lang="en-US" sz="1400" b="1" dirty="0">
+                <a:solidFill>
+                  <a:srgbClr val="FFFFFF"/>
+                </a:solidFill>
+                <a:latin typeface="Calibri" pitchFamily="34" charset="0"/>
+                <a:ea typeface="Calibri" pitchFamily="34" charset="-122"/>
+                <a:cs typeface="Calibri" pitchFamily="34" charset="-120"/>
+              </a:rPr>
+              <a:t>SLM</a:t>
+            </a:r>
+            <a:endParaRPr lang="en-US" sz="1400" dirty="0"/>
+          </a:p>
+        </p:txBody>
+      </p:sp>
+      <p:sp>
+        <p:nvSpPr>
+          <p:cNvPr id="10" name="Text 7">
+            <a:extLst>
+              <a:ext uri="{FF2B5EF4-FFF2-40B4-BE49-F238E27FC236}">
+                <a16:creationId xmlns:a16="http://schemas.microsoft.com/office/drawing/2014/main" id="{BED746AE-3996-EE20-F62A-F9E24BEFF1F4}"/>
+              </a:ext>
+            </a:extLst>
+          </p:cNvPr>
+          <p:cNvSpPr/>
+          <p:nvPr/>
+        </p:nvSpPr>
+        <p:spPr>
+          <a:xfrm>
+            <a:off x="6263640" y="1691640"/>
+            <a:ext cx="2697480" cy="457200"/>
+          </a:xfrm>
+          <a:prstGeom prst="rect">
+            <a:avLst/>
+          </a:prstGeom>
+          <a:noFill/>
+          <a:ln/>
+        </p:spPr>
+        <p:txBody>
+          <a:bodyPr wrap="square" rtlCol="0" anchor="ctr"/>
+          <a:lstStyle/>
+          <a:p>
+            <a:pPr marL="0" indent="0" algn="ctr">
+              <a:buNone/>
+            </a:pPr>
+            <a:r>
+              <a:rPr lang="en-US" sz="1400" b="1" dirty="0">
+                <a:solidFill>
+                  <a:srgbClr val="FFFFFF"/>
+                </a:solidFill>
+                <a:latin typeface="Calibri" pitchFamily="34" charset="0"/>
+                <a:ea typeface="Calibri" pitchFamily="34" charset="-122"/>
+                <a:cs typeface="Calibri" pitchFamily="34" charset="-120"/>
+              </a:rPr>
+              <a:t>LLM</a:t>
+            </a:r>
+            <a:endParaRPr lang="en-US" sz="1400" dirty="0"/>
+          </a:p>
+        </p:txBody>
+      </p:sp>
+      <p:sp>
+        <p:nvSpPr>
+          <p:cNvPr id="11" name="Text 8">
+            <a:extLst>
+              <a:ext uri="{FF2B5EF4-FFF2-40B4-BE49-F238E27FC236}">
+                <a16:creationId xmlns:a16="http://schemas.microsoft.com/office/drawing/2014/main" id="{E551B76D-529B-7683-4330-50EA845DD37A}"/>
+              </a:ext>
+            </a:extLst>
+          </p:cNvPr>
+          <p:cNvSpPr/>
+          <p:nvPr/>
+        </p:nvSpPr>
+        <p:spPr>
+          <a:xfrm>
+            <a:off x="9052560" y="1691640"/>
+            <a:ext cx="2651760" cy="457200"/>
+          </a:xfrm>
+          <a:prstGeom prst="rect">
+            <a:avLst/>
+          </a:prstGeom>
+          <a:noFill/>
+          <a:ln/>
+        </p:spPr>
+        <p:txBody>
+          <a:bodyPr wrap="square" rtlCol="0" anchor="ctr"/>
+          <a:lstStyle/>
+          <a:p>
+            <a:pPr marL="0" indent="0" algn="ctr">
+              <a:buNone/>
+            </a:pPr>
+            <a:r>
+              <a:rPr lang="en-US" sz="1400" b="1" dirty="0">
+                <a:solidFill>
+                  <a:srgbClr val="FFFFFF"/>
+                </a:solidFill>
+                <a:latin typeface="Calibri" pitchFamily="34" charset="0"/>
+                <a:ea typeface="Calibri" pitchFamily="34" charset="-122"/>
+                <a:cs typeface="Calibri" pitchFamily="34" charset="-120"/>
+              </a:rPr>
+              <a:t>Frontier (FLM)</a:t>
+            </a:r>
+            <a:endParaRPr lang="en-US" sz="1400" dirty="0"/>
+          </a:p>
+        </p:txBody>
+      </p:sp>
+      <p:sp>
+        <p:nvSpPr>
+          <p:cNvPr id="12" name="Shape 9">
+            <a:extLst>
+              <a:ext uri="{FF2B5EF4-FFF2-40B4-BE49-F238E27FC236}">
+                <a16:creationId xmlns:a16="http://schemas.microsoft.com/office/drawing/2014/main" id="{86156998-862D-6D89-E9B7-FA9050ABA176}"/>
+              </a:ext>
+            </a:extLst>
+          </p:cNvPr>
+          <p:cNvSpPr/>
+          <p:nvPr/>
+        </p:nvSpPr>
+        <p:spPr>
+          <a:xfrm>
+            <a:off x="548640" y="2203704"/>
+            <a:ext cx="11155680" cy="658368"/>
+          </a:xfrm>
+          <a:prstGeom prst="rect">
+            <a:avLst/>
+          </a:prstGeom>
+          <a:solidFill>
+            <a:srgbClr val="F4F7F9"/>
+          </a:solidFill>
+          <a:ln/>
+        </p:spPr>
+        <p:txBody>
+          <a:bodyPr/>
+          <a:lstStyle/>
+          <a:p>
+            <a:endParaRPr lang="en-US"/>
+          </a:p>
+        </p:txBody>
+      </p:sp>
+      <p:sp>
+        <p:nvSpPr>
+          <p:cNvPr id="13" name="Text 10">
+            <a:extLst>
+              <a:ext uri="{FF2B5EF4-FFF2-40B4-BE49-F238E27FC236}">
+                <a16:creationId xmlns:a16="http://schemas.microsoft.com/office/drawing/2014/main" id="{B7BA498B-73B5-CED3-314E-B8D5B2ADD2BD}"/>
+              </a:ext>
+            </a:extLst>
+          </p:cNvPr>
+          <p:cNvSpPr/>
+          <p:nvPr/>
+        </p:nvSpPr>
+        <p:spPr>
+          <a:xfrm>
+            <a:off x="548640" y="2258568"/>
+            <a:ext cx="2606040" cy="566928"/>
+          </a:xfrm>
+          <a:prstGeom prst="rect">
+            <a:avLst/>
+          </a:prstGeom>
+          <a:noFill/>
+          <a:ln/>
+        </p:spPr>
+        <p:txBody>
+          <a:bodyPr wrap="square" rtlCol="0" anchor="ctr"/>
+          <a:lstStyle/>
+          <a:p>
+            <a:pPr marL="0" indent="0">
+              <a:buNone/>
+            </a:pPr>
+            <a:r>
+              <a:rPr lang="en-US" sz="1250" b="1" dirty="0">
+                <a:solidFill>
+                  <a:srgbClr val="1B1F27"/>
+                </a:solidFill>
+                <a:latin typeface="Calibri" pitchFamily="34" charset="0"/>
+                <a:ea typeface="Calibri" pitchFamily="34" charset="-122"/>
+                <a:cs typeface="Calibri" pitchFamily="34" charset="-120"/>
+              </a:rPr>
+              <a:t>Task shape</a:t>
+            </a:r>
+            <a:endParaRPr lang="en-US" sz="1250" dirty="0"/>
+          </a:p>
+        </p:txBody>
+      </p:sp>
+      <p:sp>
+        <p:nvSpPr>
+          <p:cNvPr id="14" name="Text 11">
+            <a:extLst>
+              <a:ext uri="{FF2B5EF4-FFF2-40B4-BE49-F238E27FC236}">
+                <a16:creationId xmlns:a16="http://schemas.microsoft.com/office/drawing/2014/main" id="{61D92056-CD8C-EA14-0FA9-11AE944FBA50}"/>
+              </a:ext>
+            </a:extLst>
+          </p:cNvPr>
+          <p:cNvSpPr/>
+          <p:nvPr/>
+        </p:nvSpPr>
+        <p:spPr>
+          <a:xfrm>
+            <a:off x="3337560" y="2258568"/>
+            <a:ext cx="2743200" cy="566928"/>
+          </a:xfrm>
+          <a:prstGeom prst="rect">
+            <a:avLst/>
+          </a:prstGeom>
+          <a:noFill/>
+          <a:ln/>
+        </p:spPr>
+        <p:txBody>
+          <a:bodyPr wrap="square" rtlCol="0" anchor="ctr"/>
+          <a:lstStyle/>
+          <a:p>
+            <a:pPr marL="0" indent="0" algn="ctr">
+              <a:lnSpc>
+                <a:spcPts val="1400"/>
+              </a:lnSpc>
+              <a:buNone/>
+            </a:pPr>
+            <a:r>
+              <a:rPr lang="en-US" sz="1200" dirty="0">
+                <a:solidFill>
+                  <a:srgbClr val="1B1F27"/>
+                </a:solidFill>
+                <a:latin typeface="Calibri" pitchFamily="34" charset="0"/>
+                <a:ea typeface="Calibri" pitchFamily="34" charset="-122"/>
+                <a:cs typeface="Calibri" pitchFamily="34" charset="-120"/>
+              </a:rPr>
+              <a:t>Fixed taxonomy / narrow rule</a:t>
+            </a:r>
+            <a:endParaRPr lang="en-US" sz="1200" dirty="0"/>
+          </a:p>
+        </p:txBody>
+      </p:sp>
+      <p:sp>
+        <p:nvSpPr>
+          <p:cNvPr id="15" name="Text 12">
+            <a:extLst>
+              <a:ext uri="{FF2B5EF4-FFF2-40B4-BE49-F238E27FC236}">
+                <a16:creationId xmlns:a16="http://schemas.microsoft.com/office/drawing/2014/main" id="{B19EF535-6201-DAF1-321B-15F872A1E0E5}"/>
+              </a:ext>
+            </a:extLst>
+          </p:cNvPr>
+          <p:cNvSpPr/>
+          <p:nvPr/>
+        </p:nvSpPr>
+        <p:spPr>
+          <a:xfrm>
+            <a:off x="6355080" y="2258568"/>
+            <a:ext cx="2514600" cy="566928"/>
+          </a:xfrm>
+          <a:prstGeom prst="rect">
+            <a:avLst/>
+          </a:prstGeom>
+          <a:noFill/>
+          <a:ln/>
+        </p:spPr>
+        <p:txBody>
+          <a:bodyPr wrap="square" rtlCol="0" anchor="ctr"/>
+          <a:lstStyle/>
+          <a:p>
+            <a:pPr marL="0" indent="0" algn="ctr">
+              <a:lnSpc>
+                <a:spcPts val="1400"/>
+              </a:lnSpc>
+              <a:buNone/>
+            </a:pPr>
+            <a:r>
+              <a:rPr lang="en-US" sz="1200" dirty="0">
+                <a:solidFill>
+                  <a:srgbClr val="1B1F27"/>
+                </a:solidFill>
+                <a:latin typeface="Calibri" pitchFamily="34" charset="0"/>
+                <a:ea typeface="Calibri" pitchFamily="34" charset="-122"/>
+                <a:cs typeface="Calibri" pitchFamily="34" charset="-120"/>
+              </a:rPr>
+              <a:t>Broad, open-ended</a:t>
+            </a:r>
+            <a:endParaRPr lang="en-US" sz="1200" dirty="0"/>
+          </a:p>
+        </p:txBody>
+      </p:sp>
+      <p:sp>
+        <p:nvSpPr>
+          <p:cNvPr id="16" name="Text 13">
+            <a:extLst>
+              <a:ext uri="{FF2B5EF4-FFF2-40B4-BE49-F238E27FC236}">
+                <a16:creationId xmlns:a16="http://schemas.microsoft.com/office/drawing/2014/main" id="{C5382899-96F6-930A-1A41-1E931B22BE4D}"/>
+              </a:ext>
+            </a:extLst>
+          </p:cNvPr>
+          <p:cNvSpPr/>
+          <p:nvPr/>
+        </p:nvSpPr>
+        <p:spPr>
+          <a:xfrm>
+            <a:off x="9144000" y="2258568"/>
+            <a:ext cx="2468880" cy="566928"/>
+          </a:xfrm>
+          <a:prstGeom prst="rect">
+            <a:avLst/>
+          </a:prstGeom>
+          <a:noFill/>
+          <a:ln/>
+        </p:spPr>
+        <p:txBody>
+          <a:bodyPr wrap="square" rtlCol="0" anchor="ctr"/>
+          <a:lstStyle/>
+          <a:p>
+            <a:pPr marL="0" indent="0" algn="ctr">
+              <a:lnSpc>
+                <a:spcPts val="1400"/>
+              </a:lnSpc>
+              <a:buNone/>
+            </a:pPr>
+            <a:r>
+              <a:rPr lang="en-US" sz="1200" dirty="0">
+                <a:solidFill>
+                  <a:srgbClr val="1B1F27"/>
+                </a:solidFill>
+                <a:latin typeface="Calibri" pitchFamily="34" charset="0"/>
+                <a:ea typeface="Calibri" pitchFamily="34" charset="-122"/>
+                <a:cs typeface="Calibri" pitchFamily="34" charset="-120"/>
+              </a:rPr>
+              <a:t>Multi-step, ambiguous</a:t>
+            </a:r>
+            <a:endParaRPr lang="en-US" sz="1200" dirty="0"/>
+          </a:p>
+        </p:txBody>
+      </p:sp>
+      <p:sp>
+        <p:nvSpPr>
+          <p:cNvPr id="17" name="Text 14">
+            <a:extLst>
+              <a:ext uri="{FF2B5EF4-FFF2-40B4-BE49-F238E27FC236}">
+                <a16:creationId xmlns:a16="http://schemas.microsoft.com/office/drawing/2014/main" id="{EAE421AE-1999-5F57-CC48-DBC601D13AA4}"/>
+              </a:ext>
+            </a:extLst>
+          </p:cNvPr>
+          <p:cNvSpPr/>
+          <p:nvPr/>
+        </p:nvSpPr>
+        <p:spPr>
+          <a:xfrm>
+            <a:off x="548640" y="2916936"/>
+            <a:ext cx="2606040" cy="566928"/>
+          </a:xfrm>
+          <a:prstGeom prst="rect">
+            <a:avLst/>
+          </a:prstGeom>
+          <a:noFill/>
+          <a:ln/>
+        </p:spPr>
+        <p:txBody>
+          <a:bodyPr wrap="square" rtlCol="0" anchor="ctr"/>
+          <a:lstStyle/>
+          <a:p>
+            <a:pPr marL="0" indent="0">
+              <a:buNone/>
+            </a:pPr>
+            <a:r>
+              <a:rPr lang="en-US" sz="1250" b="1" dirty="0">
+                <a:solidFill>
+                  <a:srgbClr val="1B1F27"/>
+                </a:solidFill>
+                <a:latin typeface="Calibri" pitchFamily="34" charset="0"/>
+                <a:ea typeface="Calibri" pitchFamily="34" charset="-122"/>
+                <a:cs typeface="Calibri" pitchFamily="34" charset="-120"/>
+              </a:rPr>
+              <a:t>Reasoning depth</a:t>
+            </a:r>
+            <a:endParaRPr lang="en-US" sz="1250" dirty="0"/>
+          </a:p>
+        </p:txBody>
+      </p:sp>
+      <p:sp>
+        <p:nvSpPr>
+          <p:cNvPr id="18" name="Text 15">
+            <a:extLst>
+              <a:ext uri="{FF2B5EF4-FFF2-40B4-BE49-F238E27FC236}">
+                <a16:creationId xmlns:a16="http://schemas.microsoft.com/office/drawing/2014/main" id="{150BCEA8-1C54-D193-C276-18221C63C250}"/>
+              </a:ext>
+            </a:extLst>
+          </p:cNvPr>
+          <p:cNvSpPr/>
+          <p:nvPr/>
+        </p:nvSpPr>
+        <p:spPr>
+          <a:xfrm>
+            <a:off x="3337560" y="2916936"/>
+            <a:ext cx="2743200" cy="566928"/>
+          </a:xfrm>
+          <a:prstGeom prst="rect">
+            <a:avLst/>
+          </a:prstGeom>
+          <a:noFill/>
+          <a:ln/>
+        </p:spPr>
+        <p:txBody>
+          <a:bodyPr wrap="square" rtlCol="0" anchor="ctr"/>
+          <a:lstStyle/>
+          <a:p>
+            <a:pPr marL="0" indent="0" algn="ctr">
+              <a:lnSpc>
+                <a:spcPts val="1400"/>
+              </a:lnSpc>
+              <a:buNone/>
+            </a:pPr>
+            <a:r>
+              <a:rPr lang="en-US" sz="1200" dirty="0">
+                <a:solidFill>
+                  <a:srgbClr val="1B1F27"/>
+                </a:solidFill>
+                <a:latin typeface="Calibri" pitchFamily="34" charset="0"/>
+                <a:ea typeface="Calibri" pitchFamily="34" charset="-122"/>
+                <a:cs typeface="Calibri" pitchFamily="34" charset="-120"/>
+              </a:rPr>
+              <a:t>Pattern match</a:t>
+            </a:r>
+            <a:endParaRPr lang="en-US" sz="1200" dirty="0"/>
+          </a:p>
+        </p:txBody>
+      </p:sp>
+      <p:sp>
+        <p:nvSpPr>
+          <p:cNvPr id="19" name="Text 16">
+            <a:extLst>
+              <a:ext uri="{FF2B5EF4-FFF2-40B4-BE49-F238E27FC236}">
+                <a16:creationId xmlns:a16="http://schemas.microsoft.com/office/drawing/2014/main" id="{B51A424B-ED69-AA56-D6D3-C99A6EC46321}"/>
+              </a:ext>
+            </a:extLst>
+          </p:cNvPr>
+          <p:cNvSpPr/>
+          <p:nvPr/>
+        </p:nvSpPr>
+        <p:spPr>
+          <a:xfrm>
+            <a:off x="6355080" y="2916936"/>
+            <a:ext cx="2514600" cy="566928"/>
+          </a:xfrm>
+          <a:prstGeom prst="rect">
+            <a:avLst/>
+          </a:prstGeom>
+          <a:noFill/>
+          <a:ln/>
+        </p:spPr>
+        <p:txBody>
+          <a:bodyPr wrap="square" rtlCol="0" anchor="ctr"/>
+          <a:lstStyle/>
+          <a:p>
+            <a:pPr marL="0" indent="0" algn="ctr">
+              <a:lnSpc>
+                <a:spcPts val="1400"/>
+              </a:lnSpc>
+              <a:buNone/>
+            </a:pPr>
+            <a:r>
+              <a:rPr lang="en-US" sz="1200" dirty="0">
+                <a:solidFill>
+                  <a:srgbClr val="1B1F27"/>
+                </a:solidFill>
+                <a:latin typeface="Calibri" pitchFamily="34" charset="0"/>
+                <a:ea typeface="Calibri" pitchFamily="34" charset="-122"/>
+                <a:cs typeface="Calibri" pitchFamily="34" charset="-120"/>
+              </a:rPr>
+              <a:t>Moderate synthesis</a:t>
+            </a:r>
+            <a:endParaRPr lang="en-US" sz="1200" dirty="0"/>
+          </a:p>
+        </p:txBody>
+      </p:sp>
+      <p:sp>
+        <p:nvSpPr>
+          <p:cNvPr id="20" name="Text 17">
+            <a:extLst>
+              <a:ext uri="{FF2B5EF4-FFF2-40B4-BE49-F238E27FC236}">
+                <a16:creationId xmlns:a16="http://schemas.microsoft.com/office/drawing/2014/main" id="{BB0F0EF9-5F00-4927-2C8E-A54AD5896B0E}"/>
+              </a:ext>
+            </a:extLst>
+          </p:cNvPr>
+          <p:cNvSpPr/>
+          <p:nvPr/>
+        </p:nvSpPr>
+        <p:spPr>
+          <a:xfrm>
+            <a:off x="9144000" y="2916936"/>
+            <a:ext cx="2468880" cy="566928"/>
+          </a:xfrm>
+          <a:prstGeom prst="rect">
+            <a:avLst/>
+          </a:prstGeom>
+          <a:noFill/>
+          <a:ln/>
+        </p:spPr>
+        <p:txBody>
+          <a:bodyPr wrap="square" rtlCol="0" anchor="ctr"/>
+          <a:lstStyle/>
+          <a:p>
+            <a:pPr marL="0" indent="0" algn="ctr">
+              <a:lnSpc>
+                <a:spcPts val="1400"/>
+              </a:lnSpc>
+              <a:buNone/>
+            </a:pPr>
+            <a:r>
+              <a:rPr lang="en-US" sz="1200" dirty="0">
+                <a:solidFill>
+                  <a:srgbClr val="1B1F27"/>
+                </a:solidFill>
+                <a:latin typeface="Calibri" pitchFamily="34" charset="0"/>
+                <a:ea typeface="Calibri" pitchFamily="34" charset="-122"/>
+                <a:cs typeface="Calibri" pitchFamily="34" charset="-120"/>
+              </a:rPr>
+              <a:t>Deep, chained reasoning</a:t>
+            </a:r>
+            <a:endParaRPr lang="en-US" sz="1200" dirty="0"/>
+          </a:p>
+        </p:txBody>
+      </p:sp>
+      <p:sp>
+        <p:nvSpPr>
+          <p:cNvPr id="21" name="Shape 18">
+            <a:extLst>
+              <a:ext uri="{FF2B5EF4-FFF2-40B4-BE49-F238E27FC236}">
+                <a16:creationId xmlns:a16="http://schemas.microsoft.com/office/drawing/2014/main" id="{EDA9FE0C-D24C-D485-72F8-DAD67D5B9FB7}"/>
+              </a:ext>
+            </a:extLst>
+          </p:cNvPr>
+          <p:cNvSpPr/>
+          <p:nvPr/>
+        </p:nvSpPr>
+        <p:spPr>
+          <a:xfrm>
+            <a:off x="548640" y="3520440"/>
+            <a:ext cx="11155680" cy="658368"/>
+          </a:xfrm>
+          <a:prstGeom prst="rect">
+            <a:avLst/>
+          </a:prstGeom>
+          <a:solidFill>
+            <a:srgbClr val="F4F7F9"/>
+          </a:solidFill>
+          <a:ln/>
+        </p:spPr>
+        <p:txBody>
+          <a:bodyPr/>
+          <a:lstStyle/>
+          <a:p>
+            <a:endParaRPr lang="en-US"/>
+          </a:p>
+        </p:txBody>
+      </p:sp>
+      <p:sp>
+        <p:nvSpPr>
+          <p:cNvPr id="22" name="Text 19">
+            <a:extLst>
+              <a:ext uri="{FF2B5EF4-FFF2-40B4-BE49-F238E27FC236}">
+                <a16:creationId xmlns:a16="http://schemas.microsoft.com/office/drawing/2014/main" id="{BF8F7E0A-C3DD-166C-C9D5-4FC78D281D44}"/>
+              </a:ext>
+            </a:extLst>
+          </p:cNvPr>
+          <p:cNvSpPr/>
+          <p:nvPr/>
+        </p:nvSpPr>
+        <p:spPr>
+          <a:xfrm>
+            <a:off x="548640" y="3575304"/>
+            <a:ext cx="2606040" cy="566928"/>
+          </a:xfrm>
+          <a:prstGeom prst="rect">
+            <a:avLst/>
+          </a:prstGeom>
+          <a:noFill/>
+          <a:ln/>
+        </p:spPr>
+        <p:txBody>
+          <a:bodyPr wrap="square" rtlCol="0" anchor="ctr"/>
+          <a:lstStyle/>
+          <a:p>
+            <a:pPr marL="0" indent="0">
+              <a:buNone/>
+            </a:pPr>
+            <a:r>
+              <a:rPr lang="en-US" sz="1250" b="1" dirty="0">
+                <a:solidFill>
+                  <a:srgbClr val="1B1F27"/>
+                </a:solidFill>
+                <a:latin typeface="Calibri" pitchFamily="34" charset="0"/>
+                <a:ea typeface="Calibri" pitchFamily="34" charset="-122"/>
+                <a:cs typeface="Calibri" pitchFamily="34" charset="-120"/>
+              </a:rPr>
+              <a:t>Latency need</a:t>
+            </a:r>
+            <a:endParaRPr lang="en-US" sz="1250" dirty="0"/>
+          </a:p>
+        </p:txBody>
+      </p:sp>
+      <p:sp>
+        <p:nvSpPr>
+          <p:cNvPr id="23" name="Text 20">
+            <a:extLst>
+              <a:ext uri="{FF2B5EF4-FFF2-40B4-BE49-F238E27FC236}">
+                <a16:creationId xmlns:a16="http://schemas.microsoft.com/office/drawing/2014/main" id="{BAB9D21C-3708-D236-1FDD-C69953B70BC0}"/>
+              </a:ext>
+            </a:extLst>
+          </p:cNvPr>
+          <p:cNvSpPr/>
+          <p:nvPr/>
+        </p:nvSpPr>
+        <p:spPr>
+          <a:xfrm>
+            <a:off x="3337560" y="3575304"/>
+            <a:ext cx="2743200" cy="566928"/>
+          </a:xfrm>
+          <a:prstGeom prst="rect">
+            <a:avLst/>
+          </a:prstGeom>
+          <a:noFill/>
+          <a:ln/>
+        </p:spPr>
+        <p:txBody>
+          <a:bodyPr wrap="square" rtlCol="0" anchor="ctr"/>
+          <a:lstStyle/>
+          <a:p>
+            <a:pPr marL="0" indent="0" algn="ctr">
+              <a:lnSpc>
+                <a:spcPts val="1400"/>
+              </a:lnSpc>
+              <a:buNone/>
+            </a:pPr>
+            <a:r>
+              <a:rPr lang="en-US" sz="1200" dirty="0">
+                <a:solidFill>
+                  <a:srgbClr val="1B1F27"/>
+                </a:solidFill>
+                <a:latin typeface="Calibri" pitchFamily="34" charset="0"/>
+                <a:ea typeface="Calibri" pitchFamily="34" charset="-122"/>
+                <a:cs typeface="Calibri" pitchFamily="34" charset="-120"/>
+              </a:rPr>
+              <a:t>Sub-second</a:t>
+            </a:r>
+            <a:endParaRPr lang="en-US" sz="1200" dirty="0"/>
+          </a:p>
+        </p:txBody>
+      </p:sp>
+      <p:sp>
+        <p:nvSpPr>
+          <p:cNvPr id="24" name="Text 21">
+            <a:extLst>
+              <a:ext uri="{FF2B5EF4-FFF2-40B4-BE49-F238E27FC236}">
+                <a16:creationId xmlns:a16="http://schemas.microsoft.com/office/drawing/2014/main" id="{D0E0E890-C144-1E40-4CD9-C29278DA20CD}"/>
+              </a:ext>
+            </a:extLst>
+          </p:cNvPr>
+          <p:cNvSpPr/>
+          <p:nvPr/>
+        </p:nvSpPr>
+        <p:spPr>
+          <a:xfrm>
+            <a:off x="6355080" y="3575304"/>
+            <a:ext cx="2514600" cy="566928"/>
+          </a:xfrm>
+          <a:prstGeom prst="rect">
+            <a:avLst/>
+          </a:prstGeom>
+          <a:noFill/>
+          <a:ln/>
+        </p:spPr>
+        <p:txBody>
+          <a:bodyPr wrap="square" rtlCol="0" anchor="ctr"/>
+          <a:lstStyle/>
+          <a:p>
+            <a:pPr marL="0" indent="0" algn="ctr">
+              <a:lnSpc>
+                <a:spcPts val="1400"/>
+              </a:lnSpc>
+              <a:buNone/>
+            </a:pPr>
+            <a:r>
+              <a:rPr lang="en-US" sz="1200" dirty="0">
+                <a:solidFill>
+                  <a:srgbClr val="1B1F27"/>
+                </a:solidFill>
+                <a:latin typeface="Calibri" pitchFamily="34" charset="0"/>
+                <a:ea typeface="Calibri" pitchFamily="34" charset="-122"/>
+                <a:cs typeface="Calibri" pitchFamily="34" charset="-120"/>
+              </a:rPr>
+              <a:t>A few seconds</a:t>
+            </a:r>
+            <a:endParaRPr lang="en-US" sz="1200" dirty="0"/>
+          </a:p>
+        </p:txBody>
+      </p:sp>
+      <p:sp>
+        <p:nvSpPr>
+          <p:cNvPr id="25" name="Text 22">
+            <a:extLst>
+              <a:ext uri="{FF2B5EF4-FFF2-40B4-BE49-F238E27FC236}">
+                <a16:creationId xmlns:a16="http://schemas.microsoft.com/office/drawing/2014/main" id="{2CD3B1D7-80FB-1163-BB36-ED661CF6BD90}"/>
+              </a:ext>
+            </a:extLst>
+          </p:cNvPr>
+          <p:cNvSpPr/>
+          <p:nvPr/>
+        </p:nvSpPr>
+        <p:spPr>
+          <a:xfrm>
+            <a:off x="9144000" y="3575304"/>
+            <a:ext cx="2468880" cy="566928"/>
+          </a:xfrm>
+          <a:prstGeom prst="rect">
+            <a:avLst/>
+          </a:prstGeom>
+          <a:noFill/>
+          <a:ln/>
+        </p:spPr>
+        <p:txBody>
+          <a:bodyPr wrap="square" rtlCol="0" anchor="ctr"/>
+          <a:lstStyle/>
+          <a:p>
+            <a:pPr marL="0" indent="0" algn="ctr">
+              <a:lnSpc>
+                <a:spcPts val="1400"/>
+              </a:lnSpc>
+              <a:buNone/>
+            </a:pPr>
+            <a:r>
+              <a:rPr lang="en-US" sz="1200" dirty="0">
+                <a:solidFill>
+                  <a:srgbClr val="1B1F27"/>
+                </a:solidFill>
+                <a:latin typeface="Calibri" pitchFamily="34" charset="0"/>
+                <a:ea typeface="Calibri" pitchFamily="34" charset="-122"/>
+                <a:cs typeface="Calibri" pitchFamily="34" charset="-120"/>
+              </a:rPr>
+              <a:t>Seconds to minutes</a:t>
+            </a:r>
+            <a:endParaRPr lang="en-US" sz="1200" dirty="0"/>
+          </a:p>
+        </p:txBody>
+      </p:sp>
+      <p:sp>
+        <p:nvSpPr>
+          <p:cNvPr id="26" name="Text 23">
+            <a:extLst>
+              <a:ext uri="{FF2B5EF4-FFF2-40B4-BE49-F238E27FC236}">
+                <a16:creationId xmlns:a16="http://schemas.microsoft.com/office/drawing/2014/main" id="{63518DBD-7722-681B-8E35-CC4DD9900D70}"/>
+              </a:ext>
+            </a:extLst>
+          </p:cNvPr>
+          <p:cNvSpPr/>
+          <p:nvPr/>
+        </p:nvSpPr>
+        <p:spPr>
+          <a:xfrm>
+            <a:off x="548640" y="4233672"/>
+            <a:ext cx="2606040" cy="566928"/>
+          </a:xfrm>
+          <a:prstGeom prst="rect">
+            <a:avLst/>
+          </a:prstGeom>
+          <a:noFill/>
+          <a:ln/>
+        </p:spPr>
+        <p:txBody>
+          <a:bodyPr wrap="square" rtlCol="0" anchor="ctr"/>
+          <a:lstStyle/>
+          <a:p>
+            <a:pPr marL="0" indent="0">
+              <a:buNone/>
+            </a:pPr>
+            <a:r>
+              <a:rPr lang="en-US" sz="1250" b="1" dirty="0">
+                <a:solidFill>
+                  <a:srgbClr val="1B1F27"/>
+                </a:solidFill>
+                <a:latin typeface="Calibri" pitchFamily="34" charset="0"/>
+                <a:ea typeface="Calibri" pitchFamily="34" charset="-122"/>
+                <a:cs typeface="Calibri" pitchFamily="34" charset="-120"/>
+              </a:rPr>
+              <a:t>Cost sensitivity</a:t>
+            </a:r>
+            <a:endParaRPr lang="en-US" sz="1250" dirty="0"/>
+          </a:p>
+        </p:txBody>
+      </p:sp>
+      <p:sp>
+        <p:nvSpPr>
+          <p:cNvPr id="27" name="Text 24">
+            <a:extLst>
+              <a:ext uri="{FF2B5EF4-FFF2-40B4-BE49-F238E27FC236}">
+                <a16:creationId xmlns:a16="http://schemas.microsoft.com/office/drawing/2014/main" id="{11442440-C18A-3E5C-0402-1927E38D2EE0}"/>
+              </a:ext>
+            </a:extLst>
+          </p:cNvPr>
+          <p:cNvSpPr/>
+          <p:nvPr/>
+        </p:nvSpPr>
+        <p:spPr>
+          <a:xfrm>
+            <a:off x="3337560" y="4233672"/>
+            <a:ext cx="2743200" cy="566928"/>
+          </a:xfrm>
+          <a:prstGeom prst="rect">
+            <a:avLst/>
+          </a:prstGeom>
+          <a:noFill/>
+          <a:ln/>
+        </p:spPr>
+        <p:txBody>
+          <a:bodyPr wrap="square" rtlCol="0" anchor="ctr"/>
+          <a:lstStyle/>
+          <a:p>
+            <a:pPr marL="0" indent="0" algn="ctr">
+              <a:lnSpc>
+                <a:spcPts val="1400"/>
+              </a:lnSpc>
+              <a:buNone/>
+            </a:pPr>
+            <a:r>
+              <a:rPr lang="en-US" sz="1200" dirty="0">
+                <a:solidFill>
+                  <a:srgbClr val="1B1F27"/>
+                </a:solidFill>
+                <a:latin typeface="Calibri" pitchFamily="34" charset="0"/>
+                <a:ea typeface="Calibri" pitchFamily="34" charset="-122"/>
+                <a:cs typeface="Calibri" pitchFamily="34" charset="-120"/>
+              </a:rPr>
+              <a:t>High volume, cheap</a:t>
+            </a:r>
+            <a:endParaRPr lang="en-US" sz="1200" dirty="0"/>
+          </a:p>
+        </p:txBody>
+      </p:sp>
+      <p:sp>
+        <p:nvSpPr>
+          <p:cNvPr id="28" name="Text 25">
+            <a:extLst>
+              <a:ext uri="{FF2B5EF4-FFF2-40B4-BE49-F238E27FC236}">
+                <a16:creationId xmlns:a16="http://schemas.microsoft.com/office/drawing/2014/main" id="{CC2A6A9F-6C39-EB1B-6237-907200758169}"/>
+              </a:ext>
+            </a:extLst>
+          </p:cNvPr>
+          <p:cNvSpPr/>
+          <p:nvPr/>
+        </p:nvSpPr>
+        <p:spPr>
+          <a:xfrm>
+            <a:off x="6355080" y="4233672"/>
+            <a:ext cx="2514600" cy="566928"/>
+          </a:xfrm>
+          <a:prstGeom prst="rect">
+            <a:avLst/>
+          </a:prstGeom>
+          <a:noFill/>
+          <a:ln/>
+        </p:spPr>
+        <p:txBody>
+          <a:bodyPr wrap="square" rtlCol="0" anchor="ctr"/>
+          <a:lstStyle/>
+          <a:p>
+            <a:pPr marL="0" indent="0" algn="ctr">
+              <a:lnSpc>
+                <a:spcPts val="1400"/>
+              </a:lnSpc>
+              <a:buNone/>
+            </a:pPr>
+            <a:r>
+              <a:rPr lang="en-US" sz="1200" dirty="0">
+                <a:solidFill>
+                  <a:srgbClr val="1B1F27"/>
+                </a:solidFill>
+                <a:latin typeface="Calibri" pitchFamily="34" charset="0"/>
+                <a:ea typeface="Calibri" pitchFamily="34" charset="-122"/>
+                <a:cs typeface="Calibri" pitchFamily="34" charset="-120"/>
+              </a:rPr>
+              <a:t>Moderate</a:t>
+            </a:r>
+            <a:endParaRPr lang="en-US" sz="1200" dirty="0"/>
+          </a:p>
+        </p:txBody>
+      </p:sp>
+      <p:sp>
+        <p:nvSpPr>
+          <p:cNvPr id="29" name="Text 26">
+            <a:extLst>
+              <a:ext uri="{FF2B5EF4-FFF2-40B4-BE49-F238E27FC236}">
+                <a16:creationId xmlns:a16="http://schemas.microsoft.com/office/drawing/2014/main" id="{4BACD8B6-4CF0-DAA4-376F-D8DF6DD35E28}"/>
+              </a:ext>
+            </a:extLst>
+          </p:cNvPr>
+          <p:cNvSpPr/>
+          <p:nvPr/>
+        </p:nvSpPr>
+        <p:spPr>
+          <a:xfrm>
+            <a:off x="9144000" y="4233672"/>
+            <a:ext cx="2468880" cy="566928"/>
+          </a:xfrm>
+          <a:prstGeom prst="rect">
+            <a:avLst/>
+          </a:prstGeom>
+          <a:noFill/>
+          <a:ln/>
+        </p:spPr>
+        <p:txBody>
+          <a:bodyPr wrap="square" rtlCol="0" anchor="ctr"/>
+          <a:lstStyle/>
+          <a:p>
+            <a:pPr marL="0" indent="0" algn="ctr">
+              <a:lnSpc>
+                <a:spcPts val="1400"/>
+              </a:lnSpc>
+              <a:buNone/>
+            </a:pPr>
+            <a:r>
+              <a:rPr lang="en-US" sz="1200" dirty="0">
+                <a:solidFill>
+                  <a:srgbClr val="1B1F27"/>
+                </a:solidFill>
+                <a:latin typeface="Calibri" pitchFamily="34" charset="0"/>
+                <a:ea typeface="Calibri" pitchFamily="34" charset="-122"/>
+                <a:cs typeface="Calibri" pitchFamily="34" charset="-120"/>
+              </a:rPr>
+              <a:t>Lower volume, high value</a:t>
+            </a:r>
+            <a:endParaRPr lang="en-US" sz="1200" dirty="0"/>
+          </a:p>
+        </p:txBody>
+      </p:sp>
+      <p:sp>
+        <p:nvSpPr>
+          <p:cNvPr id="30" name="Shape 27">
+            <a:extLst>
+              <a:ext uri="{FF2B5EF4-FFF2-40B4-BE49-F238E27FC236}">
+                <a16:creationId xmlns:a16="http://schemas.microsoft.com/office/drawing/2014/main" id="{20C3DC5B-FF8F-C84C-EBD9-B7F72073CDDE}"/>
+              </a:ext>
+            </a:extLst>
+          </p:cNvPr>
+          <p:cNvSpPr/>
+          <p:nvPr/>
+        </p:nvSpPr>
+        <p:spPr>
+          <a:xfrm>
+            <a:off x="548640" y="4837176"/>
+            <a:ext cx="11155680" cy="658368"/>
+          </a:xfrm>
+          <a:prstGeom prst="rect">
+            <a:avLst/>
+          </a:prstGeom>
+          <a:solidFill>
+            <a:srgbClr val="F4F7F9"/>
+          </a:solidFill>
+          <a:ln/>
+        </p:spPr>
+        <p:txBody>
+          <a:bodyPr/>
+          <a:lstStyle/>
+          <a:p>
+            <a:endParaRPr lang="en-US"/>
+          </a:p>
+        </p:txBody>
+      </p:sp>
+      <p:sp>
+        <p:nvSpPr>
+          <p:cNvPr id="31" name="Text 28">
+            <a:extLst>
+              <a:ext uri="{FF2B5EF4-FFF2-40B4-BE49-F238E27FC236}">
+                <a16:creationId xmlns:a16="http://schemas.microsoft.com/office/drawing/2014/main" id="{77C295D3-B964-1C42-F9CC-688A7C981D50}"/>
+              </a:ext>
+            </a:extLst>
+          </p:cNvPr>
+          <p:cNvSpPr/>
+          <p:nvPr/>
+        </p:nvSpPr>
+        <p:spPr>
+          <a:xfrm>
+            <a:off x="548640" y="4892040"/>
+            <a:ext cx="2606040" cy="566928"/>
+          </a:xfrm>
+          <a:prstGeom prst="rect">
+            <a:avLst/>
+          </a:prstGeom>
+          <a:noFill/>
+          <a:ln/>
+        </p:spPr>
+        <p:txBody>
+          <a:bodyPr wrap="square" rtlCol="0" anchor="ctr"/>
+          <a:lstStyle/>
+          <a:p>
+            <a:pPr marL="0" indent="0">
+              <a:buNone/>
+            </a:pPr>
+            <a:r>
+              <a:rPr lang="en-US" sz="1250" b="1" dirty="0">
+                <a:solidFill>
+                  <a:srgbClr val="1B1F27"/>
+                </a:solidFill>
+                <a:latin typeface="Calibri" pitchFamily="34" charset="0"/>
+                <a:ea typeface="Calibri" pitchFamily="34" charset="-122"/>
+                <a:cs typeface="Calibri" pitchFamily="34" charset="-120"/>
+              </a:rPr>
+              <a:t>Data control</a:t>
+            </a:r>
+            <a:endParaRPr lang="en-US" sz="1250" dirty="0"/>
+          </a:p>
+        </p:txBody>
+      </p:sp>
+      <p:sp>
+        <p:nvSpPr>
+          <p:cNvPr id="32" name="Text 29">
+            <a:extLst>
+              <a:ext uri="{FF2B5EF4-FFF2-40B4-BE49-F238E27FC236}">
+                <a16:creationId xmlns:a16="http://schemas.microsoft.com/office/drawing/2014/main" id="{E07D4367-C027-4A6D-00E5-AD47FD2CCB1A}"/>
+              </a:ext>
+            </a:extLst>
+          </p:cNvPr>
+          <p:cNvSpPr/>
+          <p:nvPr/>
+        </p:nvSpPr>
+        <p:spPr>
+          <a:xfrm>
+            <a:off x="3337560" y="4892040"/>
+            <a:ext cx="2743200" cy="566928"/>
+          </a:xfrm>
+          <a:prstGeom prst="rect">
+            <a:avLst/>
+          </a:prstGeom>
+          <a:noFill/>
+          <a:ln/>
+        </p:spPr>
+        <p:txBody>
+          <a:bodyPr wrap="square" rtlCol="0" anchor="ctr"/>
+          <a:lstStyle/>
+          <a:p>
+            <a:pPr marL="0" indent="0" algn="ctr">
+              <a:lnSpc>
+                <a:spcPts val="1400"/>
+              </a:lnSpc>
+              <a:buNone/>
+            </a:pPr>
+            <a:r>
+              <a:rPr lang="en-US" sz="1200" dirty="0">
+                <a:solidFill>
+                  <a:srgbClr val="1B1F27"/>
+                </a:solidFill>
+                <a:latin typeface="Calibri" pitchFamily="34" charset="0"/>
+                <a:ea typeface="Calibri" pitchFamily="34" charset="-122"/>
+                <a:cs typeface="Calibri" pitchFamily="34" charset="-120"/>
+              </a:rPr>
+              <a:t>On-device / on-prem</a:t>
+            </a:r>
+            <a:endParaRPr lang="en-US" sz="1200" dirty="0"/>
+          </a:p>
+        </p:txBody>
+      </p:sp>
+      <p:sp>
+        <p:nvSpPr>
+          <p:cNvPr id="33" name="Text 30">
+            <a:extLst>
+              <a:ext uri="{FF2B5EF4-FFF2-40B4-BE49-F238E27FC236}">
+                <a16:creationId xmlns:a16="http://schemas.microsoft.com/office/drawing/2014/main" id="{94CF5372-1D55-57CC-8587-2C28C80A2F2B}"/>
+              </a:ext>
+            </a:extLst>
+          </p:cNvPr>
+          <p:cNvSpPr/>
+          <p:nvPr/>
+        </p:nvSpPr>
+        <p:spPr>
+          <a:xfrm>
+            <a:off x="6355080" y="4892040"/>
+            <a:ext cx="2514600" cy="566928"/>
+          </a:xfrm>
+          <a:prstGeom prst="rect">
+            <a:avLst/>
+          </a:prstGeom>
+          <a:noFill/>
+          <a:ln/>
+        </p:spPr>
+        <p:txBody>
+          <a:bodyPr wrap="square" rtlCol="0" anchor="ctr"/>
+          <a:lstStyle/>
+          <a:p>
+            <a:pPr marL="0" indent="0" algn="ctr">
+              <a:lnSpc>
+                <a:spcPts val="1400"/>
+              </a:lnSpc>
+              <a:buNone/>
+            </a:pPr>
+            <a:r>
+              <a:rPr lang="en-US" sz="1200" dirty="0">
+                <a:solidFill>
+                  <a:srgbClr val="1B1F27"/>
+                </a:solidFill>
+                <a:latin typeface="Calibri" pitchFamily="34" charset="0"/>
+                <a:ea typeface="Calibri" pitchFamily="34" charset="-122"/>
+                <a:cs typeface="Calibri" pitchFamily="34" charset="-120"/>
+              </a:rPr>
+              <a:t>Flexible</a:t>
+            </a:r>
+            <a:endParaRPr lang="en-US" sz="1200" dirty="0"/>
+          </a:p>
+        </p:txBody>
+      </p:sp>
+      <p:sp>
+        <p:nvSpPr>
+          <p:cNvPr id="34" name="Text 31">
+            <a:extLst>
+              <a:ext uri="{FF2B5EF4-FFF2-40B4-BE49-F238E27FC236}">
+                <a16:creationId xmlns:a16="http://schemas.microsoft.com/office/drawing/2014/main" id="{17AE4626-940E-4E85-F3AF-4BFEEB1D5DD4}"/>
+              </a:ext>
+            </a:extLst>
+          </p:cNvPr>
+          <p:cNvSpPr/>
+          <p:nvPr/>
+        </p:nvSpPr>
+        <p:spPr>
+          <a:xfrm>
+            <a:off x="9144000" y="4892040"/>
+            <a:ext cx="2468880" cy="566928"/>
+          </a:xfrm>
+          <a:prstGeom prst="rect">
+            <a:avLst/>
+          </a:prstGeom>
+          <a:noFill/>
+          <a:ln/>
+        </p:spPr>
+        <p:txBody>
+          <a:bodyPr wrap="square" rtlCol="0" anchor="ctr"/>
+          <a:lstStyle/>
+          <a:p>
+            <a:pPr marL="0" indent="0" algn="ctr">
+              <a:lnSpc>
+                <a:spcPts val="1400"/>
+              </a:lnSpc>
+              <a:buNone/>
+            </a:pPr>
+            <a:r>
+              <a:rPr lang="en-US" sz="1200" dirty="0">
+                <a:solidFill>
+                  <a:srgbClr val="1B1F27"/>
+                </a:solidFill>
+                <a:latin typeface="Calibri" pitchFamily="34" charset="0"/>
+                <a:ea typeface="Calibri" pitchFamily="34" charset="-122"/>
+                <a:cs typeface="Calibri" pitchFamily="34" charset="-120"/>
+              </a:rPr>
+              <a:t>Usually hosted API</a:t>
+            </a:r>
+            <a:endParaRPr lang="en-US" sz="1200" dirty="0"/>
+          </a:p>
+        </p:txBody>
+      </p:sp>
+      <p:sp>
+        <p:nvSpPr>
+          <p:cNvPr id="35" name="Text 32">
+            <a:extLst>
+              <a:ext uri="{FF2B5EF4-FFF2-40B4-BE49-F238E27FC236}">
+                <a16:creationId xmlns:a16="http://schemas.microsoft.com/office/drawing/2014/main" id="{2BF3FAA4-4CEA-2AB2-7EFC-2B7591509D4F}"/>
+              </a:ext>
+            </a:extLst>
+          </p:cNvPr>
+          <p:cNvSpPr/>
+          <p:nvPr/>
+        </p:nvSpPr>
+        <p:spPr>
+          <a:xfrm>
+            <a:off x="457200" y="6446520"/>
+            <a:ext cx="3657600" cy="274320"/>
+          </a:xfrm>
+          <a:prstGeom prst="rect">
+            <a:avLst/>
+          </a:prstGeom>
+          <a:noFill/>
+          <a:ln/>
+        </p:spPr>
+        <p:txBody>
+          <a:bodyPr wrap="square" rtlCol="0" anchor="ctr"/>
+          <a:lstStyle/>
+          <a:p>
+            <a:pPr marL="0" indent="0" algn="l">
+              <a:buNone/>
+            </a:pPr>
+            <a:r>
+              <a:rPr lang="en-US" sz="1000" dirty="0">
+                <a:solidFill>
+                  <a:srgbClr val="5B6472"/>
+                </a:solidFill>
+                <a:latin typeface="Calibri" pitchFamily="34" charset="0"/>
+                <a:ea typeface="Calibri" pitchFamily="34" charset="-122"/>
+                <a:cs typeface="Calibri" pitchFamily="34" charset="-120"/>
+              </a:rPr>
+              <a:t>SLMs in Practice</a:t>
+            </a:r>
+            <a:endParaRPr lang="en-US" sz="1000" dirty="0"/>
+          </a:p>
+        </p:txBody>
+      </p:sp>
+      <p:sp>
+        <p:nvSpPr>
+          <p:cNvPr id="36" name="Text 33">
+            <a:extLst>
+              <a:ext uri="{FF2B5EF4-FFF2-40B4-BE49-F238E27FC236}">
+                <a16:creationId xmlns:a16="http://schemas.microsoft.com/office/drawing/2014/main" id="{8D6C27E8-154F-1193-04A0-2C5AEFAEA3E8}"/>
+              </a:ext>
+            </a:extLst>
+          </p:cNvPr>
+          <p:cNvSpPr/>
+          <p:nvPr/>
+        </p:nvSpPr>
+        <p:spPr>
+          <a:xfrm>
+            <a:off x="11274552" y="6446520"/>
+            <a:ext cx="457200" cy="274320"/>
+          </a:xfrm>
+          <a:prstGeom prst="rect">
+            <a:avLst/>
+          </a:prstGeom>
+          <a:noFill/>
+          <a:ln/>
+        </p:spPr>
+        <p:txBody>
+          <a:bodyPr wrap="square" rtlCol="0" anchor="ctr"/>
+          <a:lstStyle/>
+          <a:p>
+            <a:pPr marL="0" indent="0" algn="r">
+              <a:buNone/>
+            </a:pPr>
+            <a:r>
+              <a:rPr lang="en-US" sz="1000" dirty="0">
+                <a:solidFill>
+                  <a:srgbClr val="5B6472"/>
+                </a:solidFill>
+                <a:latin typeface="Calibri" pitchFamily="34" charset="0"/>
+                <a:ea typeface="Calibri" pitchFamily="34" charset="-122"/>
+                <a:cs typeface="Calibri" pitchFamily="34" charset="-120"/>
+              </a:rPr>
+              <a:t>4</a:t>
+            </a:r>
+            <a:endParaRPr lang="en-US" sz="1000" dirty="0"/>
+          </a:p>
+        </p:txBody>
+      </p:sp>
+    </p:spTree>
+    <p:extLst>
+      <p:ext uri="{BB962C8B-B14F-4D97-AF65-F5344CB8AC3E}">
+        <p14:creationId xmlns:p14="http://schemas.microsoft.com/office/powerpoint/2010/main" val="4273932333"/>
+      </p:ext>
+    </p:extLst>
+  </p:cSld>
+  <p:clrMapOvr>
+    <a:masterClrMapping/>
+  </p:clrMapOvr>
+</p:sld>
+</file>
+
+<file path=ppt/slides/slide6.xml><?xml version="1.0" encoding="utf-8"?>
+<p:sld xmlns:a="http://schemas.openxmlformats.org/drawingml/2006/main" xmlns:r="http://schemas.openxmlformats.org/officeDocument/2006/relationships" xmlns:p="http://schemas.openxmlformats.org/presentationml/2006/main">
   <p:cSld name="Slide 5">
     <p:bg>
       <p:bgPr>
         <a:solidFill>
           <a:srgbClr val="FFFFFF"/>
         </a:solidFill>
+        <a:effectLst/>
       </p:bgPr>
     </p:bg>
     <p:spTree>
@@ -4821,17 +5707,24 @@
           </a:solidFill>
           <a:ln/>
         </p:spPr>
+        <p:txBody>
+          <a:bodyPr/>
+          <a:lstStyle/>
+          <a:p>
+            <a:endParaRPr lang="en-US"/>
+          </a:p>
+        </p:txBody>
       </p:sp>
       <p:pic>
         <p:nvPicPr>
-          <p:cNvPr id="3" name="Image 0" descr="icons/server.png">    </p:cNvPr>
+          <p:cNvPr id="3" name="Image 0" descr="icons/server.png"/>
           <p:cNvPicPr>
             <a:picLocks noChangeAspect="1"/>
           </p:cNvPicPr>
           <p:nvPr/>
         </p:nvPicPr>
         <p:blipFill>
-          <a:blip r:embed="rId1"/>
+          <a:blip r:embed="rId3"/>
           <a:stretch>
             <a:fillRect/>
           </a:stretch>
@@ -4867,7 +5760,7 @@
           <a:bodyPr wrap="square" rtlCol="0" anchor="ctr"/>
           <a:lstStyle/>
           <a:p>
-            <a:pPr indent="0" marL="0">
+            <a:pPr marL="0" indent="0">
               <a:buNone/>
             </a:pPr>
             <a:r>
@@ -4906,7 +5799,7 @@
           <a:bodyPr wrap="square" rtlCol="0" anchor="ctr"/>
           <a:lstStyle/>
           <a:p>
-            <a:pPr indent="0" marL="0">
+            <a:pPr marL="0" indent="0">
               <a:buNone/>
             </a:pPr>
             <a:r>
@@ -4948,6 +5841,13 @@
             <a:prstDash val="solid"/>
           </a:ln>
         </p:spPr>
+        <p:txBody>
+          <a:bodyPr/>
+          <a:lstStyle/>
+          <a:p>
+            <a:endParaRPr lang="en-US"/>
+          </a:p>
+        </p:txBody>
       </p:sp>
       <p:sp>
         <p:nvSpPr>
@@ -4970,7 +5870,7 @@
           <a:bodyPr wrap="square" rtlCol="0" anchor="ctr"/>
           <a:lstStyle/>
           <a:p>
-            <a:pPr indent="0" marL="0">
+            <a:pPr marL="0" indent="0">
               <a:buNone/>
             </a:pPr>
             <a:r>
@@ -5009,7 +5909,7 @@
           <a:bodyPr wrap="square" rtlCol="0" anchor="ctr"/>
           <a:lstStyle/>
           <a:p>
-            <a:pPr indent="0" marL="0">
+            <a:pPr marL="0" indent="0">
               <a:buNone/>
             </a:pPr>
             <a:r>
@@ -5048,7 +5948,7 @@
           <a:bodyPr wrap="square" rtlCol="0" anchor="ctr"/>
           <a:lstStyle/>
           <a:p>
-            <a:pPr indent="0" marL="0">
+            <a:pPr marL="0" indent="0">
               <a:buNone/>
             </a:pPr>
             <a:r>
@@ -5090,6 +5990,13 @@
             <a:prstDash val="solid"/>
           </a:ln>
         </p:spPr>
+        <p:txBody>
+          <a:bodyPr/>
+          <a:lstStyle/>
+          <a:p>
+            <a:endParaRPr lang="en-US"/>
+          </a:p>
+        </p:txBody>
       </p:sp>
       <p:sp>
         <p:nvSpPr>
@@ -5112,7 +6019,7 @@
           <a:bodyPr wrap="square" rtlCol="0" anchor="ctr"/>
           <a:lstStyle/>
           <a:p>
-            <a:pPr indent="0" marL="0">
+            <a:pPr marL="0" indent="0">
               <a:buNone/>
             </a:pPr>
             <a:r>
@@ -5151,7 +6058,7 @@
           <a:bodyPr wrap="square" rtlCol="0" anchor="ctr"/>
           <a:lstStyle/>
           <a:p>
-            <a:pPr indent="0" marL="0">
+            <a:pPr marL="0" indent="0">
               <a:buNone/>
             </a:pPr>
             <a:r>
@@ -5190,7 +6097,7 @@
           <a:bodyPr wrap="square" rtlCol="0" anchor="ctr"/>
           <a:lstStyle/>
           <a:p>
-            <a:pPr indent="0" marL="0">
+            <a:pPr marL="0" indent="0">
               <a:buNone/>
             </a:pPr>
             <a:r>
@@ -5232,6 +6139,13 @@
             <a:prstDash val="solid"/>
           </a:ln>
         </p:spPr>
+        <p:txBody>
+          <a:bodyPr/>
+          <a:lstStyle/>
+          <a:p>
+            <a:endParaRPr lang="en-US"/>
+          </a:p>
+        </p:txBody>
       </p:sp>
       <p:sp>
         <p:nvSpPr>
@@ -5254,7 +6168,7 @@
           <a:bodyPr wrap="square" rtlCol="0" anchor="ctr"/>
           <a:lstStyle/>
           <a:p>
-            <a:pPr indent="0" marL="0">
+            <a:pPr marL="0" indent="0">
               <a:buNone/>
             </a:pPr>
             <a:r>
@@ -5293,7 +6207,7 @@
           <a:bodyPr wrap="square" rtlCol="0" anchor="ctr"/>
           <a:lstStyle/>
           <a:p>
-            <a:pPr indent="0" marL="0">
+            <a:pPr marL="0" indent="0">
               <a:buNone/>
             </a:pPr>
             <a:r>
@@ -5332,7 +6246,7 @@
           <a:bodyPr wrap="square" rtlCol="0" anchor="ctr"/>
           <a:lstStyle/>
           <a:p>
-            <a:pPr indent="0" marL="0">
+            <a:pPr marL="0" indent="0">
               <a:buNone/>
             </a:pPr>
             <a:r>
@@ -5374,6 +6288,13 @@
             <a:prstDash val="solid"/>
           </a:ln>
         </p:spPr>
+        <p:txBody>
+          <a:bodyPr/>
+          <a:lstStyle/>
+          <a:p>
+            <a:endParaRPr lang="en-US"/>
+          </a:p>
+        </p:txBody>
       </p:sp>
       <p:sp>
         <p:nvSpPr>
@@ -5396,7 +6317,7 @@
           <a:bodyPr wrap="square" rtlCol="0" anchor="ctr"/>
           <a:lstStyle/>
           <a:p>
-            <a:pPr indent="0" marL="0">
+            <a:pPr marL="0" indent="0">
               <a:buNone/>
             </a:pPr>
             <a:r>
@@ -5435,7 +6356,7 @@
           <a:bodyPr wrap="square" rtlCol="0" anchor="ctr"/>
           <a:lstStyle/>
           <a:p>
-            <a:pPr indent="0" marL="0">
+            <a:pPr marL="0" indent="0">
               <a:buNone/>
             </a:pPr>
             <a:r>
@@ -5474,7 +6395,7 @@
           <a:bodyPr wrap="square" rtlCol="0" anchor="ctr"/>
           <a:lstStyle/>
           <a:p>
-            <a:pPr indent="0" marL="0">
+            <a:pPr marL="0" indent="0">
               <a:buNone/>
             </a:pPr>
             <a:r>
@@ -5516,6 +6437,13 @@
             <a:prstDash val="solid"/>
           </a:ln>
         </p:spPr>
+        <p:txBody>
+          <a:bodyPr/>
+          <a:lstStyle/>
+          <a:p>
+            <a:endParaRPr lang="en-US"/>
+          </a:p>
+        </p:txBody>
       </p:sp>
       <p:sp>
         <p:nvSpPr>
@@ -5538,7 +6466,7 @@
           <a:bodyPr wrap="square" rtlCol="0" anchor="ctr"/>
           <a:lstStyle/>
           <a:p>
-            <a:pPr indent="0" marL="0">
+            <a:pPr marL="0" indent="0">
               <a:buNone/>
             </a:pPr>
             <a:r>
@@ -5577,7 +6505,7 @@
           <a:bodyPr wrap="square" rtlCol="0" anchor="ctr"/>
           <a:lstStyle/>
           <a:p>
-            <a:pPr indent="0" marL="0">
+            <a:pPr marL="0" indent="0">
               <a:buNone/>
             </a:pPr>
             <a:r>
@@ -5616,7 +6544,7 @@
           <a:bodyPr wrap="square" rtlCol="0" anchor="ctr"/>
           <a:lstStyle/>
           <a:p>
-            <a:pPr indent="0" marL="0">
+            <a:pPr marL="0" indent="0">
               <a:buNone/>
             </a:pPr>
             <a:r>
@@ -5658,6 +6586,13 @@
             <a:prstDash val="solid"/>
           </a:ln>
         </p:spPr>
+        <p:txBody>
+          <a:bodyPr/>
+          <a:lstStyle/>
+          <a:p>
+            <a:endParaRPr lang="en-US"/>
+          </a:p>
+        </p:txBody>
       </p:sp>
       <p:sp>
         <p:nvSpPr>
@@ -5680,7 +6615,7 @@
           <a:bodyPr wrap="square" rtlCol="0" anchor="ctr"/>
           <a:lstStyle/>
           <a:p>
-            <a:pPr indent="0" marL="0">
+            <a:pPr marL="0" indent="0">
               <a:buNone/>
             </a:pPr>
             <a:r>
@@ -5719,7 +6654,7 @@
           <a:bodyPr wrap="square" rtlCol="0" anchor="ctr"/>
           <a:lstStyle/>
           <a:p>
-            <a:pPr indent="0" marL="0">
+            <a:pPr marL="0" indent="0">
               <a:buNone/>
             </a:pPr>
             <a:r>
@@ -5758,7 +6693,7 @@
           <a:bodyPr wrap="square" rtlCol="0" anchor="ctr"/>
           <a:lstStyle/>
           <a:p>
-            <a:pPr indent="0" marL="0">
+            <a:pPr marL="0" indent="0">
               <a:buNone/>
             </a:pPr>
             <a:r>
@@ -5800,6 +6735,13 @@
             <a:prstDash val="solid"/>
           </a:ln>
         </p:spPr>
+        <p:txBody>
+          <a:bodyPr/>
+          <a:lstStyle/>
+          <a:p>
+            <a:endParaRPr lang="en-US"/>
+          </a:p>
+        </p:txBody>
       </p:sp>
       <p:sp>
         <p:nvSpPr>
@@ -5822,7 +6764,7 @@
           <a:bodyPr wrap="square" rtlCol="0" anchor="ctr"/>
           <a:lstStyle/>
           <a:p>
-            <a:pPr indent="0" marL="0">
+            <a:pPr marL="0" indent="0">
               <a:buNone/>
             </a:pPr>
             <a:r>
@@ -5861,7 +6803,7 @@
           <a:bodyPr wrap="square" rtlCol="0" anchor="ctr"/>
           <a:lstStyle/>
           <a:p>
-            <a:pPr indent="0" marL="0">
+            <a:pPr marL="0" indent="0">
               <a:buNone/>
             </a:pPr>
             <a:r>
@@ -5900,7 +6842,7 @@
           <a:bodyPr wrap="square" rtlCol="0" anchor="ctr"/>
           <a:lstStyle/>
           <a:p>
-            <a:pPr indent="0" marL="0">
+            <a:pPr marL="0" indent="0">
               <a:buNone/>
             </a:pPr>
             <a:r>
@@ -5944,6 +6886,13 @@
             <a:prstDash val="solid"/>
           </a:ln>
         </p:spPr>
+        <p:txBody>
+          <a:bodyPr/>
+          <a:lstStyle/>
+          <a:p>
+            <a:endParaRPr lang="en-US"/>
+          </a:p>
+        </p:txBody>
       </p:sp>
       <p:sp>
         <p:nvSpPr>
@@ -5966,7 +6915,7 @@
           <a:bodyPr wrap="square" rtlCol="0" anchor="ctr"/>
           <a:lstStyle/>
           <a:p>
-            <a:pPr indent="0" marL="0">
+            <a:pPr marL="0" indent="0">
               <a:buNone/>
             </a:pPr>
             <a:r>
@@ -6003,6 +6952,13 @@
           </a:solidFill>
           <a:ln/>
         </p:spPr>
+        <p:txBody>
+          <a:bodyPr/>
+          <a:lstStyle/>
+          <a:p>
+            <a:endParaRPr lang="en-US"/>
+          </a:p>
+        </p:txBody>
       </p:sp>
       <p:sp>
         <p:nvSpPr>
@@ -6025,7 +6981,7 @@
           <a:bodyPr wrap="square" rtlCol="0" anchor="ctr"/>
           <a:lstStyle/>
           <a:p>
-            <a:pPr indent="0" marL="0">
+            <a:pPr marL="0" indent="0">
               <a:buNone/>
             </a:pPr>
             <a:r>
@@ -6064,7 +7020,7 @@
           <a:bodyPr wrap="square" rtlCol="0" anchor="ctr"/>
           <a:lstStyle/>
           <a:p>
-            <a:pPr indent="0" marL="0">
+            <a:pPr marL="0" indent="0">
               <a:lnSpc>
                 <a:spcPts val="1400"/>
               </a:lnSpc>
@@ -6104,6 +7060,13 @@
           </a:solidFill>
           <a:ln/>
         </p:spPr>
+        <p:txBody>
+          <a:bodyPr/>
+          <a:lstStyle/>
+          <a:p>
+            <a:endParaRPr lang="en-US"/>
+          </a:p>
+        </p:txBody>
       </p:sp>
       <p:sp>
         <p:nvSpPr>
@@ -6126,7 +7089,7 @@
           <a:bodyPr wrap="square" rtlCol="0" anchor="ctr"/>
           <a:lstStyle/>
           <a:p>
-            <a:pPr indent="0" marL="0">
+            <a:pPr marL="0" indent="0">
               <a:buNone/>
             </a:pPr>
             <a:r>
@@ -6165,7 +7128,7 @@
           <a:bodyPr wrap="square" rtlCol="0" anchor="ctr"/>
           <a:lstStyle/>
           <a:p>
-            <a:pPr indent="0" marL="0">
+            <a:pPr marL="0" indent="0">
               <a:lnSpc>
                 <a:spcPts val="1400"/>
               </a:lnSpc>
@@ -6205,6 +7168,13 @@
           </a:solidFill>
           <a:ln/>
         </p:spPr>
+        <p:txBody>
+          <a:bodyPr/>
+          <a:lstStyle/>
+          <a:p>
+            <a:endParaRPr lang="en-US"/>
+          </a:p>
+        </p:txBody>
       </p:sp>
       <p:sp>
         <p:nvSpPr>
@@ -6227,7 +7197,7 @@
           <a:bodyPr wrap="square" rtlCol="0" anchor="ctr"/>
           <a:lstStyle/>
           <a:p>
-            <a:pPr indent="0" marL="0">
+            <a:pPr marL="0" indent="0">
               <a:buNone/>
             </a:pPr>
             <a:r>
@@ -6266,7 +7236,7 @@
           <a:bodyPr wrap="square" rtlCol="0" anchor="ctr"/>
           <a:lstStyle/>
           <a:p>
-            <a:pPr indent="0" marL="0">
+            <a:pPr marL="0" indent="0">
               <a:lnSpc>
                 <a:spcPts val="1400"/>
               </a:lnSpc>
@@ -6306,6 +7276,13 @@
           </a:solidFill>
           <a:ln/>
         </p:spPr>
+        <p:txBody>
+          <a:bodyPr/>
+          <a:lstStyle/>
+          <a:p>
+            <a:endParaRPr lang="en-US"/>
+          </a:p>
+        </p:txBody>
       </p:sp>
       <p:sp>
         <p:nvSpPr>
@@ -6328,7 +7305,7 @@
           <a:bodyPr wrap="square" rtlCol="0" anchor="ctr"/>
           <a:lstStyle/>
           <a:p>
-            <a:pPr indent="0" marL="0">
+            <a:pPr marL="0" indent="0">
               <a:buNone/>
             </a:pPr>
             <a:r>
@@ -6367,7 +7344,7 @@
           <a:bodyPr wrap="square" rtlCol="0" anchor="ctr"/>
           <a:lstStyle/>
           <a:p>
-            <a:pPr indent="0" marL="0">
+            <a:pPr marL="0" indent="0">
               <a:lnSpc>
                 <a:spcPts val="1400"/>
               </a:lnSpc>
@@ -6409,7 +7386,7 @@
           <a:bodyPr wrap="square" rtlCol="0" anchor="ctr"/>
           <a:lstStyle/>
           <a:p>
-            <a:pPr algn="l" indent="0" marL="0">
+            <a:pPr marL="0" indent="0" algn="l">
               <a:buNone/>
             </a:pPr>
             <a:r>
@@ -6448,7 +7425,7 @@
           <a:bodyPr wrap="square" rtlCol="0" anchor="ctr"/>
           <a:lstStyle/>
           <a:p>
-            <a:pPr algn="r" indent="0" marL="0">
+            <a:pPr marL="0" indent="0" algn="r">
               <a:buNone/>
             </a:pPr>
             <a:r>
@@ -6474,7 +7451,7 @@
 </p:sld>
 </file>
 
-<file path=ppt/slides/slide6.xml><?xml version="1.0" encoding="utf-8"?>
+<file path=ppt/slides/slide7.xml><?xml version="1.0" encoding="utf-8"?>
 <p:sld xmlns:a="http://schemas.openxmlformats.org/drawingml/2006/main" xmlns:r="http://schemas.openxmlformats.org/officeDocument/2006/relationships" xmlns:p="http://schemas.openxmlformats.org/presentationml/2006/main">
   <p:cSld name="Slide 6">
     <p:bg>
@@ -6482,6 +7459,7 @@
         <a:solidFill>
           <a:srgbClr val="FFFFFF"/>
         </a:solidFill>
+        <a:effectLst/>
       </p:bgPr>
     </p:bg>
     <p:spTree>
@@ -6517,301 +7495,17 @@
           </a:solidFill>
           <a:ln/>
         </p:spPr>
+        <p:txBody>
+          <a:bodyPr/>
+          <a:lstStyle/>
+          <a:p>
+            <a:endParaRPr lang="en-US"/>
+          </a:p>
+        </p:txBody>
       </p:sp>
       <p:pic>
         <p:nvPicPr>
-          <p:cNvPr id="3" name="Image 0" descr="icons/envelope.png">    </p:cNvPr>
-          <p:cNvPicPr>
-            <a:picLocks noChangeAspect="1"/>
-          </p:cNvPicPr>
-          <p:nvPr/>
-        </p:nvPicPr>
-        <p:blipFill>
-          <a:blip r:embed="rId1"/>
-          <a:stretch>
-            <a:fillRect/>
-          </a:stretch>
-        </p:blipFill>
-        <p:spPr>
-          <a:xfrm>
-            <a:off x="619963" y="574243"/>
-            <a:ext cx="405994" cy="405994"/>
-          </a:xfrm>
-          <a:prstGeom prst="rect">
-            <a:avLst/>
-          </a:prstGeom>
-        </p:spPr>
-      </p:pic>
-      <p:sp>
-        <p:nvSpPr>
-          <p:cNvPr id="4" name="Text 1"/>
-          <p:cNvSpPr/>
-          <p:nvPr/>
-        </p:nvSpPr>
-        <p:spPr>
-          <a:xfrm>
-            <a:off x="1234440" y="502920"/>
-            <a:ext cx="9144000" cy="548640"/>
-          </a:xfrm>
-          <a:prstGeom prst="rect">
-            <a:avLst/>
-          </a:prstGeom>
-          <a:noFill/>
-          <a:ln/>
-        </p:spPr>
-        <p:txBody>
-          <a:bodyPr wrap="square" rtlCol="0" anchor="ctr"/>
-          <a:lstStyle/>
-          <a:p>
-            <a:pPr indent="0" marL="0">
-              <a:buNone/>
-            </a:pPr>
-            <a:r>
-              <a:rPr lang="en-US" sz="3000" b="1" dirty="0">
-                <a:solidFill>
-                  <a:srgbClr val="1B1F27"/>
-                </a:solidFill>
-                <a:latin typeface="Cambria" pitchFamily="34" charset="0"/>
-                <a:ea typeface="Cambria" pitchFamily="34" charset="-122"/>
-                <a:cs typeface="Cambria" pitchFamily="34" charset="-120"/>
-              </a:rPr>
-              <a:t>SLM Use Case &amp; Demo</a:t>
-            </a:r>
-            <a:endParaRPr lang="en-US" sz="3000" dirty="0"/>
-          </a:p>
-        </p:txBody>
-      </p:sp>
-      <p:sp>
-        <p:nvSpPr>
-          <p:cNvPr id="5" name="Text 2"/>
-          <p:cNvSpPr/>
-          <p:nvPr/>
-        </p:nvSpPr>
-        <p:spPr>
-          <a:xfrm>
-            <a:off x="1234440" y="1051560"/>
-            <a:ext cx="9601200" cy="365760"/>
-          </a:xfrm>
-          <a:prstGeom prst="rect">
-            <a:avLst/>
-          </a:prstGeom>
-          <a:noFill/>
-          <a:ln/>
-        </p:spPr>
-        <p:txBody>
-          <a:bodyPr wrap="square" rtlCol="0" anchor="ctr"/>
-          <a:lstStyle/>
-          <a:p>
-            <a:pPr indent="0" marL="0">
-              <a:buNone/>
-            </a:pPr>
-            <a:r>
-              <a:rPr lang="en-US" sz="1300" i="1" dirty="0">
-                <a:solidFill>
-                  <a:srgbClr val="5B6472"/>
-                </a:solidFill>
-                <a:latin typeface="Calibri" pitchFamily="34" charset="0"/>
-                <a:ea typeface="Calibri" pitchFamily="34" charset="-122"/>
-                <a:cs typeface="Calibri" pitchFamily="34" charset="-120"/>
-              </a:rPr>
-              <a:t>Live: tagging today's inbox with a local SLM and a fixed taxonomy.</a:t>
-            </a:r>
-            <a:endParaRPr lang="en-US" sz="1300" dirty="0"/>
-          </a:p>
-        </p:txBody>
-      </p:sp>
-      <p:sp>
-        <p:nvSpPr>
-          <p:cNvPr id="6" name="Shape 3"/>
-          <p:cNvSpPr/>
-          <p:nvPr/>
-        </p:nvSpPr>
-        <p:spPr>
-          <a:xfrm>
-            <a:off x="548640" y="1828800"/>
-            <a:ext cx="2468880" cy="1600200"/>
-          </a:xfrm>
-          <a:prstGeom prst="roundRect">
-            <a:avLst>
-              <a:gd name="adj" fmla="val 5714"/>
-            </a:avLst>
-          </a:prstGeom>
-          <a:solidFill>
-            <a:srgbClr val="065A82"/>
-          </a:solidFill>
-          <a:ln/>
-        </p:spPr>
-      </p:sp>
-      <p:pic>
-        <p:nvPicPr>
-          <p:cNvPr id="7" name="Image 1" descr="icons/envelope.png">    </p:cNvPr>
-          <p:cNvPicPr>
-            <a:picLocks noChangeAspect="1"/>
-          </p:cNvPicPr>
-          <p:nvPr/>
-        </p:nvPicPr>
-        <p:blipFill>
-          <a:blip r:embed="rId2"/>
-          <a:stretch>
-            <a:fillRect/>
-          </a:stretch>
-        </p:blipFill>
-        <p:spPr>
-          <a:xfrm>
-            <a:off x="1527048" y="1975104"/>
-            <a:ext cx="512064" cy="512064"/>
-          </a:xfrm>
-          <a:prstGeom prst="rect">
-            <a:avLst/>
-          </a:prstGeom>
-        </p:spPr>
-      </p:pic>
-      <p:sp>
-        <p:nvSpPr>
-          <p:cNvPr id="8" name="Text 4"/>
-          <p:cNvSpPr/>
-          <p:nvPr/>
-        </p:nvSpPr>
-        <p:spPr>
-          <a:xfrm>
-            <a:off x="548640" y="2523744"/>
-            <a:ext cx="2468880" cy="320040"/>
-          </a:xfrm>
-          <a:prstGeom prst="rect">
-            <a:avLst/>
-          </a:prstGeom>
-          <a:noFill/>
-          <a:ln/>
-        </p:spPr>
-        <p:txBody>
-          <a:bodyPr wrap="square" rtlCol="0" anchor="ctr"/>
-          <a:lstStyle/>
-          <a:p>
-            <a:pPr algn="ctr" indent="0" marL="0">
-              <a:buNone/>
-            </a:pPr>
-            <a:r>
-              <a:rPr lang="en-US" sz="1500" b="1" dirty="0">
-                <a:solidFill>
-                  <a:srgbClr val="FFFFFF"/>
-                </a:solidFill>
-                <a:latin typeface="Calibri" pitchFamily="34" charset="0"/>
-                <a:ea typeface="Calibri" pitchFamily="34" charset="-122"/>
-                <a:cs typeface="Calibri" pitchFamily="34" charset="-120"/>
-              </a:rPr>
-              <a:t>Gmail</a:t>
-            </a:r>
-            <a:endParaRPr lang="en-US" sz="1500" dirty="0"/>
-          </a:p>
-        </p:txBody>
-      </p:sp>
-      <p:sp>
-        <p:nvSpPr>
-          <p:cNvPr id="9" name="Text 5"/>
-          <p:cNvSpPr/>
-          <p:nvPr/>
-        </p:nvSpPr>
-        <p:spPr>
-          <a:xfrm>
-            <a:off x="640080" y="2852928"/>
-            <a:ext cx="2286000" cy="530352"/>
-          </a:xfrm>
-          <a:prstGeom prst="rect">
-            <a:avLst/>
-          </a:prstGeom>
-          <a:noFill/>
-          <a:ln/>
-        </p:spPr>
-        <p:txBody>
-          <a:bodyPr wrap="square" rtlCol="0" anchor="ctr"/>
-          <a:lstStyle/>
-          <a:p>
-            <a:pPr algn="ctr" indent="0" marL="0">
-              <a:lnSpc>
-                <a:spcPts val="1300"/>
-              </a:lnSpc>
-              <a:buNone/>
-            </a:pPr>
-            <a:r>
-              <a:rPr lang="en-US" sz="1050" dirty="0">
-                <a:solidFill>
-                  <a:srgbClr val="EAF2F8"/>
-                </a:solidFill>
-                <a:latin typeface="Calibri" pitchFamily="34" charset="0"/>
-                <a:ea typeface="Calibri" pitchFamily="34" charset="-122"/>
-                <a:cs typeface="Calibri" pitchFamily="34" charset="-120"/>
-              </a:rPr>
-              <a:t>Fetch today's</a:t>
-            </a:r>
-            <a:endParaRPr lang="en-US" sz="1050" dirty="0"/>
-          </a:p>
-          <a:p>
-            <a:pPr algn="ctr" indent="0" marL="0">
-              <a:lnSpc>
-                <a:spcPts val="1300"/>
-              </a:lnSpc>
-              <a:buNone/>
-            </a:pPr>
-            <a:r>
-              <a:rPr lang="en-US" sz="1050" dirty="0">
-                <a:solidFill>
-                  <a:srgbClr val="EAF2F8"/>
-                </a:solidFill>
-                <a:latin typeface="Calibri" pitchFamily="34" charset="0"/>
-                <a:ea typeface="Calibri" pitchFamily="34" charset="-122"/>
-                <a:cs typeface="Calibri" pitchFamily="34" charset="-120"/>
-              </a:rPr>
-              <a:t>inbox (API)</a:t>
-            </a:r>
-            <a:endParaRPr lang="en-US" sz="1050" dirty="0"/>
-          </a:p>
-        </p:txBody>
-      </p:sp>
-      <p:sp>
-        <p:nvSpPr>
-          <p:cNvPr id="10" name="Shape 6"/>
-          <p:cNvSpPr/>
-          <p:nvPr/>
-        </p:nvSpPr>
-        <p:spPr>
-          <a:xfrm>
-            <a:off x="3054096" y="2500884"/>
-            <a:ext cx="429768" cy="256032"/>
-          </a:xfrm>
-          <a:prstGeom prst="chevron">
-            <a:avLst/>
-          </a:prstGeom>
-          <a:solidFill>
-            <a:srgbClr val="3FBF9F"/>
-          </a:solidFill>
-          <a:ln/>
-        </p:spPr>
-      </p:sp>
-      <p:sp>
-        <p:nvSpPr>
-          <p:cNvPr id="11" name="Shape 7"/>
-          <p:cNvSpPr/>
-          <p:nvPr/>
-        </p:nvSpPr>
-        <p:spPr>
-          <a:xfrm>
-            <a:off x="3520440" y="1828800"/>
-            <a:ext cx="2468880" cy="1600200"/>
-          </a:xfrm>
-          <a:prstGeom prst="roundRect">
-            <a:avLst>
-              <a:gd name="adj" fmla="val 5714"/>
-            </a:avLst>
-          </a:prstGeom>
-          <a:solidFill>
-            <a:srgbClr val="1C7293"/>
-          </a:solidFill>
-          <a:ln/>
-        </p:spPr>
-      </p:sp>
-      <p:pic>
-        <p:nvPicPr>
-          <p:cNvPr id="12" name="Image 2" descr="icons/microchip.png">    </p:cNvPr>
+          <p:cNvPr id="3" name="Image 0" descr="icons/envelope.png"/>
           <p:cNvPicPr>
             <a:picLocks noChangeAspect="1"/>
           </p:cNvPicPr>
@@ -6825,8 +7519,8 @@
         </p:blipFill>
         <p:spPr>
           <a:xfrm>
-            <a:off x="4498848" y="1975104"/>
-            <a:ext cx="512064" cy="512064"/>
+            <a:off x="619963" y="574243"/>
+            <a:ext cx="405994" cy="405994"/>
           </a:xfrm>
           <a:prstGeom prst="rect">
             <a:avLst/>
@@ -6835,134 +7529,91 @@
       </p:pic>
       <p:sp>
         <p:nvSpPr>
-          <p:cNvPr id="13" name="Text 8"/>
-          <p:cNvSpPr/>
-          <p:nvPr/>
-        </p:nvSpPr>
-        <p:spPr>
-          <a:xfrm>
-            <a:off x="3520440" y="2523744"/>
-            <a:ext cx="2468880" cy="320040"/>
-          </a:xfrm>
-          <a:prstGeom prst="rect">
-            <a:avLst/>
-          </a:prstGeom>
-          <a:noFill/>
-          <a:ln/>
-        </p:spPr>
-        <p:txBody>
-          <a:bodyPr wrap="square" rtlCol="0" anchor="ctr"/>
-          <a:lstStyle/>
-          <a:p>
-            <a:pPr algn="ctr" indent="0" marL="0">
-              <a:buNone/>
-            </a:pPr>
-            <a:r>
-              <a:rPr lang="en-US" sz="1500" b="1" dirty="0">
-                <a:solidFill>
-                  <a:srgbClr val="FFFFFF"/>
-                </a:solidFill>
-                <a:latin typeface="Calibri" pitchFamily="34" charset="0"/>
-                <a:ea typeface="Calibri" pitchFamily="34" charset="-122"/>
-                <a:cs typeface="Calibri" pitchFamily="34" charset="-120"/>
-              </a:rPr>
-              <a:t>SLM</a:t>
-            </a:r>
-            <a:endParaRPr lang="en-US" sz="1500" dirty="0"/>
-          </a:p>
-        </p:txBody>
-      </p:sp>
-      <p:sp>
-        <p:nvSpPr>
-          <p:cNvPr id="14" name="Text 9"/>
-          <p:cNvSpPr/>
-          <p:nvPr/>
-        </p:nvSpPr>
-        <p:spPr>
-          <a:xfrm>
-            <a:off x="3611880" y="2852928"/>
-            <a:ext cx="2286000" cy="530352"/>
-          </a:xfrm>
-          <a:prstGeom prst="rect">
-            <a:avLst/>
-          </a:prstGeom>
-          <a:noFill/>
-          <a:ln/>
-        </p:spPr>
-        <p:txBody>
-          <a:bodyPr wrap="square" rtlCol="0" anchor="ctr"/>
-          <a:lstStyle/>
-          <a:p>
-            <a:pPr algn="ctr" indent="0" marL="0">
-              <a:lnSpc>
-                <a:spcPts val="1300"/>
-              </a:lnSpc>
-              <a:buNone/>
-            </a:pPr>
-            <a:r>
-              <a:rPr lang="en-US" sz="1050" dirty="0">
-                <a:solidFill>
-                  <a:srgbClr val="EAF2F8"/>
-                </a:solidFill>
-                <a:latin typeface="Calibri" pitchFamily="34" charset="0"/>
-                <a:ea typeface="Calibri" pitchFamily="34" charset="-122"/>
-                <a:cs typeface="Calibri" pitchFamily="34" charset="-120"/>
-              </a:rPr>
-              <a:t>Qwen2.5-3B via</a:t>
-            </a:r>
-            <a:endParaRPr lang="en-US" sz="1050" dirty="0"/>
-          </a:p>
-          <a:p>
-            <a:pPr algn="ctr" indent="0" marL="0">
-              <a:lnSpc>
-                <a:spcPts val="1300"/>
-              </a:lnSpc>
-              <a:buNone/>
-            </a:pPr>
-            <a:r>
-              <a:rPr lang="en-US" sz="1050" dirty="0">
-                <a:solidFill>
-                  <a:srgbClr val="EAF2F8"/>
-                </a:solidFill>
-                <a:latin typeface="Calibri" pitchFamily="34" charset="0"/>
-                <a:ea typeface="Calibri" pitchFamily="34" charset="-122"/>
-                <a:cs typeface="Calibri" pitchFamily="34" charset="-120"/>
-              </a:rPr>
-              <a:t>Ollama, local</a:t>
-            </a:r>
-            <a:endParaRPr lang="en-US" sz="1050" dirty="0"/>
-          </a:p>
-        </p:txBody>
-      </p:sp>
-      <p:sp>
-        <p:nvSpPr>
-          <p:cNvPr id="15" name="Shape 10"/>
-          <p:cNvSpPr/>
-          <p:nvPr/>
-        </p:nvSpPr>
-        <p:spPr>
-          <a:xfrm>
-            <a:off x="6025896" y="2500884"/>
-            <a:ext cx="429768" cy="256032"/>
-          </a:xfrm>
-          <a:prstGeom prst="chevron">
-            <a:avLst/>
-          </a:prstGeom>
-          <a:solidFill>
-            <a:srgbClr val="3FBF9F"/>
-          </a:solidFill>
-          <a:ln/>
-        </p:spPr>
-      </p:sp>
-      <p:sp>
-        <p:nvSpPr>
-          <p:cNvPr id="16" name="Shape 11"/>
-          <p:cNvSpPr/>
-          <p:nvPr/>
-        </p:nvSpPr>
-        <p:spPr>
-          <a:xfrm>
-            <a:off x="6492240" y="1828800"/>
+          <p:cNvPr id="4" name="Text 1"/>
+          <p:cNvSpPr/>
+          <p:nvPr/>
+        </p:nvSpPr>
+        <p:spPr>
+          <a:xfrm>
+            <a:off x="1234440" y="502920"/>
+            <a:ext cx="9144000" cy="548640"/>
+          </a:xfrm>
+          <a:prstGeom prst="rect">
+            <a:avLst/>
+          </a:prstGeom>
+          <a:noFill/>
+          <a:ln/>
+        </p:spPr>
+        <p:txBody>
+          <a:bodyPr wrap="square" rtlCol="0" anchor="ctr"/>
+          <a:lstStyle/>
+          <a:p>
+            <a:pPr marL="0" indent="0">
+              <a:buNone/>
+            </a:pPr>
+            <a:r>
+              <a:rPr lang="en-US" sz="3000" b="1" dirty="0">
+                <a:solidFill>
+                  <a:srgbClr val="1B1F27"/>
+                </a:solidFill>
+                <a:latin typeface="Cambria" pitchFamily="34" charset="0"/>
+                <a:ea typeface="Cambria" pitchFamily="34" charset="-122"/>
+                <a:cs typeface="Cambria" pitchFamily="34" charset="-120"/>
+              </a:rPr>
+              <a:t>SLM Use Case &amp; Demo</a:t>
+            </a:r>
+            <a:endParaRPr lang="en-US" sz="3000" dirty="0"/>
+          </a:p>
+        </p:txBody>
+      </p:sp>
+      <p:sp>
+        <p:nvSpPr>
+          <p:cNvPr id="5" name="Text 2"/>
+          <p:cNvSpPr/>
+          <p:nvPr/>
+        </p:nvSpPr>
+        <p:spPr>
+          <a:xfrm>
+            <a:off x="1234440" y="1051560"/>
+            <a:ext cx="9601200" cy="365760"/>
+          </a:xfrm>
+          <a:prstGeom prst="rect">
+            <a:avLst/>
+          </a:prstGeom>
+          <a:noFill/>
+          <a:ln/>
+        </p:spPr>
+        <p:txBody>
+          <a:bodyPr wrap="square" rtlCol="0" anchor="ctr"/>
+          <a:lstStyle/>
+          <a:p>
+            <a:pPr marL="0" indent="0">
+              <a:buNone/>
+            </a:pPr>
+            <a:r>
+              <a:rPr lang="en-US" sz="1300" i="1" dirty="0">
+                <a:solidFill>
+                  <a:srgbClr val="5B6472"/>
+                </a:solidFill>
+                <a:latin typeface="Calibri" pitchFamily="34" charset="0"/>
+                <a:ea typeface="Calibri" pitchFamily="34" charset="-122"/>
+                <a:cs typeface="Calibri" pitchFamily="34" charset="-120"/>
+              </a:rPr>
+              <a:t>Live: tagging today's inbox with a local SLM and a fixed taxonomy.</a:t>
+            </a:r>
+            <a:endParaRPr lang="en-US" sz="1300" dirty="0"/>
+          </a:p>
+        </p:txBody>
+      </p:sp>
+      <p:sp>
+        <p:nvSpPr>
+          <p:cNvPr id="6" name="Shape 3"/>
+          <p:cNvSpPr/>
+          <p:nvPr/>
+        </p:nvSpPr>
+        <p:spPr>
+          <a:xfrm>
+            <a:off x="548640" y="1828800"/>
             <a:ext cx="2468880" cy="1600200"/>
           </a:xfrm>
           <a:prstGeom prst="roundRect">
@@ -6975,10 +7626,198 @@
           </a:solidFill>
           <a:ln/>
         </p:spPr>
+        <p:txBody>
+          <a:bodyPr/>
+          <a:lstStyle/>
+          <a:p>
+            <a:endParaRPr lang="en-US"/>
+          </a:p>
+        </p:txBody>
       </p:sp>
       <p:pic>
         <p:nvPicPr>
-          <p:cNvPr id="17" name="Image 3" descr="icons/tags.png">    </p:cNvPr>
+          <p:cNvPr id="7" name="Image 1" descr="icons/envelope.png"/>
+          <p:cNvPicPr>
+            <a:picLocks noChangeAspect="1"/>
+          </p:cNvPicPr>
+          <p:nvPr/>
+        </p:nvPicPr>
+        <p:blipFill>
+          <a:blip r:embed="rId3"/>
+          <a:stretch>
+            <a:fillRect/>
+          </a:stretch>
+        </p:blipFill>
+        <p:spPr>
+          <a:xfrm>
+            <a:off x="1527048" y="1975104"/>
+            <a:ext cx="512064" cy="512064"/>
+          </a:xfrm>
+          <a:prstGeom prst="rect">
+            <a:avLst/>
+          </a:prstGeom>
+        </p:spPr>
+      </p:pic>
+      <p:sp>
+        <p:nvSpPr>
+          <p:cNvPr id="8" name="Text 4"/>
+          <p:cNvSpPr/>
+          <p:nvPr/>
+        </p:nvSpPr>
+        <p:spPr>
+          <a:xfrm>
+            <a:off x="548640" y="2523744"/>
+            <a:ext cx="2468880" cy="320040"/>
+          </a:xfrm>
+          <a:prstGeom prst="rect">
+            <a:avLst/>
+          </a:prstGeom>
+          <a:noFill/>
+          <a:ln/>
+        </p:spPr>
+        <p:txBody>
+          <a:bodyPr wrap="square" rtlCol="0" anchor="ctr"/>
+          <a:lstStyle/>
+          <a:p>
+            <a:pPr marL="0" indent="0" algn="ctr">
+              <a:buNone/>
+            </a:pPr>
+            <a:r>
+              <a:rPr lang="en-US" sz="1500" b="1" dirty="0">
+                <a:solidFill>
+                  <a:srgbClr val="FFFFFF"/>
+                </a:solidFill>
+                <a:latin typeface="Calibri" pitchFamily="34" charset="0"/>
+                <a:ea typeface="Calibri" pitchFamily="34" charset="-122"/>
+                <a:cs typeface="Calibri" pitchFamily="34" charset="-120"/>
+              </a:rPr>
+              <a:t>Gmail</a:t>
+            </a:r>
+            <a:endParaRPr lang="en-US" sz="1500" dirty="0"/>
+          </a:p>
+        </p:txBody>
+      </p:sp>
+      <p:sp>
+        <p:nvSpPr>
+          <p:cNvPr id="9" name="Text 5"/>
+          <p:cNvSpPr/>
+          <p:nvPr/>
+        </p:nvSpPr>
+        <p:spPr>
+          <a:xfrm>
+            <a:off x="640080" y="2852928"/>
+            <a:ext cx="2286000" cy="530352"/>
+          </a:xfrm>
+          <a:prstGeom prst="rect">
+            <a:avLst/>
+          </a:prstGeom>
+          <a:noFill/>
+          <a:ln/>
+        </p:spPr>
+        <p:txBody>
+          <a:bodyPr wrap="square" rtlCol="0" anchor="ctr"/>
+          <a:lstStyle/>
+          <a:p>
+            <a:pPr marL="0" indent="0" algn="ctr">
+              <a:lnSpc>
+                <a:spcPts val="1300"/>
+              </a:lnSpc>
+              <a:buNone/>
+            </a:pPr>
+            <a:r>
+              <a:rPr lang="en-US" sz="1050" dirty="0">
+                <a:solidFill>
+                  <a:srgbClr val="EAF2F8"/>
+                </a:solidFill>
+                <a:latin typeface="Calibri" pitchFamily="34" charset="0"/>
+                <a:ea typeface="Calibri" pitchFamily="34" charset="-122"/>
+                <a:cs typeface="Calibri" pitchFamily="34" charset="-120"/>
+              </a:rPr>
+              <a:t>Fetch today's</a:t>
+            </a:r>
+            <a:endParaRPr lang="en-US" sz="1050" dirty="0"/>
+          </a:p>
+          <a:p>
+            <a:pPr marL="0" indent="0" algn="ctr">
+              <a:lnSpc>
+                <a:spcPts val="1300"/>
+              </a:lnSpc>
+              <a:buNone/>
+            </a:pPr>
+            <a:r>
+              <a:rPr lang="en-US" sz="1050" dirty="0">
+                <a:solidFill>
+                  <a:srgbClr val="EAF2F8"/>
+                </a:solidFill>
+                <a:latin typeface="Calibri" pitchFamily="34" charset="0"/>
+                <a:ea typeface="Calibri" pitchFamily="34" charset="-122"/>
+                <a:cs typeface="Calibri" pitchFamily="34" charset="-120"/>
+              </a:rPr>
+              <a:t>inbox (API)</a:t>
+            </a:r>
+            <a:endParaRPr lang="en-US" sz="1050" dirty="0"/>
+          </a:p>
+        </p:txBody>
+      </p:sp>
+      <p:sp>
+        <p:nvSpPr>
+          <p:cNvPr id="10" name="Shape 6"/>
+          <p:cNvSpPr/>
+          <p:nvPr/>
+        </p:nvSpPr>
+        <p:spPr>
+          <a:xfrm>
+            <a:off x="3054096" y="2500884"/>
+            <a:ext cx="429768" cy="256032"/>
+          </a:xfrm>
+          <a:prstGeom prst="chevron">
+            <a:avLst/>
+          </a:prstGeom>
+          <a:solidFill>
+            <a:srgbClr val="3FBF9F"/>
+          </a:solidFill>
+          <a:ln/>
+        </p:spPr>
+        <p:txBody>
+          <a:bodyPr/>
+          <a:lstStyle/>
+          <a:p>
+            <a:endParaRPr lang="en-US"/>
+          </a:p>
+        </p:txBody>
+      </p:sp>
+      <p:sp>
+        <p:nvSpPr>
+          <p:cNvPr id="11" name="Shape 7"/>
+          <p:cNvSpPr/>
+          <p:nvPr/>
+        </p:nvSpPr>
+        <p:spPr>
+          <a:xfrm>
+            <a:off x="3520440" y="1828800"/>
+            <a:ext cx="2468880" cy="1600200"/>
+          </a:xfrm>
+          <a:prstGeom prst="roundRect">
+            <a:avLst>
+              <a:gd name="adj" fmla="val 5714"/>
+            </a:avLst>
+          </a:prstGeom>
+          <a:solidFill>
+            <a:srgbClr val="1C7293"/>
+          </a:solidFill>
+          <a:ln/>
+        </p:spPr>
+        <p:txBody>
+          <a:bodyPr/>
+          <a:lstStyle/>
+          <a:p>
+            <a:endParaRPr lang="en-US"/>
+          </a:p>
+        </p:txBody>
+      </p:sp>
+      <p:pic>
+        <p:nvPicPr>
+          <p:cNvPr id="12" name="Image 2" descr="icons/microchip.png"/>
           <p:cNvPicPr>
             <a:picLocks noChangeAspect="1"/>
           </p:cNvPicPr>
@@ -6992,7 +7831,7 @@
         </p:blipFill>
         <p:spPr>
           <a:xfrm>
-            <a:off x="7470648" y="1975104"/>
+            <a:off x="4498848" y="1975104"/>
             <a:ext cx="512064" cy="512064"/>
           </a:xfrm>
           <a:prstGeom prst="rect">
@@ -7002,13 +7841,13 @@
       </p:pic>
       <p:sp>
         <p:nvSpPr>
-          <p:cNvPr id="18" name="Text 12"/>
-          <p:cNvSpPr/>
-          <p:nvPr/>
-        </p:nvSpPr>
-        <p:spPr>
-          <a:xfrm>
-            <a:off x="6492240" y="2523744"/>
+          <p:cNvPr id="13" name="Text 8"/>
+          <p:cNvSpPr/>
+          <p:nvPr/>
+        </p:nvSpPr>
+        <p:spPr>
+          <a:xfrm>
+            <a:off x="3520440" y="2523744"/>
             <a:ext cx="2468880" cy="320040"/>
           </a:xfrm>
           <a:prstGeom prst="rect">
@@ -7021,7 +7860,7 @@
           <a:bodyPr wrap="square" rtlCol="0" anchor="ctr"/>
           <a:lstStyle/>
           <a:p>
-            <a:pPr algn="ctr" indent="0" marL="0">
+            <a:pPr marL="0" indent="0" algn="ctr">
               <a:buNone/>
             </a:pPr>
             <a:r>
@@ -7033,7 +7872,7 @@
                 <a:ea typeface="Calibri" pitchFamily="34" charset="-122"/>
                 <a:cs typeface="Calibri" pitchFamily="34" charset="-120"/>
               </a:rPr>
-              <a:t>Taxonomy</a:t>
+              <a:t>SLM</a:t>
             </a:r>
             <a:endParaRPr lang="en-US" sz="1500" dirty="0"/>
           </a:p>
@@ -7041,13 +7880,13 @@
       </p:sp>
       <p:sp>
         <p:nvSpPr>
-          <p:cNvPr id="19" name="Text 13"/>
-          <p:cNvSpPr/>
-          <p:nvPr/>
-        </p:nvSpPr>
-        <p:spPr>
-          <a:xfrm>
-            <a:off x="6583680" y="2852928"/>
+          <p:cNvPr id="14" name="Text 9"/>
+          <p:cNvSpPr/>
+          <p:nvPr/>
+        </p:nvSpPr>
+        <p:spPr>
+          <a:xfrm>
+            <a:off x="3611880" y="2852928"/>
             <a:ext cx="2286000" cy="530352"/>
           </a:xfrm>
           <a:prstGeom prst="rect">
@@ -7060,7 +7899,7 @@
           <a:bodyPr wrap="square" rtlCol="0" anchor="ctr"/>
           <a:lstStyle/>
           <a:p>
-            <a:pPr algn="ctr" indent="0" marL="0">
+            <a:pPr marL="0" indent="0" algn="ctr">
               <a:lnSpc>
                 <a:spcPts val="1300"/>
               </a:lnSpc>
@@ -7075,12 +7914,12 @@
                 <a:ea typeface="Calibri" pitchFamily="34" charset="-122"/>
                 <a:cs typeface="Calibri" pitchFamily="34" charset="-120"/>
               </a:rPr>
-              <a:t>Fixed tag set +</a:t>
+              <a:t>Qwen2.5-3B via</a:t>
             </a:r>
             <a:endParaRPr lang="en-US" sz="1050" dirty="0"/>
           </a:p>
           <a:p>
-            <a:pPr algn="ctr" indent="0" marL="0">
+            <a:pPr marL="0" indent="0" algn="ctr">
               <a:lnSpc>
                 <a:spcPts val="1300"/>
               </a:lnSpc>
@@ -7095,7 +7934,7 @@
                 <a:ea typeface="Calibri" pitchFamily="34" charset="-122"/>
                 <a:cs typeface="Calibri" pitchFamily="34" charset="-120"/>
               </a:rPr>
-              <a:t>descriptions</a:t>
+              <a:t>Ollama, local</a:t>
             </a:r>
             <a:endParaRPr lang="en-US" sz="1050" dirty="0"/>
           </a:p>
@@ -7103,13 +7942,13 @@
       </p:sp>
       <p:sp>
         <p:nvSpPr>
-          <p:cNvPr id="20" name="Shape 14"/>
-          <p:cNvSpPr/>
-          <p:nvPr/>
-        </p:nvSpPr>
-        <p:spPr>
-          <a:xfrm>
-            <a:off x="8997696" y="2500884"/>
+          <p:cNvPr id="15" name="Shape 10"/>
+          <p:cNvSpPr/>
+          <p:nvPr/>
+        </p:nvSpPr>
+        <p:spPr>
+          <a:xfrm>
+            <a:off x="6025896" y="2500884"/>
             <a:ext cx="429768" cy="256032"/>
           </a:xfrm>
           <a:prstGeom prst="chevron">
@@ -7120,16 +7959,23 @@
           </a:solidFill>
           <a:ln/>
         </p:spPr>
-      </p:sp>
-      <p:sp>
-        <p:nvSpPr>
-          <p:cNvPr id="21" name="Shape 15"/>
-          <p:cNvSpPr/>
-          <p:nvPr/>
-        </p:nvSpPr>
-        <p:spPr>
-          <a:xfrm>
-            <a:off x="9464040" y="1828800"/>
+        <p:txBody>
+          <a:bodyPr/>
+          <a:lstStyle/>
+          <a:p>
+            <a:endParaRPr lang="en-US"/>
+          </a:p>
+        </p:txBody>
+      </p:sp>
+      <p:sp>
+        <p:nvSpPr>
+          <p:cNvPr id="16" name="Shape 11"/>
+          <p:cNvSpPr/>
+          <p:nvPr/>
+        </p:nvSpPr>
+        <p:spPr>
+          <a:xfrm>
+            <a:off x="6492240" y="1828800"/>
             <a:ext cx="2468880" cy="1600200"/>
           </a:xfrm>
           <a:prstGeom prst="roundRect">
@@ -7138,14 +7984,21 @@
             </a:avLst>
           </a:prstGeom>
           <a:solidFill>
-            <a:srgbClr val="1C7293"/>
+            <a:srgbClr val="065A82"/>
           </a:solidFill>
           <a:ln/>
         </p:spPr>
+        <p:txBody>
+          <a:bodyPr/>
+          <a:lstStyle/>
+          <a:p>
+            <a:endParaRPr lang="en-US"/>
+          </a:p>
+        </p:txBody>
       </p:sp>
       <p:pic>
         <p:nvPicPr>
-          <p:cNvPr id="22" name="Image 4" descr="icons/check.png">    </p:cNvPr>
+          <p:cNvPr id="17" name="Image 3" descr="icons/tags.png"/>
           <p:cNvPicPr>
             <a:picLocks noChangeAspect="1"/>
           </p:cNvPicPr>
@@ -7159,7 +8012,7 @@
         </p:blipFill>
         <p:spPr>
           <a:xfrm>
-            <a:off x="10442448" y="1975104"/>
+            <a:off x="7470648" y="1975104"/>
             <a:ext cx="512064" cy="512064"/>
           </a:xfrm>
           <a:prstGeom prst="rect">
@@ -7169,13 +8022,13 @@
       </p:pic>
       <p:sp>
         <p:nvSpPr>
-          <p:cNvPr id="23" name="Text 16"/>
-          <p:cNvSpPr/>
-          <p:nvPr/>
-        </p:nvSpPr>
-        <p:spPr>
-          <a:xfrm>
-            <a:off x="9464040" y="2523744"/>
+          <p:cNvPr id="18" name="Text 12"/>
+          <p:cNvSpPr/>
+          <p:nvPr/>
+        </p:nvSpPr>
+        <p:spPr>
+          <a:xfrm>
+            <a:off x="6492240" y="2523744"/>
             <a:ext cx="2468880" cy="320040"/>
           </a:xfrm>
           <a:prstGeom prst="rect">
@@ -7188,7 +8041,7 @@
           <a:bodyPr wrap="square" rtlCol="0" anchor="ctr"/>
           <a:lstStyle/>
           <a:p>
-            <a:pPr algn="ctr" indent="0" marL="0">
+            <a:pPr marL="0" indent="0" algn="ctr">
               <a:buNone/>
             </a:pPr>
             <a:r>
@@ -7200,7 +8053,7 @@
                 <a:ea typeface="Calibri" pitchFamily="34" charset="-122"/>
                 <a:cs typeface="Calibri" pitchFamily="34" charset="-120"/>
               </a:rPr>
-              <a:t>Dashboard</a:t>
+              <a:t>Taxonomy</a:t>
             </a:r>
             <a:endParaRPr lang="en-US" sz="1500" dirty="0"/>
           </a:p>
@@ -7208,13 +8061,13 @@
       </p:sp>
       <p:sp>
         <p:nvSpPr>
-          <p:cNvPr id="24" name="Text 17"/>
-          <p:cNvSpPr/>
-          <p:nvPr/>
-        </p:nvSpPr>
-        <p:spPr>
-          <a:xfrm>
-            <a:off x="9555480" y="2852928"/>
+          <p:cNvPr id="19" name="Text 13"/>
+          <p:cNvSpPr/>
+          <p:nvPr/>
+        </p:nvSpPr>
+        <p:spPr>
+          <a:xfrm>
+            <a:off x="6583680" y="2852928"/>
             <a:ext cx="2286000" cy="530352"/>
           </a:xfrm>
           <a:prstGeom prst="rect">
@@ -7227,7 +8080,7 @@
           <a:bodyPr wrap="square" rtlCol="0" anchor="ctr"/>
           <a:lstStyle/>
           <a:p>
-            <a:pPr algn="ctr" indent="0" marL="0">
+            <a:pPr marL="0" indent="0" algn="ctr">
               <a:lnSpc>
                 <a:spcPts val="1300"/>
               </a:lnSpc>
@@ -7242,12 +8095,12 @@
                 <a:ea typeface="Calibri" pitchFamily="34" charset="-122"/>
                 <a:cs typeface="Calibri" pitchFamily="34" charset="-120"/>
               </a:rPr>
-              <a:t>Streamlit UI,</a:t>
+              <a:t>Fixed tag set +</a:t>
             </a:r>
             <a:endParaRPr lang="en-US" sz="1050" dirty="0"/>
           </a:p>
           <a:p>
-            <a:pPr algn="ctr" indent="0" marL="0">
+            <a:pPr marL="0" indent="0" algn="ctr">
               <a:lnSpc>
                 <a:spcPts val="1300"/>
               </a:lnSpc>
@@ -7262,7 +8115,7 @@
                 <a:ea typeface="Calibri" pitchFamily="34" charset="-122"/>
                 <a:cs typeface="Calibri" pitchFamily="34" charset="-120"/>
               </a:rPr>
-              <a:t>tags + filter</a:t>
+              <a:t>descriptions</a:t>
             </a:r>
             <a:endParaRPr lang="en-US" sz="1050" dirty="0"/>
           </a:p>
@@ -7270,55 +8123,16 @@
       </p:sp>
       <p:sp>
         <p:nvSpPr>
-          <p:cNvPr id="25" name="Text 18"/>
-          <p:cNvSpPr/>
-          <p:nvPr/>
-        </p:nvSpPr>
-        <p:spPr>
-          <a:xfrm>
-            <a:off x="548640" y="3886200"/>
-            <a:ext cx="5486400" cy="365760"/>
-          </a:xfrm>
-          <a:prstGeom prst="rect">
-            <a:avLst/>
-          </a:prstGeom>
-          <a:noFill/>
-          <a:ln/>
-        </p:spPr>
-        <p:txBody>
-          <a:bodyPr wrap="square" rtlCol="0" anchor="ctr"/>
-          <a:lstStyle/>
-          <a:p>
-            <a:pPr indent="0" marL="0">
-              <a:buNone/>
-            </a:pPr>
-            <a:r>
-              <a:rPr lang="en-US" sz="1500" b="1" dirty="0">
-                <a:solidFill>
-                  <a:srgbClr val="065A82"/>
-                </a:solidFill>
-                <a:latin typeface="Calibri" pitchFamily="34" charset="0"/>
-                <a:ea typeface="Calibri" pitchFamily="34" charset="-122"/>
-                <a:cs typeface="Calibri" pitchFamily="34" charset="-120"/>
-              </a:rPr>
-              <a:t>What the demo showed</a:t>
-            </a:r>
-            <a:endParaRPr lang="en-US" sz="1500" dirty="0"/>
-          </a:p>
-        </p:txBody>
-      </p:sp>
-      <p:sp>
-        <p:nvSpPr>
-          <p:cNvPr id="26" name="Shape 19"/>
-          <p:cNvSpPr/>
-          <p:nvPr/>
-        </p:nvSpPr>
-        <p:spPr>
-          <a:xfrm>
-            <a:off x="548640" y="4370832"/>
-            <a:ext cx="128016" cy="128016"/>
-          </a:xfrm>
-          <a:prstGeom prst="ellipse">
+          <p:cNvPr id="20" name="Shape 14"/>
+          <p:cNvSpPr/>
+          <p:nvPr/>
+        </p:nvSpPr>
+        <p:spPr>
+          <a:xfrm>
+            <a:off x="8997696" y="2500884"/>
+            <a:ext cx="429768" cy="256032"/>
+          </a:xfrm>
+          <a:prstGeom prst="chevron">
             <a:avLst/>
           </a:prstGeom>
           <a:solidFill>
@@ -7326,6 +8140,233 @@
           </a:solidFill>
           <a:ln/>
         </p:spPr>
+        <p:txBody>
+          <a:bodyPr/>
+          <a:lstStyle/>
+          <a:p>
+            <a:endParaRPr lang="en-US"/>
+          </a:p>
+        </p:txBody>
+      </p:sp>
+      <p:sp>
+        <p:nvSpPr>
+          <p:cNvPr id="21" name="Shape 15"/>
+          <p:cNvSpPr/>
+          <p:nvPr/>
+        </p:nvSpPr>
+        <p:spPr>
+          <a:xfrm>
+            <a:off x="9464040" y="1828800"/>
+            <a:ext cx="2468880" cy="1600200"/>
+          </a:xfrm>
+          <a:prstGeom prst="roundRect">
+            <a:avLst>
+              <a:gd name="adj" fmla="val 5714"/>
+            </a:avLst>
+          </a:prstGeom>
+          <a:solidFill>
+            <a:srgbClr val="1C7293"/>
+          </a:solidFill>
+          <a:ln/>
+        </p:spPr>
+        <p:txBody>
+          <a:bodyPr/>
+          <a:lstStyle/>
+          <a:p>
+            <a:endParaRPr lang="en-US"/>
+          </a:p>
+        </p:txBody>
+      </p:sp>
+      <p:pic>
+        <p:nvPicPr>
+          <p:cNvPr id="22" name="Image 4" descr="icons/check.png"/>
+          <p:cNvPicPr>
+            <a:picLocks noChangeAspect="1"/>
+          </p:cNvPicPr>
+          <p:nvPr/>
+        </p:nvPicPr>
+        <p:blipFill>
+          <a:blip r:embed="rId6"/>
+          <a:stretch>
+            <a:fillRect/>
+          </a:stretch>
+        </p:blipFill>
+        <p:spPr>
+          <a:xfrm>
+            <a:off x="10442448" y="1975104"/>
+            <a:ext cx="512064" cy="512064"/>
+          </a:xfrm>
+          <a:prstGeom prst="rect">
+            <a:avLst/>
+          </a:prstGeom>
+        </p:spPr>
+      </p:pic>
+      <p:sp>
+        <p:nvSpPr>
+          <p:cNvPr id="23" name="Text 16"/>
+          <p:cNvSpPr/>
+          <p:nvPr/>
+        </p:nvSpPr>
+        <p:spPr>
+          <a:xfrm>
+            <a:off x="9464040" y="2523744"/>
+            <a:ext cx="2468880" cy="320040"/>
+          </a:xfrm>
+          <a:prstGeom prst="rect">
+            <a:avLst/>
+          </a:prstGeom>
+          <a:noFill/>
+          <a:ln/>
+        </p:spPr>
+        <p:txBody>
+          <a:bodyPr wrap="square" rtlCol="0" anchor="ctr"/>
+          <a:lstStyle/>
+          <a:p>
+            <a:pPr marL="0" indent="0" algn="ctr">
+              <a:buNone/>
+            </a:pPr>
+            <a:r>
+              <a:rPr lang="en-US" sz="1500" b="1" dirty="0">
+                <a:solidFill>
+                  <a:srgbClr val="FFFFFF"/>
+                </a:solidFill>
+                <a:latin typeface="Calibri" pitchFamily="34" charset="0"/>
+                <a:ea typeface="Calibri" pitchFamily="34" charset="-122"/>
+                <a:cs typeface="Calibri" pitchFamily="34" charset="-120"/>
+              </a:rPr>
+              <a:t>Dashboard</a:t>
+            </a:r>
+            <a:endParaRPr lang="en-US" sz="1500" dirty="0"/>
+          </a:p>
+        </p:txBody>
+      </p:sp>
+      <p:sp>
+        <p:nvSpPr>
+          <p:cNvPr id="24" name="Text 17"/>
+          <p:cNvSpPr/>
+          <p:nvPr/>
+        </p:nvSpPr>
+        <p:spPr>
+          <a:xfrm>
+            <a:off x="9555480" y="2852928"/>
+            <a:ext cx="2286000" cy="530352"/>
+          </a:xfrm>
+          <a:prstGeom prst="rect">
+            <a:avLst/>
+          </a:prstGeom>
+          <a:noFill/>
+          <a:ln/>
+        </p:spPr>
+        <p:txBody>
+          <a:bodyPr wrap="square" rtlCol="0" anchor="ctr"/>
+          <a:lstStyle/>
+          <a:p>
+            <a:pPr marL="0" indent="0" algn="ctr">
+              <a:lnSpc>
+                <a:spcPts val="1300"/>
+              </a:lnSpc>
+              <a:buNone/>
+            </a:pPr>
+            <a:r>
+              <a:rPr lang="en-US" sz="1050" dirty="0">
+                <a:solidFill>
+                  <a:srgbClr val="EAF2F8"/>
+                </a:solidFill>
+                <a:latin typeface="Calibri" pitchFamily="34" charset="0"/>
+                <a:ea typeface="Calibri" pitchFamily="34" charset="-122"/>
+                <a:cs typeface="Calibri" pitchFamily="34" charset="-120"/>
+              </a:rPr>
+              <a:t>Streamlit UI,</a:t>
+            </a:r>
+            <a:endParaRPr lang="en-US" sz="1050" dirty="0"/>
+          </a:p>
+          <a:p>
+            <a:pPr marL="0" indent="0" algn="ctr">
+              <a:lnSpc>
+                <a:spcPts val="1300"/>
+              </a:lnSpc>
+              <a:buNone/>
+            </a:pPr>
+            <a:r>
+              <a:rPr lang="en-US" sz="1050" dirty="0">
+                <a:solidFill>
+                  <a:srgbClr val="EAF2F8"/>
+                </a:solidFill>
+                <a:latin typeface="Calibri" pitchFamily="34" charset="0"/>
+                <a:ea typeface="Calibri" pitchFamily="34" charset="-122"/>
+                <a:cs typeface="Calibri" pitchFamily="34" charset="-120"/>
+              </a:rPr>
+              <a:t>tags + filter</a:t>
+            </a:r>
+            <a:endParaRPr lang="en-US" sz="1050" dirty="0"/>
+          </a:p>
+        </p:txBody>
+      </p:sp>
+      <p:sp>
+        <p:nvSpPr>
+          <p:cNvPr id="25" name="Text 18"/>
+          <p:cNvSpPr/>
+          <p:nvPr/>
+        </p:nvSpPr>
+        <p:spPr>
+          <a:xfrm>
+            <a:off x="548640" y="3886200"/>
+            <a:ext cx="5486400" cy="365760"/>
+          </a:xfrm>
+          <a:prstGeom prst="rect">
+            <a:avLst/>
+          </a:prstGeom>
+          <a:noFill/>
+          <a:ln/>
+        </p:spPr>
+        <p:txBody>
+          <a:bodyPr wrap="square" rtlCol="0" anchor="ctr"/>
+          <a:lstStyle/>
+          <a:p>
+            <a:pPr marL="0" indent="0">
+              <a:buNone/>
+            </a:pPr>
+            <a:r>
+              <a:rPr lang="en-US" sz="1500" b="1" dirty="0">
+                <a:solidFill>
+                  <a:srgbClr val="065A82"/>
+                </a:solidFill>
+                <a:latin typeface="Calibri" pitchFamily="34" charset="0"/>
+                <a:ea typeface="Calibri" pitchFamily="34" charset="-122"/>
+                <a:cs typeface="Calibri" pitchFamily="34" charset="-120"/>
+              </a:rPr>
+              <a:t>What the demo showed</a:t>
+            </a:r>
+            <a:endParaRPr lang="en-US" sz="1500" dirty="0"/>
+          </a:p>
+        </p:txBody>
+      </p:sp>
+      <p:sp>
+        <p:nvSpPr>
+          <p:cNvPr id="26" name="Shape 19"/>
+          <p:cNvSpPr/>
+          <p:nvPr/>
+        </p:nvSpPr>
+        <p:spPr>
+          <a:xfrm>
+            <a:off x="548640" y="4370832"/>
+            <a:ext cx="128016" cy="128016"/>
+          </a:xfrm>
+          <a:prstGeom prst="ellipse">
+            <a:avLst/>
+          </a:prstGeom>
+          <a:solidFill>
+            <a:srgbClr val="3FBF9F"/>
+          </a:solidFill>
+          <a:ln/>
+        </p:spPr>
+        <p:txBody>
+          <a:bodyPr/>
+          <a:lstStyle/>
+          <a:p>
+            <a:endParaRPr lang="en-US"/>
+          </a:p>
+        </p:txBody>
       </p:sp>
       <p:sp>
         <p:nvSpPr>
@@ -7348,7 +8389,7 @@
           <a:bodyPr wrap="square" rtlCol="0" anchor="ctr"/>
           <a:lstStyle/>
           <a:p>
-            <a:pPr indent="0" marL="0">
+            <a:pPr marL="0" indent="0">
               <a:lnSpc>
                 <a:spcPts val="1700"/>
               </a:lnSpc>
@@ -7388,6 +8429,13 @@
           </a:solidFill>
           <a:ln/>
         </p:spPr>
+        <p:txBody>
+          <a:bodyPr/>
+          <a:lstStyle/>
+          <a:p>
+            <a:endParaRPr lang="en-US"/>
+          </a:p>
+        </p:txBody>
       </p:sp>
       <p:sp>
         <p:nvSpPr>
@@ -7410,7 +8458,7 @@
           <a:bodyPr wrap="square" rtlCol="0" anchor="ctr"/>
           <a:lstStyle/>
           <a:p>
-            <a:pPr indent="0" marL="0">
+            <a:pPr marL="0" indent="0">
               <a:lnSpc>
                 <a:spcPts val="1700"/>
               </a:lnSpc>
@@ -7450,6 +8498,13 @@
           </a:solidFill>
           <a:ln/>
         </p:spPr>
+        <p:txBody>
+          <a:bodyPr/>
+          <a:lstStyle/>
+          <a:p>
+            <a:endParaRPr lang="en-US"/>
+          </a:p>
+        </p:txBody>
       </p:sp>
       <p:sp>
         <p:nvSpPr>
@@ -7472,7 +8527,7 @@
           <a:bodyPr wrap="square" rtlCol="0" anchor="ctr"/>
           <a:lstStyle/>
           <a:p>
-            <a:pPr indent="0" marL="0">
+            <a:pPr marL="0" indent="0">
               <a:lnSpc>
                 <a:spcPts val="1700"/>
               </a:lnSpc>
@@ -7514,7 +8569,7 @@
           <a:bodyPr wrap="square" rtlCol="0" anchor="ctr"/>
           <a:lstStyle/>
           <a:p>
-            <a:pPr algn="l" indent="0" marL="0">
+            <a:pPr marL="0" indent="0" algn="l">
               <a:buNone/>
             </a:pPr>
             <a:r>
@@ -7553,7 +8608,7 @@
           <a:bodyPr wrap="square" rtlCol="0" anchor="ctr"/>
           <a:lstStyle/>
           <a:p>
-            <a:pPr algn="r" indent="0" marL="0">
+            <a:pPr marL="0" indent="0" algn="r">
               <a:buNone/>
             </a:pPr>
             <a:r>
@@ -7579,7 +8634,7 @@
 </p:sld>
 </file>
 
-<file path=ppt/slides/slide7.xml><?xml version="1.0" encoding="utf-8"?>
+<file path=ppt/slides/slide8.xml><?xml version="1.0" encoding="utf-8"?>
 <p:sld xmlns:a="http://schemas.openxmlformats.org/drawingml/2006/main" xmlns:r="http://schemas.openxmlformats.org/officeDocument/2006/relationships" xmlns:p="http://schemas.openxmlformats.org/presentationml/2006/main">
   <p:cSld name="Slide 7">
     <p:bg>
@@ -7587,6 +8642,7 @@
         <a:solidFill>
           <a:srgbClr val="21295C"/>
         </a:solidFill>
+        <a:effectLst/>
       </p:bgPr>
     </p:bg>
     <p:spTree>
@@ -7622,17 +8678,24 @@
           </a:solidFill>
           <a:ln/>
         </p:spPr>
+        <p:txBody>
+          <a:bodyPr/>
+          <a:lstStyle/>
+          <a:p>
+            <a:endParaRPr lang="en-US"/>
+          </a:p>
+        </p:txBody>
       </p:sp>
       <p:pic>
         <p:nvPicPr>
-          <p:cNvPr id="3" name="Image 0" descr="icons/check.png">    </p:cNvPr>
+          <p:cNvPr id="3" name="Image 0" descr="icons/check.png"/>
           <p:cNvPicPr>
             <a:picLocks noChangeAspect="1"/>
           </p:cNvPicPr>
           <p:nvPr/>
         </p:nvPicPr>
         <p:blipFill>
-          <a:blip r:embed="rId1"/>
+          <a:blip r:embed="rId3"/>
           <a:stretch>
             <a:fillRect/>
           </a:stretch>
@@ -7668,7 +8731,7 @@
           <a:bodyPr wrap="square" rtlCol="0" anchor="ctr"/>
           <a:lstStyle/>
           <a:p>
-            <a:pPr algn="ctr" indent="0" marL="0">
+            <a:pPr marL="0" indent="0" algn="ctr">
               <a:buNone/>
             </a:pPr>
             <a:r>
@@ -7707,7 +8770,7 @@
           <a:bodyPr wrap="square" rtlCol="0" anchor="ctr"/>
           <a:lstStyle/>
           <a:p>
-            <a:pPr algn="ctr" indent="0" marL="0">
+            <a:pPr marL="0" indent="0" algn="ctr">
               <a:buNone/>
             </a:pPr>
             <a:r>
@@ -8026,4 +9089,319 @@
     </a:ext>
   </a:extLst>
 </a:theme>
+</file>
+
+<file path=ppt/theme/theme2.xml><?xml version="1.0" encoding="utf-8"?>
+<a:theme xmlns:a="http://schemas.openxmlformats.org/drawingml/2006/main" name="Office Theme">
+  <a:themeElements>
+    <a:clrScheme name="Office">
+      <a:dk1>
+        <a:sysClr val="windowText" lastClr="000000"/>
+      </a:dk1>
+      <a:lt1>
+        <a:sysClr val="window" lastClr="FFFFFF"/>
+      </a:lt1>
+      <a:dk2>
+        <a:srgbClr val="0E2841"/>
+      </a:dk2>
+      <a:lt2>
+        <a:srgbClr val="E8E8E8"/>
+      </a:lt2>
+      <a:accent1>
+        <a:srgbClr val="156082"/>
+      </a:accent1>
+      <a:accent2>
+        <a:srgbClr val="E97132"/>
+      </a:accent2>
+      <a:accent3>
+        <a:srgbClr val="196B24"/>
+      </a:accent3>
+      <a:accent4>
+        <a:srgbClr val="0F9ED5"/>
+      </a:accent4>
+      <a:accent5>
+        <a:srgbClr val="A02B93"/>
+      </a:accent5>
+      <a:accent6>
+        <a:srgbClr val="4EA72E"/>
+      </a:accent6>
+      <a:hlink>
+        <a:srgbClr val="467886"/>
+      </a:hlink>
+      <a:folHlink>
+        <a:srgbClr val="96607D"/>
+      </a:folHlink>
+    </a:clrScheme>
+    <a:fontScheme name="Office">
+      <a:majorFont>
+        <a:latin typeface="Aptos Display" panose="02110004020202020204"/>
+        <a:ea typeface=""/>
+        <a:cs typeface=""/>
+        <a:font script="Jpan" typeface="游ゴシック Light"/>
+        <a:font script="Hang" typeface="맑은 고딕"/>
+        <a:font script="Hans" typeface="等线 Light"/>
+        <a:font script="Hant" typeface="新細明體"/>
+        <a:font script="Arab" typeface="Times New Roman"/>
+        <a:font script="Hebr" typeface="Times New Roman"/>
+        <a:font script="Thai" typeface="Angsana New"/>
+        <a:font script="Ethi" typeface="Nyala"/>
+        <a:font script="Beng" typeface="Vrinda"/>
+        <a:font script="Gujr" typeface="Shruti"/>
+        <a:font script="Khmr" typeface="MoolBoran"/>
+        <a:font script="Knda" typeface="Tunga"/>
+        <a:font script="Guru" typeface="Raavi"/>
+        <a:font script="Cans" typeface="Euphemia"/>
+        <a:font script="Cher" typeface="Plantagenet Cherokee"/>
+        <a:font script="Yiii" typeface="Microsoft Yi Baiti"/>
+        <a:font script="Tibt" typeface="Microsoft Himalaya"/>
+        <a:font script="Thaa" typeface="MV Boli"/>
+        <a:font script="Deva" typeface="Mangal"/>
+        <a:font script="Telu" typeface="Gautami"/>
+        <a:font script="Taml" typeface="Latha"/>
+        <a:font script="Syrc" typeface="Estrangelo Edessa"/>
+        <a:font script="Orya" typeface="Kalinga"/>
+        <a:font script="Mlym" typeface="Kartika"/>
+        <a:font script="Laoo" typeface="DokChampa"/>
+        <a:font script="Sinh" typeface="Iskoola Pota"/>
+        <a:font script="Mong" typeface="Mongolian Baiti"/>
+        <a:font script="Viet" typeface="Times New Roman"/>
+        <a:font script="Uigh" typeface="Microsoft Uighur"/>
+        <a:font script="Geor" typeface="Sylfaen"/>
+        <a:font script="Armn" typeface="Arial"/>
+        <a:font script="Bugi" typeface="Leelawadee UI"/>
+        <a:font script="Bopo" typeface="Microsoft JhengHei"/>
+        <a:font script="Java" typeface="Javanese Text"/>
+        <a:font script="Lisu" typeface="Segoe UI"/>
+        <a:font script="Mymr" typeface="Myanmar Text"/>
+        <a:font script="Nkoo" typeface="Ebrima"/>
+        <a:font script="Olck" typeface="Nirmala UI"/>
+        <a:font script="Osma" typeface="Ebrima"/>
+        <a:font script="Phag" typeface="Phagspa"/>
+        <a:font script="Syrn" typeface="Estrangelo Edessa"/>
+        <a:font script="Syrj" typeface="Estrangelo Edessa"/>
+        <a:font script="Syre" typeface="Estrangelo Edessa"/>
+        <a:font script="Sora" typeface="Nirmala UI"/>
+        <a:font script="Tale" typeface="Microsoft Tai Le"/>
+        <a:font script="Talu" typeface="Microsoft New Tai Lue"/>
+        <a:font script="Tfng" typeface="Ebrima"/>
+      </a:majorFont>
+      <a:minorFont>
+        <a:latin typeface="Aptos" panose="02110004020202020204"/>
+        <a:ea typeface=""/>
+        <a:cs typeface=""/>
+        <a:font script="Jpan" typeface="游ゴシック"/>
+        <a:font script="Hang" typeface="맑은 고딕"/>
+        <a:font script="Hans" typeface="等线"/>
+        <a:font script="Hant" typeface="新細明體"/>
+        <a:font script="Arab" typeface="Arial"/>
+        <a:font script="Hebr" typeface="Arial"/>
+        <a:font script="Thai" typeface="Cordia New"/>
+        <a:font script="Ethi" typeface="Nyala"/>
+        <a:font script="Beng" typeface="Vrinda"/>
+        <a:font script="Gujr" typeface="Shruti"/>
+        <a:font script="Khmr" typeface="DaunPenh"/>
+        <a:font script="Knda" typeface="Tunga"/>
+        <a:font script="Guru" typeface="Raavi"/>
+        <a:font script="Cans" typeface="Euphemia"/>
+        <a:font script="Cher" typeface="Plantagenet Cherokee"/>
+        <a:font script="Yiii" typeface="Microsoft Yi Baiti"/>
+        <a:font script="Tibt" typeface="Microsoft Himalaya"/>
+        <a:font script="Thaa" typeface="MV Boli"/>
+        <a:font script="Deva" typeface="Mangal"/>
+        <a:font script="Telu" typeface="Gautami"/>
+        <a:font script="Taml" typeface="Latha"/>
+        <a:font script="Syrc" typeface="Estrangelo Edessa"/>
+        <a:font script="Orya" typeface="Kalinga"/>
+        <a:font script="Mlym" typeface="Kartika"/>
+        <a:font script="Laoo" typeface="DokChampa"/>
+        <a:font script="Sinh" typeface="Iskoola Pota"/>
+        <a:font script="Mong" typeface="Mongolian Baiti"/>
+        <a:font script="Viet" typeface="Arial"/>
+        <a:font script="Uigh" typeface="Microsoft Uighur"/>
+        <a:font script="Geor" typeface="Sylfaen"/>
+        <a:font script="Armn" typeface="Arial"/>
+        <a:font script="Bugi" typeface="Leelawadee UI"/>
+        <a:font script="Bopo" typeface="Microsoft JhengHei"/>
+        <a:font script="Java" typeface="Javanese Text"/>
+        <a:font script="Lisu" typeface="Segoe UI"/>
+        <a:font script="Mymr" typeface="Myanmar Text"/>
+        <a:font script="Nkoo" typeface="Ebrima"/>
+        <a:font script="Olck" typeface="Nirmala UI"/>
+        <a:font script="Osma" typeface="Ebrima"/>
+        <a:font script="Phag" typeface="Phagspa"/>
+        <a:font script="Syrn" typeface="Estrangelo Edessa"/>
+        <a:font script="Syrj" typeface="Estrangelo Edessa"/>
+        <a:font script="Syre" typeface="Estrangelo Edessa"/>
+        <a:font script="Sora" typeface="Nirmala UI"/>
+        <a:font script="Tale" typeface="Microsoft Tai Le"/>
+        <a:font script="Talu" typeface="Microsoft New Tai Lue"/>
+        <a:font script="Tfng" typeface="Ebrima"/>
+      </a:minorFont>
+    </a:fontScheme>
+    <a:fmtScheme name="Office">
+      <a:fillStyleLst>
+        <a:solidFill>
+          <a:schemeClr val="phClr"/>
+        </a:solidFill>
+        <a:gradFill rotWithShape="1">
+          <a:gsLst>
+            <a:gs pos="0">
+              <a:schemeClr val="phClr">
+                <a:lumMod val="110000"/>
+                <a:satMod val="105000"/>
+                <a:tint val="67000"/>
+              </a:schemeClr>
+            </a:gs>
+            <a:gs pos="50000">
+              <a:schemeClr val="phClr">
+                <a:lumMod val="105000"/>
+                <a:satMod val="103000"/>
+                <a:tint val="73000"/>
+              </a:schemeClr>
+            </a:gs>
+            <a:gs pos="100000">
+              <a:schemeClr val="phClr">
+                <a:lumMod val="105000"/>
+                <a:satMod val="109000"/>
+                <a:tint val="81000"/>
+              </a:schemeClr>
+            </a:gs>
+          </a:gsLst>
+          <a:lin ang="5400000" scaled="0"/>
+        </a:gradFill>
+        <a:gradFill rotWithShape="1">
+          <a:gsLst>
+            <a:gs pos="0">
+              <a:schemeClr val="phClr">
+                <a:satMod val="103000"/>
+                <a:lumMod val="102000"/>
+                <a:tint val="94000"/>
+              </a:schemeClr>
+            </a:gs>
+            <a:gs pos="50000">
+              <a:schemeClr val="phClr">
+                <a:satMod val="110000"/>
+                <a:lumMod val="100000"/>
+                <a:shade val="100000"/>
+              </a:schemeClr>
+            </a:gs>
+            <a:gs pos="100000">
+              <a:schemeClr val="phClr">
+                <a:lumMod val="99000"/>
+                <a:satMod val="120000"/>
+                <a:shade val="78000"/>
+              </a:schemeClr>
+            </a:gs>
+          </a:gsLst>
+          <a:lin ang="5400000" scaled="0"/>
+        </a:gradFill>
+      </a:fillStyleLst>
+      <a:lnStyleLst>
+        <a:ln w="12700" cap="flat" cmpd="sng" algn="ctr">
+          <a:solidFill>
+            <a:schemeClr val="phClr"/>
+          </a:solidFill>
+          <a:prstDash val="solid"/>
+          <a:miter lim="800000"/>
+        </a:ln>
+        <a:ln w="19050" cap="flat" cmpd="sng" algn="ctr">
+          <a:solidFill>
+            <a:schemeClr val="phClr"/>
+          </a:solidFill>
+          <a:prstDash val="solid"/>
+          <a:miter lim="800000"/>
+        </a:ln>
+        <a:ln w="25400" cap="flat" cmpd="sng" algn="ctr">
+          <a:solidFill>
+            <a:schemeClr val="phClr"/>
+          </a:solidFill>
+          <a:prstDash val="solid"/>
+          <a:miter lim="800000"/>
+        </a:ln>
+      </a:lnStyleLst>
+      <a:effectStyleLst>
+        <a:effectStyle>
+          <a:effectLst/>
+        </a:effectStyle>
+        <a:effectStyle>
+          <a:effectLst/>
+        </a:effectStyle>
+        <a:effectStyle>
+          <a:effectLst>
+            <a:outerShdw blurRad="57150" dist="19050" dir="5400000" algn="ctr" rotWithShape="0">
+              <a:srgbClr val="000000">
+                <a:alpha val="63000"/>
+              </a:srgbClr>
+            </a:outerShdw>
+          </a:effectLst>
+        </a:effectStyle>
+      </a:effectStyleLst>
+      <a:bgFillStyleLst>
+        <a:solidFill>
+          <a:schemeClr val="phClr"/>
+        </a:solidFill>
+        <a:solidFill>
+          <a:schemeClr val="phClr">
+            <a:tint val="95000"/>
+            <a:satMod val="170000"/>
+          </a:schemeClr>
+        </a:solidFill>
+        <a:gradFill rotWithShape="1">
+          <a:gsLst>
+            <a:gs pos="0">
+              <a:schemeClr val="phClr">
+                <a:tint val="93000"/>
+                <a:satMod val="150000"/>
+                <a:shade val="98000"/>
+                <a:lumMod val="102000"/>
+              </a:schemeClr>
+            </a:gs>
+            <a:gs pos="50000">
+              <a:schemeClr val="phClr">
+                <a:tint val="98000"/>
+                <a:satMod val="130000"/>
+                <a:shade val="90000"/>
+                <a:lumMod val="103000"/>
+              </a:schemeClr>
+            </a:gs>
+            <a:gs pos="100000">
+              <a:schemeClr val="phClr">
+                <a:shade val="63000"/>
+                <a:satMod val="120000"/>
+              </a:schemeClr>
+            </a:gs>
+          </a:gsLst>
+          <a:lin ang="5400000" scaled="0"/>
+        </a:gradFill>
+      </a:bgFillStyleLst>
+    </a:fmtScheme>
+  </a:themeElements>
+  <a:objectDefaults>
+    <a:lnDef>
+      <a:spPr/>
+      <a:bodyPr/>
+      <a:lstStyle/>
+      <a:style>
+        <a:lnRef idx="2">
+          <a:schemeClr val="accent1"/>
+        </a:lnRef>
+        <a:fillRef idx="0">
+          <a:schemeClr val="accent1"/>
+        </a:fillRef>
+        <a:effectRef idx="1">
+          <a:schemeClr val="accent1"/>
+        </a:effectRef>
+        <a:fontRef idx="minor">
+          <a:schemeClr val="tx1"/>
+        </a:fontRef>
+      </a:style>
+    </a:lnDef>
+  </a:objectDefaults>
+  <a:extraClrSchemeLst/>
+  <a:extLst>
+    <a:ext uri="{05A4C25C-085E-4340-85A3-A5531E510DB2}">
+      <thm15:themeFamily xmlns:thm15="http://schemas.microsoft.com/office/thememl/2012/main" name="Office Theme" id="{2E142A2C-CD16-42D6-873A-C26D2A0506FA}" vid="{1BDDFF52-6CD6-40A5-AB3C-68EB2F1E4D0A}"/>
+    </a:ext>
+  </a:extLst>
+</a:theme>
 </file>